--- a/presentations/experimento/experimento_codex.pptx
+++ b/presentations/experimento/experimento_codex.pptx
@@ -2,34 +2,35 @@
 <file path=ppt/presentation.xml><?xml version="1.0" encoding="utf-8"?>
 <p:presentation xmlns:p="http://schemas.openxmlformats.org/presentationml/2006/main">
   <p:sldMasterIdLst>
-    <p:sldMasterId xmlns:r="http://schemas.openxmlformats.org/officeDocument/2006/relationships" id="2147483648" r:id="R4a78a7a15c154ee5"/>
+    <p:sldMasterId xmlns:r="http://schemas.openxmlformats.org/officeDocument/2006/relationships" id="2147483648" r:id="Rb13926ad6cfd47fb"/>
   </p:sldMasterIdLst>
   <p:notesMasterIdLst>
-    <p:notesMasterId xmlns:r="http://schemas.openxmlformats.org/officeDocument/2006/relationships" r:id="R32aa0e2452ee4a3a"/>
+    <p:notesMasterId xmlns:r="http://schemas.openxmlformats.org/officeDocument/2006/relationships" r:id="Re46fb52d687d41a3"/>
   </p:notesMasterIdLst>
   <p:sldIdLst>
-    <p:sldId xmlns:r="http://schemas.openxmlformats.org/officeDocument/2006/relationships" id="256" r:id="R12ee7e1a7bf34dc5"/>
-    <p:sldId xmlns:r="http://schemas.openxmlformats.org/officeDocument/2006/relationships" id="257" r:id="Re91c3bfa7dc24fd0"/>
-    <p:sldId xmlns:r="http://schemas.openxmlformats.org/officeDocument/2006/relationships" id="258" r:id="R6bd95aeb63ce4111"/>
-    <p:sldId xmlns:r="http://schemas.openxmlformats.org/officeDocument/2006/relationships" id="259" r:id="R9d987a1335374ad2"/>
-    <p:sldId xmlns:r="http://schemas.openxmlformats.org/officeDocument/2006/relationships" id="260" r:id="R57d133aa666840f8"/>
-    <p:sldId xmlns:r="http://schemas.openxmlformats.org/officeDocument/2006/relationships" id="261" r:id="R1e29bb0f59b24018"/>
-    <p:sldId xmlns:r="http://schemas.openxmlformats.org/officeDocument/2006/relationships" id="262" r:id="R30c5863601384724"/>
-    <p:sldId xmlns:r="http://schemas.openxmlformats.org/officeDocument/2006/relationships" id="263" r:id="Rd3b0558432b14929"/>
-    <p:sldId xmlns:r="http://schemas.openxmlformats.org/officeDocument/2006/relationships" id="264" r:id="R8e8b0ee04e8246a2"/>
-    <p:sldId xmlns:r="http://schemas.openxmlformats.org/officeDocument/2006/relationships" id="265" r:id="R295e744908314d5a"/>
-    <p:sldId xmlns:r="http://schemas.openxmlformats.org/officeDocument/2006/relationships" id="266" r:id="R708a7b05bac249b7"/>
-    <p:sldId xmlns:r="http://schemas.openxmlformats.org/officeDocument/2006/relationships" id="267" r:id="R32c707e8ab5c4eb7"/>
-    <p:sldId xmlns:r="http://schemas.openxmlformats.org/officeDocument/2006/relationships" id="268" r:id="R208c0fe8a6304ad1"/>
-    <p:sldId xmlns:r="http://schemas.openxmlformats.org/officeDocument/2006/relationships" id="269" r:id="R159ac4957ecc4326"/>
-    <p:sldId xmlns:r="http://schemas.openxmlformats.org/officeDocument/2006/relationships" id="270" r:id="R4335c49d61324c8e"/>
-    <p:sldId xmlns:r="http://schemas.openxmlformats.org/officeDocument/2006/relationships" id="271" r:id="R36c259a014e44057"/>
-    <p:sldId xmlns:r="http://schemas.openxmlformats.org/officeDocument/2006/relationships" id="272" r:id="Rb335c4de65e64cdf"/>
-    <p:sldId xmlns:r="http://schemas.openxmlformats.org/officeDocument/2006/relationships" id="273" r:id="Ra474464a28614957"/>
-    <p:sldId xmlns:r="http://schemas.openxmlformats.org/officeDocument/2006/relationships" id="274" r:id="R35339e97aaab4c43"/>
-    <p:sldId xmlns:r="http://schemas.openxmlformats.org/officeDocument/2006/relationships" id="275" r:id="Rb95a38a84bc347c9"/>
-    <p:sldId xmlns:r="http://schemas.openxmlformats.org/officeDocument/2006/relationships" id="276" r:id="R6d49882700384316"/>
-    <p:sldId xmlns:r="http://schemas.openxmlformats.org/officeDocument/2006/relationships" id="277" r:id="Rbef391a7483c407e"/>
+    <p:sldId xmlns:r="http://schemas.openxmlformats.org/officeDocument/2006/relationships" id="256" r:id="R7475babc903e4955"/>
+    <p:sldId xmlns:r="http://schemas.openxmlformats.org/officeDocument/2006/relationships" id="257" r:id="R5cd3e5dff7eb40ee"/>
+    <p:sldId xmlns:r="http://schemas.openxmlformats.org/officeDocument/2006/relationships" id="258" r:id="R3156e4460bbc4974"/>
+    <p:sldId xmlns:r="http://schemas.openxmlformats.org/officeDocument/2006/relationships" id="259" r:id="R2a0c0f6b2ab44cf4"/>
+    <p:sldId xmlns:r="http://schemas.openxmlformats.org/officeDocument/2006/relationships" id="260" r:id="Rc592e24ea0b14b97"/>
+    <p:sldId xmlns:r="http://schemas.openxmlformats.org/officeDocument/2006/relationships" id="261" r:id="Rce7db9e919894f3e"/>
+    <p:sldId xmlns:r="http://schemas.openxmlformats.org/officeDocument/2006/relationships" id="262" r:id="R6394396434fd4d6a"/>
+    <p:sldId xmlns:r="http://schemas.openxmlformats.org/officeDocument/2006/relationships" id="263" r:id="R9f1c18deb71046b5"/>
+    <p:sldId xmlns:r="http://schemas.openxmlformats.org/officeDocument/2006/relationships" id="264" r:id="R4c8c7089651c49b2"/>
+    <p:sldId xmlns:r="http://schemas.openxmlformats.org/officeDocument/2006/relationships" id="265" r:id="R50624586fcfe4891"/>
+    <p:sldId xmlns:r="http://schemas.openxmlformats.org/officeDocument/2006/relationships" id="266" r:id="Rdd53efcc42ad4e5c"/>
+    <p:sldId xmlns:r="http://schemas.openxmlformats.org/officeDocument/2006/relationships" id="267" r:id="R59f6c04714ef44e7"/>
+    <p:sldId xmlns:r="http://schemas.openxmlformats.org/officeDocument/2006/relationships" id="268" r:id="Rd9b7bc13ca654ddf"/>
+    <p:sldId xmlns:r="http://schemas.openxmlformats.org/officeDocument/2006/relationships" id="269" r:id="R2b65de50aa6a4c3d"/>
+    <p:sldId xmlns:r="http://schemas.openxmlformats.org/officeDocument/2006/relationships" id="270" r:id="R731dec6c0d764ee1"/>
+    <p:sldId xmlns:r="http://schemas.openxmlformats.org/officeDocument/2006/relationships" id="271" r:id="R4b60345f289f4e0c"/>
+    <p:sldId xmlns:r="http://schemas.openxmlformats.org/officeDocument/2006/relationships" id="272" r:id="R0aa01fe2645a4ffc"/>
+    <p:sldId xmlns:r="http://schemas.openxmlformats.org/officeDocument/2006/relationships" id="273" r:id="R3039cc311126443c"/>
+    <p:sldId xmlns:r="http://schemas.openxmlformats.org/officeDocument/2006/relationships" id="274" r:id="R4704fdc8c1444fdd"/>
+    <p:sldId xmlns:r="http://schemas.openxmlformats.org/officeDocument/2006/relationships" id="275" r:id="Rcaa1839118a14699"/>
+    <p:sldId xmlns:r="http://schemas.openxmlformats.org/officeDocument/2006/relationships" id="276" r:id="R290bfc5794c040f8"/>
+    <p:sldId xmlns:r="http://schemas.openxmlformats.org/officeDocument/2006/relationships" id="277" r:id="R95a8cebab72d49eb"/>
+    <p:sldId xmlns:r="http://schemas.openxmlformats.org/officeDocument/2006/relationships" id="278" r:id="R96c11172ae204e10"/>
   </p:sldIdLst>
   <p:sldSz cx="12192000" cy="6858000"/>
   <p:notesSz cx="6858000" cy="9144000"/>
@@ -643,7 +644,7 @@
           <a:lstStyle xmlns:a="http://schemas.openxmlformats.org/drawingml/2006/main"/>
           <a:p xmlns:a="http://schemas.openxmlformats.org/drawingml/2006/main">
             <a:r>
-              <a:t>Tempo sugerido: 85 s</a:t>
+              <a:t>Tempo sugerido: 75 s</a:t>
             </a:r>
           </a:p>
           <a:p xmlns:a="http://schemas.openxmlformats.org/drawingml/2006/main">
@@ -653,7 +654,7 @@
           </a:p>
           <a:p xmlns:a="http://schemas.openxmlformats.org/drawingml/2006/main">
             <a:r>
-              <a:t>Explicar cobertura como a frequência com que uma faixa estimada contém o valor usado para gerar os dados. Em um parâmetro de ruído, uma análise nominal de 90% atingiu 313 de 500 casos, 62,6%. Não generalizar esse número para todos os parâmetros ou todos os métodos. A incerteza numérica levava a contagens de 299 a 325, ainda longe de 450.</a:t>
+              <a:t>O usuário estima ter gasto uma semana de sua cota, à qual atribui cerca de US$ 50. É um rateio da assinatura, sem equivalência contratual com créditos. A conta da API Standard aplica preços de 13/09/2026 aos registros individuais do agente principal e três subagentes: US$ 1.289,34 até o goal e US$ 14,29 de complementos científicos, total de US$ 1.303,63. Entrada sem cache: 20.583.691 tokens; em cache: 822.046.336; saída: 5.229.122. 97,56% da entrada foi cache. Não somar o contador do goal. Fast dobra o preço. Gravações de cache não aparecem nos registros; considerar toda entrada nova como gravação acrescentaria cerca de US$ 53, mantida a reutilização. Exclui Gemini, ferramentas, computação local e elaboração do estudo de caso. Uma nova execução pode custar diferente.</a:t>
             </a:r>
           </a:p>
           <a:p xmlns:a="http://schemas.openxmlformats.org/drawingml/2006/main">
@@ -663,7 +664,7 @@
           </a:p>
           <a:p xmlns:a="http://schemas.openxmlformats.org/drawingml/2006/main">
             <a:r>
-              <a:t>Fontes: docs/revisao_cientifica_1.md e results/C13/review_efac_coverage.json.</a:t>
+              <a:t>Fontes: Relatório, seção 7.1; estimativa_custo_api.json. Preços em developers.openai.com/api/docs/models/gpt-6-astra, consultados em 13/09/2026.</a:t>
             </a:r>
           </a:p>
         </p:txBody>
@@ -733,7 +734,7 @@
           <a:lstStyle xmlns:a="http://schemas.openxmlformats.org/drawingml/2006/main"/>
           <a:p xmlns:a="http://schemas.openxmlformats.org/drawingml/2006/main">
             <a:r>
-              <a:t>Tempo sugerido: 80 s</a:t>
+              <a:t>Tempo sugerido: 85 s</a:t>
             </a:r>
           </a:p>
           <a:p xmlns:a="http://schemas.openxmlformats.org/drawingml/2006/main">
@@ -743,7 +744,7 @@
           </a:p>
           <a:p xmlns:a="http://schemas.openxmlformats.org/drawingml/2006/main">
             <a:r>
-              <a:t>Separar erro editorial, problema de execução e limitação científica. A descrição das aproximações em uma versão estava incorreta, mas o cálculo usava a semântica correta. A comparação ampla continuou inconclusiva. Um estudo com 50 casos e parâmetros fixados respondeu a uma pergunta menor com precisão.</a:t>
+              <a:t>Explicar cobertura como a frequência com que uma faixa estimada contém o valor usado para gerar os dados. Em um parâmetro de ruído, uma análise nominal de 90% atingiu 313 de 500 casos, 62,6%. Não generalizar esse número para todos os parâmetros ou todos os métodos. A incerteza numérica levava a contagens de 299 a 325, ainda longe de 450.</a:t>
             </a:r>
           </a:p>
           <a:p xmlns:a="http://schemas.openxmlformats.org/drawingml/2006/main">
@@ -753,7 +754,7 @@
           </a:p>
           <a:p xmlns:a="http://schemas.openxmlformats.org/drawingml/2006/main">
             <a:r>
-              <a:t>Fontes: docs/c12_errata_v0110.md, docs/revisao_cientifica_1.md.</a:t>
+              <a:t>Fontes: docs/revisao_cientifica_1.md e results/C13/review_efac_coverage.json.</a:t>
             </a:r>
           </a:p>
         </p:txBody>
@@ -823,7 +824,7 @@
           <a:lstStyle xmlns:a="http://schemas.openxmlformats.org/drawingml/2006/main"/>
           <a:p xmlns:a="http://schemas.openxmlformats.org/drawingml/2006/main">
             <a:r>
-              <a:t>Tempo sugerido: 75 s</a:t>
+              <a:t>Tempo sugerido: 80 s</a:t>
             </a:r>
           </a:p>
           <a:p xmlns:a="http://schemas.openxmlformats.org/drawingml/2006/main">
@@ -833,7 +834,7 @@
           </a:p>
           <a:p xmlns:a="http://schemas.openxmlformats.org/drawingml/2006/main">
             <a:r>
-              <a:t>O primeiro parecer motivou novos estudos, como as 300 análises condicionais e o teste de ajuste temporal. O segundo foi uma revisão do manuscrito e não iniciou novas simulações. Não se dispõe da conversa original do Gemini ou de sua versão.</a:t>
+              <a:t>Separar erro editorial, problema de execução e limitação científica. A descrição das aproximações em uma versão estava incorreta, mas o cálculo usava a semântica correta. A comparação ampla continuou inconclusiva. Um estudo com 50 casos e parâmetros fixados respondeu a uma pergunta menor com precisão.</a:t>
             </a:r>
           </a:p>
           <a:p xmlns:a="http://schemas.openxmlformats.org/drawingml/2006/main">
@@ -843,7 +844,7 @@
           </a:p>
           <a:p xmlns:a="http://schemas.openxmlformats.org/drawingml/2006/main">
             <a:r>
-              <a:t>Fontes: Relatório, seções 2 e 2.1. article/REVISION_NOTES.md.</a:t>
+              <a:t>Fontes: docs/c12_errata_v0110.md, docs/revisao_cientifica_1.md.</a:t>
             </a:r>
           </a:p>
         </p:txBody>
@@ -913,7 +914,7 @@
           <a:lstStyle xmlns:a="http://schemas.openxmlformats.org/drawingml/2006/main"/>
           <a:p xmlns:a="http://schemas.openxmlformats.org/drawingml/2006/main">
             <a:r>
-              <a:t>Tempo sugerido: 80 s</a:t>
+              <a:t>Tempo sugerido: 75 s</a:t>
             </a:r>
           </a:p>
           <a:p xmlns:a="http://schemas.openxmlformats.org/drawingml/2006/main">
@@ -923,7 +924,7 @@
           </a:p>
           <a:p xmlns:a="http://schemas.openxmlformats.org/drawingml/2006/main">
             <a:r>
-              <a:t>Mostrar o valor e o risco do feedback automatizado. O agente aceitou melhorias de exposição, mas as notas de revisão recusam novidade absoluta, certeza de falha em dados reais e amplificações extremas não demonstradas. O ponto é o contraste entre persuasão retórica e suporte científico.</a:t>
+              <a:t>O primeiro parecer motivou novos estudos, como as 300 análises condicionais e o teste de ajuste temporal. O segundo foi uma revisão do manuscrito e não iniciou novas simulações. Não se dispõe da conversa original do Gemini ou de sua versão.</a:t>
             </a:r>
           </a:p>
           <a:p xmlns:a="http://schemas.openxmlformats.org/drawingml/2006/main">
@@ -933,7 +934,7 @@
           </a:p>
           <a:p xmlns:a="http://schemas.openxmlformats.org/drawingml/2006/main">
             <a:r>
-              <a:t>Fontes: article/REVISION_NOTES.md, commit 26ae3ac.</a:t>
+              <a:t>Fontes: Relatório, seções 2 e 2.1. article/REVISION_NOTES.md.</a:t>
             </a:r>
           </a:p>
         </p:txBody>
@@ -1013,7 +1014,7 @@
           </a:p>
           <a:p xmlns:a="http://schemas.openxmlformats.org/drawingml/2006/main">
             <a:r>
-              <a:t>Evitar extrapolar o estudo de caso. Os produtos existem e há rastros de execução. Não houve avaliação científica independente completa, teste de aprendizagem ou aceitação editorial. Uma revisão entre modelos é observável, mas seu ganho de qualidade não foi medido por avaliadores externos.</a:t>
+              <a:t>Mostrar o valor e o risco do feedback automatizado. O agente aceitou melhorias de exposição, mas as notas de revisão recusam novidade absoluta, certeza de falha em dados reais e amplificações extremas não demonstradas. O ponto é o contraste entre persuasão retórica e suporte científico.</a:t>
             </a:r>
           </a:p>
           <a:p xmlns:a="http://schemas.openxmlformats.org/drawingml/2006/main">
@@ -1023,7 +1024,7 @@
           </a:p>
           <a:p xmlns:a="http://schemas.openxmlformats.org/drawingml/2006/main">
             <a:r>
-              <a:t>Fontes: Relatório, seções 8 a 10.</a:t>
+              <a:t>Fontes: article/REVISION_NOTES.md, commit 26ae3ac.</a:t>
             </a:r>
           </a:p>
         </p:txBody>
@@ -1103,7 +1104,7 @@
           </a:p>
           <a:p xmlns:a="http://schemas.openxmlformats.org/drawingml/2006/main">
             <a:r>
-              <a:t>Oportunidades: explorar ideias que não chegariam à implementação e testar mais alternativas. Dificuldade: produzir pode se tornar mais rápido que compreender e validar. Não apresentar esse deslocamento como medição de todo o campo, mas como hipótese sustentada pela experiência do caso.</a:t>
+              <a:t>Evitar extrapolar o estudo de caso. Os produtos existem e há rastros de execução. Não houve avaliação científica independente completa, teste de aprendizagem ou aceitação editorial. Uma revisão entre modelos é observável, mas seu ganho de qualidade não foi medido por avaliadores externos.</a:t>
             </a:r>
           </a:p>
           <a:p xmlns:a="http://schemas.openxmlformats.org/drawingml/2006/main">
@@ -1113,7 +1114,7 @@
           </a:p>
           <a:p xmlns:a="http://schemas.openxmlformats.org/drawingml/2006/main">
             <a:r>
-              <a:t>Fontes: Relatório, seções 8 e 9.</a:t>
+              <a:t>Fontes: Relatório, seções 8 a 10.</a:t>
             </a:r>
           </a:p>
         </p:txBody>
@@ -1183,7 +1184,7 @@
           <a:lstStyle xmlns:a="http://schemas.openxmlformats.org/drawingml/2006/main"/>
           <a:p xmlns:a="http://schemas.openxmlformats.org/drawingml/2006/main">
             <a:r>
-              <a:t>Tempo sugerido: 75 s</a:t>
+              <a:t>Tempo sugerido: 80 s</a:t>
             </a:r>
           </a:p>
           <a:p xmlns:a="http://schemas.openxmlformats.org/drawingml/2006/main">
@@ -1193,7 +1194,7 @@
           </a:p>
           <a:p xmlns:a="http://schemas.openxmlformats.org/drawingml/2006/main">
             <a:r>
-              <a:t>Destacar responsabilidades compartilhadas pelo programa, orientador e estudante. Propor avaliações distribuídas e distinguir exercício para aprender de tarefa de produção. A defesa deve complementar esse percurso. O caso não testa a eficácia destas propostas.</a:t>
+              <a:t>Oportunidades: explorar ideias que não chegariam à implementação e testar mais alternativas. Dificuldade: produzir pode se tornar mais rápido que compreender e validar. Não apresentar esse deslocamento como medição de todo o campo, mas como hipótese sustentada pela experiência do caso.</a:t>
             </a:r>
           </a:p>
           <a:p xmlns:a="http://schemas.openxmlformats.org/drawingml/2006/main">
@@ -1203,7 +1204,7 @@
           </a:p>
           <a:p xmlns:a="http://schemas.openxmlformats.org/drawingml/2006/main">
             <a:r>
-              <a:t>Fontes: Relatório, seção 8.</a:t>
+              <a:t>Fontes: Relatório, seções 8 e 9.</a:t>
             </a:r>
           </a:p>
         </p:txBody>
@@ -1273,7 +1274,7 @@
           <a:lstStyle xmlns:a="http://schemas.openxmlformats.org/drawingml/2006/main"/>
           <a:p xmlns:a="http://schemas.openxmlformats.org/drawingml/2006/main">
             <a:r>
-              <a:t>Tempo sugerido: 70 s</a:t>
+              <a:t>Tempo sugerido: 75 s</a:t>
             </a:r>
           </a:p>
           <a:p xmlns:a="http://schemas.openxmlformats.org/drawingml/2006/main">
@@ -1283,7 +1284,7 @@
           </a:p>
           <a:p xmlns:a="http://schemas.openxmlformats.org/drawingml/2006/main">
             <a:r>
-              <a:t>Discutir possíveis consequências de aumento da produção sem afirmar colapso observado de periódicos. Origem humana ou de IA não decide relevância. Contribuições incrementais podem ser valiosas se resolvem incerteza importante. Oportunidade de usar a capacidade extra para profundidade, controle e síntese.</a:t>
+              <a:t>Destacar responsabilidades compartilhadas pelo programa, orientador e estudante. Propor avaliações distribuídas e distinguir exercício para aprender de tarefa de produção. A defesa deve complementar esse percurso. O caso não testa a eficácia destas propostas.</a:t>
             </a:r>
           </a:p>
           <a:p xmlns:a="http://schemas.openxmlformats.org/drawingml/2006/main">
@@ -1293,7 +1294,7 @@
           </a:p>
           <a:p xmlns:a="http://schemas.openxmlformats.org/drawingml/2006/main">
             <a:r>
-              <a:t>Fontes: Relatório, seção 9.</a:t>
+              <a:t>Fontes: Relatório, seção 8.</a:t>
             </a:r>
           </a:p>
         </p:txBody>
@@ -1363,7 +1364,7 @@
           <a:lstStyle xmlns:a="http://schemas.openxmlformats.org/drawingml/2006/main"/>
           <a:p xmlns:a="http://schemas.openxmlformats.org/drawingml/2006/main">
             <a:r>
-              <a:t>Tempo sugerido: 75 s</a:t>
+              <a:t>Tempo sugerido: 70 s</a:t>
             </a:r>
           </a:p>
           <a:p xmlns:a="http://schemas.openxmlformats.org/drawingml/2006/main">
@@ -1373,7 +1374,7 @@
           </a:p>
           <a:p xmlns:a="http://schemas.openxmlformats.org/drawingml/2006/main">
             <a:r>
-              <a:t>Estas são propostas ainda não executadas. Especialistas poderiam comparar artigo antes e depois do Gemini, checar argumentos e reproduzir resultados centrais. Para aprendizagem seria necessário outro desenho com estudantes e medidas antes e depois.</a:t>
+              <a:t>Discutir possíveis consequências de aumento da produção sem afirmar colapso observado de periódicos. Origem humana ou de IA não decide relevância. Contribuições incrementais podem ser valiosas se resolvem incerteza importante. Oportunidade de usar a capacidade extra para profundidade, controle e síntese.</a:t>
             </a:r>
           </a:p>
           <a:p xmlns:a="http://schemas.openxmlformats.org/drawingml/2006/main">
@@ -1383,7 +1384,7 @@
           </a:p>
           <a:p xmlns:a="http://schemas.openxmlformats.org/drawingml/2006/main">
             <a:r>
-              <a:t>Fontes: Relatório, seção 10.</a:t>
+              <a:t>Fontes: Relatório, seção 9.</a:t>
             </a:r>
           </a:p>
         </p:txBody>
@@ -1543,7 +1544,7 @@
           <a:lstStyle xmlns:a="http://schemas.openxmlformats.org/drawingml/2006/main"/>
           <a:p xmlns:a="http://schemas.openxmlformats.org/drawingml/2006/main">
             <a:r>
-              <a:t>Tempo sugerido: 110 s</a:t>
+              <a:t>Tempo sugerido: 75 s</a:t>
             </a:r>
           </a:p>
           <a:p xmlns:a="http://schemas.openxmlformats.org/drawingml/2006/main">
@@ -1553,7 +1554,7 @@
           </a:p>
           <a:p xmlns:a="http://schemas.openxmlformats.org/drawingml/2006/main">
             <a:r>
-              <a:t>Reservar cerca de dois minutos para encerrar ou abrir uma conversa. Na versão de 20 minutos, selecionar apenas uma questão. Na de 30 minutos, usar o tempo restante para ouvir respostas. Não tratar os produtos como títulos acadêmicos aprovados.</a:t>
+              <a:t>Estas são propostas ainda não executadas. Especialistas poderiam comparar artigo antes e depois do Gemini, checar argumentos e reproduzir resultados centrais. Para aprendizagem seria necessário outro desenho com estudantes e medidas antes e depois.</a:t>
             </a:r>
           </a:p>
           <a:p xmlns:a="http://schemas.openxmlformats.org/drawingml/2006/main">
@@ -1563,7 +1564,7 @@
           </a:p>
           <a:p xmlns:a="http://schemas.openxmlformats.org/drawingml/2006/main">
             <a:r>
-              <a:t>Fontes: Relatório do estudo de caso, discussão.</a:t>
+              <a:t>Fontes: Relatório, seção 10.</a:t>
             </a:r>
           </a:p>
         </p:txBody>
@@ -1633,7 +1634,7 @@
           <a:lstStyle xmlns:a="http://schemas.openxmlformats.org/drawingml/2006/main"/>
           <a:p xmlns:a="http://schemas.openxmlformats.org/drawingml/2006/main">
             <a:r>
-              <a:t>Apoio opcional</a:t>
+              <a:t>Tempo sugerido: 110 s</a:t>
             </a:r>
           </a:p>
           <a:p xmlns:a="http://schemas.openxmlformats.org/drawingml/2006/main">
@@ -1643,7 +1644,7 @@
           </a:p>
           <a:p xmlns:a="http://schemas.openxmlformats.org/drawingml/2006/main">
             <a:r>
-              <a:t>Abrir apenas se perguntarem pelas contagens. Todas são do fechamento v1.0.0, exceto o manuscrito revisado. Os arquivos de evidências documentam regras e exclusões.</a:t>
+              <a:t>Reservar cerca de dois minutos para encerrar ou abrir uma conversa. Na versão de 20 minutos, selecionar apenas uma questão. Na de 30 minutos, usar o tempo restante para ouvir respostas. Não tratar os produtos como títulos acadêmicos aprovados.</a:t>
             </a:r>
           </a:p>
           <a:p xmlns:a="http://schemas.openxmlformats.org/drawingml/2006/main">
@@ -1653,7 +1654,7 @@
           </a:p>
           <a:p xmlns:a="http://schemas.openxmlformats.org/drawingml/2006/main">
             <a:r>
-              <a:t>Fontes: evidencias.json, complementos_pos_goal.json.</a:t>
+              <a:t>Fontes: Relatório do estudo de caso, discussão.</a:t>
             </a:r>
           </a:p>
         </p:txBody>
@@ -1684,6 +1685,96 @@
 </file>
 
 <file path=ppt/notesSlides/notesSlide22.xml><?xml version="1.0" encoding="utf-8"?>
+<p:notes xmlns:p="http://schemas.openxmlformats.org/presentationml/2006/main">
+  <p:cSld>
+    <p:spTree>
+      <p:nvGrpSpPr>
+        <p:cNvPr id="1" name=""/>
+        <p:cNvGrpSpPr/>
+        <p:nvPr/>
+      </p:nvGrpSpPr>
+      <p:grpSpPr>
+        <a:xfrm xmlns:a="http://schemas.openxmlformats.org/drawingml/2006/main"/>
+      </p:grpSpPr>
+      <p:sp>
+        <p:nvSpPr>
+          <p:cNvPr id="2" name="Slide Image Placeholder 1"/>
+          <p:cNvSpPr>
+            <a:spLocks xmlns:a="http://schemas.openxmlformats.org/drawingml/2006/main" noGrp="1"/>
+          </p:cNvSpPr>
+          <p:nvPr>
+            <p:ph type="sldImg" idx="0"/>
+          </p:nvPr>
+        </p:nvSpPr>
+        <p:spPr/>
+      </p:sp>
+      <p:sp>
+        <p:nvSpPr>
+          <p:cNvPr id="3" name="Notes Placeholder 2"/>
+          <p:cNvSpPr>
+            <a:spLocks xmlns:a="http://schemas.openxmlformats.org/drawingml/2006/main" noGrp="1"/>
+          </p:cNvSpPr>
+          <p:nvPr>
+            <p:ph type="body" idx="1"/>
+          </p:nvPr>
+        </p:nvSpPr>
+        <p:spPr/>
+        <p:txBody>
+          <a:bodyPr xmlns:a="http://schemas.openxmlformats.org/drawingml/2006/main"/>
+          <a:lstStyle xmlns:a="http://schemas.openxmlformats.org/drawingml/2006/main"/>
+          <a:p xmlns:a="http://schemas.openxmlformats.org/drawingml/2006/main">
+            <a:r>
+              <a:t>Apoio opcional</a:t>
+            </a:r>
+          </a:p>
+          <a:p xmlns:a="http://schemas.openxmlformats.org/drawingml/2006/main">
+            <a:r>
+              <a:t/>
+            </a:r>
+          </a:p>
+          <a:p xmlns:a="http://schemas.openxmlformats.org/drawingml/2006/main">
+            <a:r>
+              <a:t>Abrir apenas se perguntarem pelas contagens. Todas são do fechamento v1.0.0, exceto o manuscrito revisado. Os arquivos de evidências documentam regras e exclusões.</a:t>
+            </a:r>
+          </a:p>
+          <a:p xmlns:a="http://schemas.openxmlformats.org/drawingml/2006/main">
+            <a:r>
+              <a:t/>
+            </a:r>
+          </a:p>
+          <a:p xmlns:a="http://schemas.openxmlformats.org/drawingml/2006/main">
+            <a:r>
+              <a:t>Fontes: evidencias.json, complementos_pos_goal.json.</a:t>
+            </a:r>
+          </a:p>
+        </p:txBody>
+      </p:sp>
+      <p:sp>
+        <p:nvSpPr>
+          <p:cNvPr id="4" name="Slide Number Placeholder 3"/>
+          <p:cNvSpPr>
+            <a:spLocks xmlns:a="http://schemas.openxmlformats.org/drawingml/2006/main" noGrp="1"/>
+          </p:cNvSpPr>
+          <p:nvPr>
+            <p:ph type="sldNum" idx="5"/>
+          </p:nvPr>
+        </p:nvSpPr>
+        <p:spPr/>
+        <p:txBody>
+          <a:bodyPr xmlns:a="http://schemas.openxmlformats.org/drawingml/2006/main"/>
+          <a:lstStyle xmlns:a="http://schemas.openxmlformats.org/drawingml/2006/main"/>
+          <a:p xmlns:a="http://schemas.openxmlformats.org/drawingml/2006/main"/>
+        </p:txBody>
+      </p:sp>
+    </p:spTree>
+  </p:cSld>
+  <p:clrMapOvr>
+    <a:masterClrMapping xmlns:a="http://schemas.openxmlformats.org/drawingml/2006/main"/>
+  </p:clrMapOvr>
+</p:notes>
+</file>
+
+<file path=ppt/notesSlides/notesSlide23.xml><?xml version="1.0" encoding="utf-8"?>
 <p:notes xmlns:p="http://schemas.openxmlformats.org/presentationml/2006/main">
   <p:cSld>
     <p:spTree>
@@ -2441,7 +2532,7 @@
   </p:cSld>
   <p:clrMap bg1="lt1" tx1="dk1" bg2="lt2" tx2="dk2" accent1="accent1" accent2="accent2" accent3="accent3" accent4="accent4" accent5="accent5" accent6="accent6" hlink="hlink" folHlink="folHlink"/>
   <p:sldLayoutIdLst>
-    <p:sldLayoutId xmlns:r="http://schemas.openxmlformats.org/officeDocument/2006/relationships" id="2147483649" r:id="R34ba04964f2c4e70"/>
+    <p:sldLayoutId xmlns:r="http://schemas.openxmlformats.org/officeDocument/2006/relationships" id="2147483649" r:id="R30557920b76b4965"/>
   </p:sldLayoutIdLst>
   <p:txStyles>
     <p:titleStyle>
@@ -3167,7 +3258,7 @@
           <p:cNvPr id="5" name="Pesquisa acadêmica com agentes de IA">
             <a:extLst xmlns:a="http://schemas.openxmlformats.org/drawingml/2006/main">
               <a:ext uri="{FF2B5EF4-FFF2-40B4-BE49-F238E27FC236}">
-                <a16:creationId xmlns:a16="http://schemas.microsoft.com/office/drawing/2014/main" id="{8BE4C497-51E0-42C5-B8BA-4CBDD6417405}"/>
+                <a16:creationId xmlns:a16="http://schemas.microsoft.com/office/drawing/2014/main" id="{D20D5D6A-72AD-479E-BB7B-5D5635B223EF}"/>
               </a:ext>
             </a:extLst>
           </p:cNvPr>
@@ -3221,10 +3312,10 @@
       </p:sp>
       <p:sp>
         <p:nvSpPr>
-          <p:cNvPr id="2" name="1 / 20">
-            <a:extLst xmlns:a="http://schemas.openxmlformats.org/drawingml/2006/main">
-              <a:ext uri="{FF2B5EF4-FFF2-40B4-BE49-F238E27FC236}">
-                <a16:creationId xmlns:a16="http://schemas.microsoft.com/office/drawing/2014/main" id="{1771ECFC-3AAF-4827-AF90-5636717C7F8D}"/>
+          <p:cNvPr id="2" name="1 / 21">
+            <a:extLst xmlns:a="http://schemas.openxmlformats.org/drawingml/2006/main">
+              <a:ext uri="{FF2B5EF4-FFF2-40B4-BE49-F238E27FC236}">
+                <a16:creationId xmlns:a16="http://schemas.microsoft.com/office/drawing/2014/main" id="{3C08E3B7-F4FB-4DC5-8119-EC65292FCCF0}"/>
               </a:ext>
             </a:extLst>
           </p:cNvPr>
@@ -3271,7 +3362,7 @@
                 <a:ea typeface="Arial"/>
                 <a:cs typeface="Arial"/>
               </a:rPr>
-              <a:t>1 / 20</a:t>
+              <a:t>1 / 21</a:t>
             </a:r>
           </a:p>
         </p:txBody>
@@ -3281,7 +3372,7 @@
           <p:cNvPr id="3" name="Um experimento de criação&#10;de dissertação e artigo">
             <a:extLst xmlns:a="http://schemas.openxmlformats.org/drawingml/2006/main">
               <a:ext uri="{FF2B5EF4-FFF2-40B4-BE49-F238E27FC236}">
-                <a16:creationId xmlns:a16="http://schemas.microsoft.com/office/drawing/2014/main" id="{53771FDD-C0A3-40CF-B8F7-9CBD4A7DD75C}"/>
+                <a16:creationId xmlns:a16="http://schemas.microsoft.com/office/drawing/2014/main" id="{0858D53A-FB27-445A-9B15-547C23B8C1AE}"/>
               </a:ext>
             </a:extLst>
           </p:cNvPr>
@@ -3361,7 +3452,7 @@
           <p:cNvPr id="4" name="Codex na execução&#10;Gemini em dois ciclos de revisão">
             <a:extLst xmlns:a="http://schemas.openxmlformats.org/drawingml/2006/main">
               <a:ext uri="{FF2B5EF4-FFF2-40B4-BE49-F238E27FC236}">
-                <a16:creationId xmlns:a16="http://schemas.microsoft.com/office/drawing/2014/main" id="{D0415DC3-6EBB-4277-8DB2-1F9D1341DDA4}"/>
+                <a16:creationId xmlns:a16="http://schemas.microsoft.com/office/drawing/2014/main" id="{C05A65A2-7C3A-4481-9D4B-753538BF5BAB}"/>
               </a:ext>
             </a:extLst>
           </p:cNvPr>
@@ -3439,7 +3530,7 @@
     </p:spTree>
     <p:extLst>
       <p:ext uri="{BB962C8B-B14F-4D97-AF65-F5344CB8AC3E}">
-        <p14:creationId xmlns:p14="http://schemas.microsoft.com/office/powerpoint/2010/main" val="968173410"/>
+        <p14:creationId xmlns:p14="http://schemas.microsoft.com/office/powerpoint/2010/main" val="1706310719"/>
       </p:ext>
     </p:extLst>
   </p:cSld>
@@ -3470,7 +3561,7 @@
           <p:cNvPr id="8" name="Tempo de execução e tempo de formação">
             <a:extLst xmlns:a="http://schemas.openxmlformats.org/drawingml/2006/main">
               <a:ext uri="{FF2B5EF4-FFF2-40B4-BE49-F238E27FC236}">
-                <a16:creationId xmlns:a16="http://schemas.microsoft.com/office/drawing/2014/main" id="{C4F64AC9-A8B1-4D1F-BB47-EFBF7AEE5017}"/>
+                <a16:creationId xmlns:a16="http://schemas.microsoft.com/office/drawing/2014/main" id="{6BFBC90F-EF0D-4F37-9CBE-42A89CFAB4EA}"/>
               </a:ext>
             </a:extLst>
           </p:cNvPr>
@@ -3524,10 +3615,10 @@
       </p:sp>
       <p:sp>
         <p:nvSpPr>
-          <p:cNvPr id="2" name="10 / 20">
-            <a:extLst xmlns:a="http://schemas.openxmlformats.org/drawingml/2006/main">
-              <a:ext uri="{FF2B5EF4-FFF2-40B4-BE49-F238E27FC236}">
-                <a16:creationId xmlns:a16="http://schemas.microsoft.com/office/drawing/2014/main" id="{9DCB668C-3A6D-4F92-9101-62F412E91EBE}"/>
+          <p:cNvPr id="2" name="10 / 21">
+            <a:extLst xmlns:a="http://schemas.openxmlformats.org/drawingml/2006/main">
+              <a:ext uri="{FF2B5EF4-FFF2-40B4-BE49-F238E27FC236}">
+                <a16:creationId xmlns:a16="http://schemas.microsoft.com/office/drawing/2014/main" id="{25A6BD02-BCE5-4624-9D1E-A229B202AE40}"/>
               </a:ext>
             </a:extLst>
           </p:cNvPr>
@@ -3574,7 +3665,7 @@
                 <a:ea typeface="Arial"/>
                 <a:cs typeface="Arial"/>
               </a:rPr>
-              <a:t>10 / 20</a:t>
+              <a:t>10 / 21</a:t>
             </a:r>
           </a:p>
         </p:txBody>
@@ -3584,7 +3675,7 @@
           <p:cNvPr id="3" name="30 h 51 min">
             <a:extLst xmlns:a="http://schemas.openxmlformats.org/drawingml/2006/main">
               <a:ext uri="{FF2B5EF4-FFF2-40B4-BE49-F238E27FC236}">
-                <a16:creationId xmlns:a16="http://schemas.microsoft.com/office/drawing/2014/main" id="{0C2534E6-6D91-4DA7-AC5C-4535B9732BFA}"/>
+                <a16:creationId xmlns:a16="http://schemas.microsoft.com/office/drawing/2014/main" id="{C57E91CF-285A-4045-B6D2-5612F958B48B}"/>
               </a:ext>
             </a:extLst>
           </p:cNvPr>
@@ -3641,7 +3732,7 @@
           <p:cNvPr id="4" name="contador do goal original">
             <a:extLst xmlns:a="http://schemas.openxmlformats.org/drawingml/2006/main">
               <a:ext uri="{FF2B5EF4-FFF2-40B4-BE49-F238E27FC236}">
-                <a16:creationId xmlns:a16="http://schemas.microsoft.com/office/drawing/2014/main" id="{91900D50-3020-4B42-9C43-1A30120DCEB1}"/>
+                <a16:creationId xmlns:a16="http://schemas.microsoft.com/office/drawing/2014/main" id="{152918A7-5F20-41B7-80A4-3A56BE2E4957}"/>
               </a:ext>
             </a:extLst>
           </p:cNvPr>
@@ -3698,7 +3789,7 @@
           <p:cNvPr id="5" name="54 h 56 min">
             <a:extLst xmlns:a="http://schemas.openxmlformats.org/drawingml/2006/main">
               <a:ext uri="{FF2B5EF4-FFF2-40B4-BE49-F238E27FC236}">
-                <a16:creationId xmlns:a16="http://schemas.microsoft.com/office/drawing/2014/main" id="{990E8DD6-8217-4736-9B08-E871F722CA70}"/>
+                <a16:creationId xmlns:a16="http://schemas.microsoft.com/office/drawing/2014/main" id="{33F7121B-4238-4C59-82C0-F57EC4B5B7A2}"/>
               </a:ext>
             </a:extLst>
           </p:cNvPr>
@@ -3755,7 +3846,7 @@
           <p:cNvPr id="6" name="intervalo no calendário, com pausas">
             <a:extLst xmlns:a="http://schemas.openxmlformats.org/drawingml/2006/main">
               <a:ext uri="{FF2B5EF4-FFF2-40B4-BE49-F238E27FC236}">
-                <a16:creationId xmlns:a16="http://schemas.microsoft.com/office/drawing/2014/main" id="{FDD4CB98-5ED4-4718-83F5-AB4E7DFB3716}"/>
+                <a16:creationId xmlns:a16="http://schemas.microsoft.com/office/drawing/2014/main" id="{7ABAE0AE-26A0-4609-9CE0-B2D0B0A02B98}"/>
               </a:ext>
             </a:extLst>
           </p:cNvPr>
@@ -3812,7 +3903,7 @@
           <p:cNvPr id="7" name="Compreender e&#10;validar exigem&#10;tempo próprio.">
             <a:extLst xmlns:a="http://schemas.openxmlformats.org/drawingml/2006/main">
               <a:ext uri="{FF2B5EF4-FFF2-40B4-BE49-F238E27FC236}">
-                <a16:creationId xmlns:a16="http://schemas.microsoft.com/office/drawing/2014/main" id="{4E01CE58-A695-4C30-B136-38B5573E36D4}"/>
+                <a16:creationId xmlns:a16="http://schemas.microsoft.com/office/drawing/2014/main" id="{099BC9D5-93AA-482E-A40F-7A71C8CE1298}"/>
               </a:ext>
             </a:extLst>
           </p:cNvPr>
@@ -3913,7 +4004,7 @@
     </p:spTree>
     <p:extLst>
       <p:ext uri="{BB962C8B-B14F-4D97-AF65-F5344CB8AC3E}">
-        <p14:creationId xmlns:p14="http://schemas.microsoft.com/office/powerpoint/2010/main" val="527496112"/>
+        <p14:creationId xmlns:p14="http://schemas.microsoft.com/office/powerpoint/2010/main" val="1315628330"/>
       </p:ext>
     </p:extLst>
   </p:cSld>
@@ -3941,10 +4032,10 @@
       </p:grpSpPr>
       <p:sp>
         <p:nvSpPr>
-          <p:cNvPr id="9" name="Um controle expôs confiança excessiva">
-            <a:extLst xmlns:a="http://schemas.openxmlformats.org/drawingml/2006/main">
-              <a:ext uri="{FF2B5EF4-FFF2-40B4-BE49-F238E27FC236}">
-                <a16:creationId xmlns:a16="http://schemas.microsoft.com/office/drawing/2014/main" id="{E907ADBD-49CD-42BE-AFC2-2FE5BDEF52D4}"/>
+          <p:cNvPr id="9" name="Custos: uma ordem de grandeza">
+            <a:extLst xmlns:a="http://schemas.openxmlformats.org/drawingml/2006/main">
+              <a:ext uri="{FF2B5EF4-FFF2-40B4-BE49-F238E27FC236}">
+                <a16:creationId xmlns:a16="http://schemas.microsoft.com/office/drawing/2014/main" id="{4AB54F54-B534-4C40-94FB-5A4B9521F7D5}"/>
               </a:ext>
             </a:extLst>
           </p:cNvPr>
@@ -3991,17 +4082,17 @@
                 <a:ea typeface="Arial"/>
                 <a:cs typeface="Arial"/>
               </a:rPr>
-              <a:t>Um controle expôs confiança excessiva</a:t>
-            </a:r>
-          </a:p>
-        </p:txBody>
-      </p:sp>
-      <p:sp>
-        <p:nvSpPr>
-          <p:cNvPr id="2" name="11 / 20">
-            <a:extLst xmlns:a="http://schemas.openxmlformats.org/drawingml/2006/main">
-              <a:ext uri="{FF2B5EF4-FFF2-40B4-BE49-F238E27FC236}">
-                <a16:creationId xmlns:a16="http://schemas.microsoft.com/office/drawing/2014/main" id="{58561C4F-E7D4-40E8-B16E-5737F0FFA293}"/>
+              <a:t>Custos: uma ordem de grandeza</a:t>
+            </a:r>
+          </a:p>
+        </p:txBody>
+      </p:sp>
+      <p:sp>
+        <p:nvSpPr>
+          <p:cNvPr id="2" name="11 / 21">
+            <a:extLst xmlns:a="http://schemas.openxmlformats.org/drawingml/2006/main">
+              <a:ext uri="{FF2B5EF4-FFF2-40B4-BE49-F238E27FC236}">
+                <a16:creationId xmlns:a16="http://schemas.microsoft.com/office/drawing/2014/main" id="{91D6DD4E-7779-48EF-9090-E761BB183D04}"/>
               </a:ext>
             </a:extLst>
           </p:cNvPr>
@@ -4048,46 +4139,46 @@
                 <a:ea typeface="Arial"/>
                 <a:cs typeface="Arial"/>
               </a:rPr>
-              <a:t>11 / 20</a:t>
-            </a:r>
-          </a:p>
-        </p:txBody>
-      </p:sp>
-      <p:sp>
-        <p:nvSpPr>
-          <p:cNvPr id="3" name="90%">
-            <a:extLst xmlns:a="http://schemas.openxmlformats.org/drawingml/2006/main">
-              <a:ext uri="{FF2B5EF4-FFF2-40B4-BE49-F238E27FC236}">
-                <a16:creationId xmlns:a16="http://schemas.microsoft.com/office/drawing/2014/main" id="{3FFB00C8-9137-458F-AE69-BCC0355DA3DD}"/>
-              </a:ext>
-            </a:extLst>
-          </p:cNvPr>
-          <p:cNvSpPr>
-            <a:spLocks xmlns:a="http://schemas.openxmlformats.org/drawingml/2006/main" noGrp="1"/>
-          </p:cNvSpPr>
-          <p:nvPr/>
-        </p:nvSpPr>
-        <p:spPr>
-          <a:xfrm xmlns:a="http://schemas.openxmlformats.org/drawingml/2006/main">
-            <a:off x="685800" y="1905000"/>
-            <a:ext cx="4953000" cy="952500"/>
-          </a:xfrm>
-          <a:prstGeom xmlns:a="http://schemas.openxmlformats.org/drawingml/2006/main" prst="rect">
-            <a:avLst/>
-          </a:prstGeom>
-          <a:noFill xmlns:a="http://schemas.openxmlformats.org/drawingml/2006/main"/>
-          <a:ln xmlns:a="http://schemas.openxmlformats.org/drawingml/2006/main" w="0">
-            <a:noFill/>
-          </a:ln>
-        </p:spPr>
-        <p:txBody>
-          <a:bodyPr xmlns:a="http://schemas.openxmlformats.org/drawingml/2006/main" lIns="0" tIns="0" rIns="0" bIns="0" anchor="t">
-            <a:noAutofit/>
-          </a:bodyPr>
-          <a:lstStyle xmlns:a="http://schemas.openxmlformats.org/drawingml/2006/main"/>
-          <a:p xmlns:a="http://schemas.openxmlformats.org/drawingml/2006/main">
-            <a:pPr>
-              <a:defRPr sz="5700" b="1">
+              <a:t>11 / 21</a:t>
+            </a:r>
+          </a:p>
+        </p:txBody>
+      </p:sp>
+      <p:sp>
+        <p:nvSpPr>
+          <p:cNvPr id="3" name="US$ 50">
+            <a:extLst xmlns:a="http://schemas.openxmlformats.org/drawingml/2006/main">
+              <a:ext uri="{FF2B5EF4-FFF2-40B4-BE49-F238E27FC236}">
+                <a16:creationId xmlns:a16="http://schemas.microsoft.com/office/drawing/2014/main" id="{1693E580-F703-414F-92BC-4C49B2700BB6}"/>
+              </a:ext>
+            </a:extLst>
+          </p:cNvPr>
+          <p:cNvSpPr>
+            <a:spLocks xmlns:a="http://schemas.openxmlformats.org/drawingml/2006/main" noGrp="1"/>
+          </p:cNvSpPr>
+          <p:nvPr/>
+        </p:nvSpPr>
+        <p:spPr>
+          <a:xfrm xmlns:a="http://schemas.openxmlformats.org/drawingml/2006/main">
+            <a:off x="685800" y="1952625"/>
+            <a:ext cx="4953000" cy="857250"/>
+          </a:xfrm>
+          <a:prstGeom xmlns:a="http://schemas.openxmlformats.org/drawingml/2006/main" prst="rect">
+            <a:avLst/>
+          </a:prstGeom>
+          <a:noFill xmlns:a="http://schemas.openxmlformats.org/drawingml/2006/main"/>
+          <a:ln xmlns:a="http://schemas.openxmlformats.org/drawingml/2006/main" w="0">
+            <a:noFill/>
+          </a:ln>
+        </p:spPr>
+        <p:txBody>
+          <a:bodyPr xmlns:a="http://schemas.openxmlformats.org/drawingml/2006/main" lIns="0" tIns="0" rIns="0" bIns="0" anchor="t">
+            <a:noAutofit/>
+          </a:bodyPr>
+          <a:lstStyle xmlns:a="http://schemas.openxmlformats.org/drawingml/2006/main"/>
+          <a:p xmlns:a="http://schemas.openxmlformats.org/drawingml/2006/main">
+            <a:pPr>
+              <a:defRPr sz="4950" b="1">
                 <a:solidFill>
                   <a:srgbClr val="087F8C"/>
                 </a:solidFill>
@@ -4097,7 +4188,7 @@
               </a:defRPr>
             </a:pPr>
             <a:r>
-              <a:rPr sz="5700" b="1">
+              <a:rPr sz="4950" b="1">
                 <a:solidFill>
                   <a:srgbClr val="087F8C"/>
                 </a:solidFill>
@@ -4105,46 +4196,46 @@
                 <a:ea typeface="Arial"/>
                 <a:cs typeface="Arial"/>
               </a:rPr>
-              <a:t>90%</a:t>
-            </a:r>
-          </a:p>
-        </p:txBody>
-      </p:sp>
-      <p:sp>
-        <p:nvSpPr>
-          <p:cNvPr id="4" name="Cobertura nominal&#10;esperada">
-            <a:extLst xmlns:a="http://schemas.openxmlformats.org/drawingml/2006/main">
-              <a:ext uri="{FF2B5EF4-FFF2-40B4-BE49-F238E27FC236}">
-                <a16:creationId xmlns:a16="http://schemas.microsoft.com/office/drawing/2014/main" id="{AD9B7F34-BF5F-4EB3-A569-DC8123105847}"/>
-              </a:ext>
-            </a:extLst>
-          </p:cNvPr>
-          <p:cNvSpPr>
-            <a:spLocks xmlns:a="http://schemas.openxmlformats.org/drawingml/2006/main" noGrp="1"/>
-          </p:cNvSpPr>
-          <p:nvPr/>
-        </p:nvSpPr>
-        <p:spPr>
-          <a:xfrm xmlns:a="http://schemas.openxmlformats.org/drawingml/2006/main">
-            <a:off x="685800" y="3124200"/>
-            <a:ext cx="4953000" cy="1047750"/>
-          </a:xfrm>
-          <a:prstGeom xmlns:a="http://schemas.openxmlformats.org/drawingml/2006/main" prst="rect">
-            <a:avLst/>
-          </a:prstGeom>
-          <a:noFill xmlns:a="http://schemas.openxmlformats.org/drawingml/2006/main"/>
-          <a:ln xmlns:a="http://schemas.openxmlformats.org/drawingml/2006/main" w="0">
-            <a:noFill/>
-          </a:ln>
-        </p:spPr>
-        <p:txBody>
-          <a:bodyPr xmlns:a="http://schemas.openxmlformats.org/drawingml/2006/main" lIns="0" tIns="0" rIns="0" bIns="0" anchor="t">
-            <a:noAutofit/>
-          </a:bodyPr>
-          <a:lstStyle xmlns:a="http://schemas.openxmlformats.org/drawingml/2006/main"/>
-          <a:p xmlns:a="http://schemas.openxmlformats.org/drawingml/2006/main">
-            <a:pPr>
-              <a:defRPr sz="2400" b="0">
+              <a:t>US$ 50</a:t>
+            </a:r>
+          </a:p>
+        </p:txBody>
+      </p:sp>
+      <p:sp>
+        <p:nvSpPr>
+          <p:cNvPr id="4" name="Rateio da assinatura&#10;Estimativa do usuário">
+            <a:extLst xmlns:a="http://schemas.openxmlformats.org/drawingml/2006/main">
+              <a:ext uri="{FF2B5EF4-FFF2-40B4-BE49-F238E27FC236}">
+                <a16:creationId xmlns:a16="http://schemas.microsoft.com/office/drawing/2014/main" id="{19197DD6-3C79-439D-9136-19B758596A5C}"/>
+              </a:ext>
+            </a:extLst>
+          </p:cNvPr>
+          <p:cNvSpPr>
+            <a:spLocks xmlns:a="http://schemas.openxmlformats.org/drawingml/2006/main" noGrp="1"/>
+          </p:cNvSpPr>
+          <p:nvPr/>
+        </p:nvSpPr>
+        <p:spPr>
+          <a:xfrm xmlns:a="http://schemas.openxmlformats.org/drawingml/2006/main">
+            <a:off x="685800" y="3048000"/>
+            <a:ext cx="4953000" cy="1000125"/>
+          </a:xfrm>
+          <a:prstGeom xmlns:a="http://schemas.openxmlformats.org/drawingml/2006/main" prst="rect">
+            <a:avLst/>
+          </a:prstGeom>
+          <a:noFill xmlns:a="http://schemas.openxmlformats.org/drawingml/2006/main"/>
+          <a:ln xmlns:a="http://schemas.openxmlformats.org/drawingml/2006/main" w="0">
+            <a:noFill/>
+          </a:ln>
+        </p:spPr>
+        <p:txBody>
+          <a:bodyPr xmlns:a="http://schemas.openxmlformats.org/drawingml/2006/main" lIns="0" tIns="0" rIns="0" bIns="0" anchor="t">
+            <a:noAutofit/>
+          </a:bodyPr>
+          <a:lstStyle xmlns:a="http://schemas.openxmlformats.org/drawingml/2006/main"/>
+          <a:p xmlns:a="http://schemas.openxmlformats.org/drawingml/2006/main">
+            <a:pPr>
+              <a:defRPr sz="2250" b="0">
                 <a:solidFill>
                   <a:srgbClr val="253643"/>
                 </a:solidFill>
@@ -4154,7 +4245,7 @@
               </a:defRPr>
             </a:pPr>
             <a:r>
-              <a:rPr sz="2400" b="0">
+              <a:rPr sz="2250" b="0">
                 <a:solidFill>
                   <a:srgbClr val="253643"/>
                 </a:solidFill>
@@ -4162,12 +4253,12 @@
                 <a:ea typeface="Arial"/>
                 <a:cs typeface="Arial"/>
               </a:rPr>
-              <a:t>Cobertura nominal</a:t>
-            </a:r>
-          </a:p>
-          <a:p xmlns:a="http://schemas.openxmlformats.org/drawingml/2006/main">
-            <a:pPr>
-              <a:defRPr sz="2400" b="0">
+              <a:t>Rateio da assinatura</a:t>
+            </a:r>
+          </a:p>
+          <a:p xmlns:a="http://schemas.openxmlformats.org/drawingml/2006/main">
+            <a:pPr>
+              <a:defRPr sz="2250" b="0">
                 <a:solidFill>
                   <a:srgbClr val="253643"/>
                 </a:solidFill>
@@ -4177,7 +4268,7 @@
               </a:defRPr>
             </a:pPr>
             <a:r>
-              <a:rPr sz="2400" b="0">
+              <a:rPr sz="2250" b="0">
                 <a:solidFill>
                   <a:srgbClr val="253643"/>
                 </a:solidFill>
@@ -4185,46 +4276,183 @@
                 <a:ea typeface="Arial"/>
                 <a:cs typeface="Arial"/>
               </a:rPr>
-              <a:t>esperada</a:t>
-            </a:r>
-          </a:p>
-        </p:txBody>
-      </p:sp>
-      <p:sp>
-        <p:nvSpPr>
-          <p:cNvPr id="5" name="62,6%">
-            <a:extLst xmlns:a="http://schemas.openxmlformats.org/drawingml/2006/main">
-              <a:ext uri="{FF2B5EF4-FFF2-40B4-BE49-F238E27FC236}">
-                <a16:creationId xmlns:a16="http://schemas.microsoft.com/office/drawing/2014/main" id="{2FAE656B-11CD-4F2E-AF5B-A80DCCB9ABC1}"/>
-              </a:ext>
-            </a:extLst>
-          </p:cNvPr>
-          <p:cNvSpPr>
-            <a:spLocks xmlns:a="http://schemas.openxmlformats.org/drawingml/2006/main" noGrp="1"/>
-          </p:cNvSpPr>
-          <p:nvPr/>
-        </p:nvSpPr>
-        <p:spPr>
-          <a:xfrm xmlns:a="http://schemas.openxmlformats.org/drawingml/2006/main">
-            <a:off x="6572250" y="1905000"/>
-            <a:ext cx="4953000" cy="952500"/>
-          </a:xfrm>
-          <a:prstGeom xmlns:a="http://schemas.openxmlformats.org/drawingml/2006/main" prst="rect">
-            <a:avLst/>
-          </a:prstGeom>
-          <a:noFill xmlns:a="http://schemas.openxmlformats.org/drawingml/2006/main"/>
-          <a:ln xmlns:a="http://schemas.openxmlformats.org/drawingml/2006/main" w="0">
-            <a:noFill/>
-          </a:ln>
-        </p:spPr>
-        <p:txBody>
-          <a:bodyPr xmlns:a="http://schemas.openxmlformats.org/drawingml/2006/main" lIns="0" tIns="0" rIns="0" bIns="0" anchor="t">
-            <a:noAutofit/>
-          </a:bodyPr>
-          <a:lstStyle xmlns:a="http://schemas.openxmlformats.org/drawingml/2006/main"/>
-          <a:p xmlns:a="http://schemas.openxmlformats.org/drawingml/2006/main">
-            <a:pPr>
-              <a:defRPr sz="5700" b="1">
+              <a:t>Estimativa do usuário</a:t>
+            </a:r>
+          </a:p>
+        </p:txBody>
+      </p:sp>
+      <p:sp>
+        <p:nvSpPr>
+          <p:cNvPr id="5" name="US$ 1.300">
+            <a:extLst xmlns:a="http://schemas.openxmlformats.org/drawingml/2006/main">
+              <a:ext uri="{FF2B5EF4-FFF2-40B4-BE49-F238E27FC236}">
+                <a16:creationId xmlns:a16="http://schemas.microsoft.com/office/drawing/2014/main" id="{CE1203ED-7CA6-40CB-AA5D-9EDBFEE1F262}"/>
+              </a:ext>
+            </a:extLst>
+          </p:cNvPr>
+          <p:cNvSpPr>
+            <a:spLocks xmlns:a="http://schemas.openxmlformats.org/drawingml/2006/main" noGrp="1"/>
+          </p:cNvSpPr>
+          <p:nvPr/>
+        </p:nvSpPr>
+        <p:spPr>
+          <a:xfrm xmlns:a="http://schemas.openxmlformats.org/drawingml/2006/main">
+            <a:off x="6572250" y="1952625"/>
+            <a:ext cx="4953000" cy="857250"/>
+          </a:xfrm>
+          <a:prstGeom xmlns:a="http://schemas.openxmlformats.org/drawingml/2006/main" prst="rect">
+            <a:avLst/>
+          </a:prstGeom>
+          <a:noFill xmlns:a="http://schemas.openxmlformats.org/drawingml/2006/main"/>
+          <a:ln xmlns:a="http://schemas.openxmlformats.org/drawingml/2006/main" w="0">
+            <a:noFill/>
+          </a:ln>
+        </p:spPr>
+        <p:txBody>
+          <a:bodyPr xmlns:a="http://schemas.openxmlformats.org/drawingml/2006/main" lIns="0" tIns="0" rIns="0" bIns="0" anchor="t">
+            <a:noAutofit/>
+          </a:bodyPr>
+          <a:lstStyle xmlns:a="http://schemas.openxmlformats.org/drawingml/2006/main"/>
+          <a:p xmlns:a="http://schemas.openxmlformats.org/drawingml/2006/main">
+            <a:pPr>
+              <a:defRPr sz="4950" b="1">
+                <a:solidFill>
+                  <a:srgbClr val="17324D"/>
+                </a:solidFill>
+                <a:latin typeface="Arial"/>
+                <a:ea typeface="Arial"/>
+                <a:cs typeface="Arial"/>
+              </a:defRPr>
+            </a:pPr>
+            <a:r>
+              <a:rPr sz="4950" b="1">
+                <a:solidFill>
+                  <a:srgbClr val="17324D"/>
+                </a:solidFill>
+                <a:latin typeface="Arial"/>
+                <a:ea typeface="Arial"/>
+                <a:cs typeface="Arial"/>
+              </a:rPr>
+              <a:t>US$ 1.300</a:t>
+            </a:r>
+          </a:p>
+        </p:txBody>
+      </p:sp>
+      <p:sp>
+        <p:nvSpPr>
+          <p:cNvPr id="6" name="Equivalente em API Standard&#10;Consumo registrado × preços">
+            <a:extLst xmlns:a="http://schemas.openxmlformats.org/drawingml/2006/main">
+              <a:ext uri="{FF2B5EF4-FFF2-40B4-BE49-F238E27FC236}">
+                <a16:creationId xmlns:a16="http://schemas.microsoft.com/office/drawing/2014/main" id="{116FBE7A-B43A-4349-9100-D7F8A4817545}"/>
+              </a:ext>
+            </a:extLst>
+          </p:cNvPr>
+          <p:cNvSpPr>
+            <a:spLocks xmlns:a="http://schemas.openxmlformats.org/drawingml/2006/main" noGrp="1"/>
+          </p:cNvSpPr>
+          <p:nvPr/>
+        </p:nvSpPr>
+        <p:spPr>
+          <a:xfrm xmlns:a="http://schemas.openxmlformats.org/drawingml/2006/main">
+            <a:off x="6572250" y="3048000"/>
+            <a:ext cx="4953000" cy="1000125"/>
+          </a:xfrm>
+          <a:prstGeom xmlns:a="http://schemas.openxmlformats.org/drawingml/2006/main" prst="rect">
+            <a:avLst/>
+          </a:prstGeom>
+          <a:noFill xmlns:a="http://schemas.openxmlformats.org/drawingml/2006/main"/>
+          <a:ln xmlns:a="http://schemas.openxmlformats.org/drawingml/2006/main" w="0">
+            <a:noFill/>
+          </a:ln>
+        </p:spPr>
+        <p:txBody>
+          <a:bodyPr xmlns:a="http://schemas.openxmlformats.org/drawingml/2006/main" lIns="0" tIns="0" rIns="0" bIns="0" anchor="t">
+            <a:noAutofit/>
+          </a:bodyPr>
+          <a:lstStyle xmlns:a="http://schemas.openxmlformats.org/drawingml/2006/main"/>
+          <a:p xmlns:a="http://schemas.openxmlformats.org/drawingml/2006/main">
+            <a:pPr>
+              <a:defRPr sz="2250" b="0">
+                <a:solidFill>
+                  <a:srgbClr val="253643"/>
+                </a:solidFill>
+                <a:latin typeface="Arial"/>
+                <a:ea typeface="Arial"/>
+                <a:cs typeface="Arial"/>
+              </a:defRPr>
+            </a:pPr>
+            <a:r>
+              <a:rPr sz="2250" b="0">
+                <a:solidFill>
+                  <a:srgbClr val="253643"/>
+                </a:solidFill>
+                <a:latin typeface="Arial"/>
+                <a:ea typeface="Arial"/>
+                <a:cs typeface="Arial"/>
+              </a:rPr>
+              <a:t>Equivalente em API Standard</a:t>
+            </a:r>
+          </a:p>
+          <a:p xmlns:a="http://schemas.openxmlformats.org/drawingml/2006/main">
+            <a:pPr>
+              <a:defRPr sz="2250" b="0">
+                <a:solidFill>
+                  <a:srgbClr val="253643"/>
+                </a:solidFill>
+                <a:latin typeface="Arial"/>
+                <a:ea typeface="Arial"/>
+                <a:cs typeface="Arial"/>
+              </a:defRPr>
+            </a:pPr>
+            <a:r>
+              <a:rPr sz="2250" b="0">
+                <a:solidFill>
+                  <a:srgbClr val="253643"/>
+                </a:solidFill>
+                <a:latin typeface="Arial"/>
+                <a:ea typeface="Arial"/>
+                <a:cs typeface="Arial"/>
+              </a:rPr>
+              <a:t>Consumo registrado × preços</a:t>
+            </a:r>
+          </a:p>
+        </p:txBody>
+      </p:sp>
+      <p:sp>
+        <p:nvSpPr>
+          <p:cNvPr id="7" name="API Fast: cerca de US$ 2.600 para os mesmos tokens.">
+            <a:extLst xmlns:a="http://schemas.openxmlformats.org/drawingml/2006/main">
+              <a:ext uri="{FF2B5EF4-FFF2-40B4-BE49-F238E27FC236}">
+                <a16:creationId xmlns:a16="http://schemas.microsoft.com/office/drawing/2014/main" id="{F3DFE9EF-EDD8-438D-B8B9-1C5DFB74BFA6}"/>
+              </a:ext>
+            </a:extLst>
+          </p:cNvPr>
+          <p:cNvSpPr>
+            <a:spLocks xmlns:a="http://schemas.openxmlformats.org/drawingml/2006/main" noGrp="1"/>
+          </p:cNvSpPr>
+          <p:nvPr/>
+        </p:nvSpPr>
+        <p:spPr>
+          <a:xfrm xmlns:a="http://schemas.openxmlformats.org/drawingml/2006/main">
+            <a:off x="685800" y="4686300"/>
+            <a:ext cx="10820400" cy="619125"/>
+          </a:xfrm>
+          <a:prstGeom xmlns:a="http://schemas.openxmlformats.org/drawingml/2006/main" prst="rect">
+            <a:avLst/>
+          </a:prstGeom>
+          <a:noFill xmlns:a="http://schemas.openxmlformats.org/drawingml/2006/main"/>
+          <a:ln xmlns:a="http://schemas.openxmlformats.org/drawingml/2006/main" w="0">
+            <a:noFill/>
+          </a:ln>
+        </p:spPr>
+        <p:txBody>
+          <a:bodyPr xmlns:a="http://schemas.openxmlformats.org/drawingml/2006/main" lIns="0" tIns="0" rIns="0" bIns="0" anchor="t">
+            <a:noAutofit/>
+          </a:bodyPr>
+          <a:lstStyle xmlns:a="http://schemas.openxmlformats.org/drawingml/2006/main"/>
+          <a:p xmlns:a="http://schemas.openxmlformats.org/drawingml/2006/main">
+            <a:pPr>
+              <a:defRPr sz="2325" b="1">
                 <a:solidFill>
                   <a:srgbClr val="B35B32"/>
                 </a:solidFill>
@@ -4234,7 +4462,7 @@
               </a:defRPr>
             </a:pPr>
             <a:r>
-              <a:rPr sz="5700" b="1">
+              <a:rPr sz="2325" b="1">
                 <a:solidFill>
                   <a:srgbClr val="B35B32"/>
                 </a:solidFill>
@@ -4242,183 +4470,46 @@
                 <a:ea typeface="Arial"/>
                 <a:cs typeface="Arial"/>
               </a:rPr>
-              <a:t>62,6%</a:t>
-            </a:r>
-          </a:p>
-        </p:txBody>
-      </p:sp>
-      <p:sp>
-        <p:nvSpPr>
-          <p:cNvPr id="6" name="Cobertura observada&#10;em um parâmetro">
-            <a:extLst xmlns:a="http://schemas.openxmlformats.org/drawingml/2006/main">
-              <a:ext uri="{FF2B5EF4-FFF2-40B4-BE49-F238E27FC236}">
-                <a16:creationId xmlns:a16="http://schemas.microsoft.com/office/drawing/2014/main" id="{E398CBA0-BC6C-4119-AC76-0AE4F4E2806E}"/>
-              </a:ext>
-            </a:extLst>
-          </p:cNvPr>
-          <p:cNvSpPr>
-            <a:spLocks xmlns:a="http://schemas.openxmlformats.org/drawingml/2006/main" noGrp="1"/>
-          </p:cNvSpPr>
-          <p:nvPr/>
-        </p:nvSpPr>
-        <p:spPr>
-          <a:xfrm xmlns:a="http://schemas.openxmlformats.org/drawingml/2006/main">
-            <a:off x="6572250" y="3124200"/>
-            <a:ext cx="4953000" cy="1047750"/>
-          </a:xfrm>
-          <a:prstGeom xmlns:a="http://schemas.openxmlformats.org/drawingml/2006/main" prst="rect">
-            <a:avLst/>
-          </a:prstGeom>
-          <a:noFill xmlns:a="http://schemas.openxmlformats.org/drawingml/2006/main"/>
-          <a:ln xmlns:a="http://schemas.openxmlformats.org/drawingml/2006/main" w="0">
-            <a:noFill/>
-          </a:ln>
-        </p:spPr>
-        <p:txBody>
-          <a:bodyPr xmlns:a="http://schemas.openxmlformats.org/drawingml/2006/main" lIns="0" tIns="0" rIns="0" bIns="0" anchor="t">
-            <a:noAutofit/>
-          </a:bodyPr>
-          <a:lstStyle xmlns:a="http://schemas.openxmlformats.org/drawingml/2006/main"/>
-          <a:p xmlns:a="http://schemas.openxmlformats.org/drawingml/2006/main">
-            <a:pPr>
-              <a:defRPr sz="2400" b="0">
-                <a:solidFill>
-                  <a:srgbClr val="253643"/>
-                </a:solidFill>
-                <a:latin typeface="Arial"/>
-                <a:ea typeface="Arial"/>
-                <a:cs typeface="Arial"/>
-              </a:defRPr>
-            </a:pPr>
-            <a:r>
-              <a:rPr sz="2400" b="0">
-                <a:solidFill>
-                  <a:srgbClr val="253643"/>
-                </a:solidFill>
-                <a:latin typeface="Arial"/>
-                <a:ea typeface="Arial"/>
-                <a:cs typeface="Arial"/>
-              </a:rPr>
-              <a:t>Cobertura observada</a:t>
-            </a:r>
-          </a:p>
-          <a:p xmlns:a="http://schemas.openxmlformats.org/drawingml/2006/main">
-            <a:pPr>
-              <a:defRPr sz="2400" b="0">
-                <a:solidFill>
-                  <a:srgbClr val="253643"/>
-                </a:solidFill>
-                <a:latin typeface="Arial"/>
-                <a:ea typeface="Arial"/>
-                <a:cs typeface="Arial"/>
-              </a:defRPr>
-            </a:pPr>
-            <a:r>
-              <a:rPr sz="2400" b="0">
-                <a:solidFill>
-                  <a:srgbClr val="253643"/>
-                </a:solidFill>
-                <a:latin typeface="Arial"/>
-                <a:ea typeface="Arial"/>
-                <a:cs typeface="Arial"/>
-              </a:rPr>
-              <a:t>em um parâmetro</a:t>
-            </a:r>
-          </a:p>
-        </p:txBody>
-      </p:sp>
-      <p:sp>
-        <p:nvSpPr>
-          <p:cNvPr id="7" name="313 de 500 casos continham a verdade simulada.">
-            <a:extLst xmlns:a="http://schemas.openxmlformats.org/drawingml/2006/main">
-              <a:ext uri="{FF2B5EF4-FFF2-40B4-BE49-F238E27FC236}">
-                <a16:creationId xmlns:a16="http://schemas.microsoft.com/office/drawing/2014/main" id="{5044AAC8-8615-475C-9504-0E6B6644DEBA}"/>
-              </a:ext>
-            </a:extLst>
-          </p:cNvPr>
-          <p:cNvSpPr>
-            <a:spLocks xmlns:a="http://schemas.openxmlformats.org/drawingml/2006/main" noGrp="1"/>
-          </p:cNvSpPr>
-          <p:nvPr/>
-        </p:nvSpPr>
-        <p:spPr>
-          <a:xfrm xmlns:a="http://schemas.openxmlformats.org/drawingml/2006/main">
-            <a:off x="685800" y="4838700"/>
-            <a:ext cx="10572750" cy="523875"/>
-          </a:xfrm>
-          <a:prstGeom xmlns:a="http://schemas.openxmlformats.org/drawingml/2006/main" prst="rect">
-            <a:avLst/>
-          </a:prstGeom>
-          <a:noFill xmlns:a="http://schemas.openxmlformats.org/drawingml/2006/main"/>
-          <a:ln xmlns:a="http://schemas.openxmlformats.org/drawingml/2006/main" w="0">
-            <a:noFill/>
-          </a:ln>
-        </p:spPr>
-        <p:txBody>
-          <a:bodyPr xmlns:a="http://schemas.openxmlformats.org/drawingml/2006/main" lIns="0" tIns="0" rIns="0" bIns="0" anchor="t">
-            <a:noAutofit/>
-          </a:bodyPr>
-          <a:lstStyle xmlns:a="http://schemas.openxmlformats.org/drawingml/2006/main"/>
-          <a:p xmlns:a="http://schemas.openxmlformats.org/drawingml/2006/main">
-            <a:pPr>
-              <a:defRPr sz="2625" b="1">
-                <a:solidFill>
-                  <a:srgbClr val="17324D"/>
-                </a:solidFill>
-                <a:latin typeface="Arial"/>
-                <a:ea typeface="Arial"/>
-                <a:cs typeface="Arial"/>
-              </a:defRPr>
-            </a:pPr>
-            <a:r>
-              <a:rPr sz="2625" b="1">
-                <a:solidFill>
-                  <a:srgbClr val="17324D"/>
-                </a:solidFill>
-                <a:latin typeface="Arial"/>
-                <a:ea typeface="Arial"/>
-                <a:cs typeface="Arial"/>
-              </a:rPr>
-              <a:t>313 de 500 casos continham a verdade simulada.</a:t>
-            </a:r>
-          </a:p>
-        </p:txBody>
-      </p:sp>
-      <p:sp>
-        <p:nvSpPr>
-          <p:cNvPr id="8" name="As simulações permitiram detectar uma limitação da apro">
-            <a:extLst xmlns:a="http://schemas.openxmlformats.org/drawingml/2006/main">
-              <a:ext uri="{FF2B5EF4-FFF2-40B4-BE49-F238E27FC236}">
-                <a16:creationId xmlns:a16="http://schemas.microsoft.com/office/drawing/2014/main" id="{E13C96FB-3C64-4176-AD63-F53B532054C3}"/>
-              </a:ext>
-            </a:extLst>
-          </p:cNvPr>
-          <p:cNvSpPr>
-            <a:spLocks xmlns:a="http://schemas.openxmlformats.org/drawingml/2006/main" noGrp="1"/>
-          </p:cNvSpPr>
-          <p:nvPr/>
-        </p:nvSpPr>
-        <p:spPr>
-          <a:xfrm xmlns:a="http://schemas.openxmlformats.org/drawingml/2006/main">
-            <a:off x="685800" y="5581650"/>
-            <a:ext cx="10572750" cy="428625"/>
-          </a:xfrm>
-          <a:prstGeom xmlns:a="http://schemas.openxmlformats.org/drawingml/2006/main" prst="rect">
-            <a:avLst/>
-          </a:prstGeom>
-          <a:noFill xmlns:a="http://schemas.openxmlformats.org/drawingml/2006/main"/>
-          <a:ln xmlns:a="http://schemas.openxmlformats.org/drawingml/2006/main" w="0">
-            <a:noFill/>
-          </a:ln>
-        </p:spPr>
-        <p:txBody>
-          <a:bodyPr xmlns:a="http://schemas.openxmlformats.org/drawingml/2006/main" lIns="0" tIns="0" rIns="0" bIns="0" anchor="t">
-            <a:noAutofit/>
-          </a:bodyPr>
-          <a:lstStyle xmlns:a="http://schemas.openxmlformats.org/drawingml/2006/main"/>
-          <a:p xmlns:a="http://schemas.openxmlformats.org/drawingml/2006/main">
-            <a:pPr>
-              <a:defRPr sz="2025" b="0">
+              <a:t>API Fast: cerca de US$ 2.600 para os mesmos tokens.</a:t>
+            </a:r>
+          </a:p>
+        </p:txBody>
+      </p:sp>
+      <p:sp>
+        <p:nvSpPr>
+          <p:cNvPr id="8" name="Estimativas, não faturas. Excluem Gemini, computação lo">
+            <a:extLst xmlns:a="http://schemas.openxmlformats.org/drawingml/2006/main">
+              <a:ext uri="{FF2B5EF4-FFF2-40B4-BE49-F238E27FC236}">
+                <a16:creationId xmlns:a16="http://schemas.microsoft.com/office/drawing/2014/main" id="{765F4853-D753-4E30-AE5F-33E48AF028E4}"/>
+              </a:ext>
+            </a:extLst>
+          </p:cNvPr>
+          <p:cNvSpPr>
+            <a:spLocks xmlns:a="http://schemas.openxmlformats.org/drawingml/2006/main" noGrp="1"/>
+          </p:cNvSpPr>
+          <p:nvPr/>
+        </p:nvSpPr>
+        <p:spPr>
+          <a:xfrm xmlns:a="http://schemas.openxmlformats.org/drawingml/2006/main">
+            <a:off x="685800" y="5600700"/>
+            <a:ext cx="10820400" cy="685800"/>
+          </a:xfrm>
+          <a:prstGeom xmlns:a="http://schemas.openxmlformats.org/drawingml/2006/main" prst="rect">
+            <a:avLst/>
+          </a:prstGeom>
+          <a:noFill xmlns:a="http://schemas.openxmlformats.org/drawingml/2006/main"/>
+          <a:ln xmlns:a="http://schemas.openxmlformats.org/drawingml/2006/main" w="0">
+            <a:noFill/>
+          </a:ln>
+        </p:spPr>
+        <p:txBody>
+          <a:bodyPr xmlns:a="http://schemas.openxmlformats.org/drawingml/2006/main" lIns="0" tIns="0" rIns="0" bIns="0" anchor="t">
+            <a:noAutofit/>
+          </a:bodyPr>
+          <a:lstStyle xmlns:a="http://schemas.openxmlformats.org/drawingml/2006/main"/>
+          <a:p xmlns:a="http://schemas.openxmlformats.org/drawingml/2006/main">
+            <a:pPr>
+              <a:defRPr sz="1800" b="0">
                 <a:solidFill>
                   <a:srgbClr val="586B79"/>
                 </a:solidFill>
@@ -4428,7 +4519,7 @@
               </a:defRPr>
             </a:pPr>
             <a:r>
-              <a:rPr sz="2025" b="0">
+              <a:rPr sz="1800" b="0">
                 <a:solidFill>
                   <a:srgbClr val="586B79"/>
                 </a:solidFill>
@@ -4436,7 +4527,30 @@
                 <a:ea typeface="Arial"/>
                 <a:cs typeface="Arial"/>
               </a:rPr>
-              <a:t>As simulações permitiram detectar uma limitação da aproximação.</a:t>
+              <a:t>Estimativas, não faturas. Excluem Gemini, computação local, tarifas</a:t>
+            </a:r>
+          </a:p>
+          <a:p xmlns:a="http://schemas.openxmlformats.org/drawingml/2006/main">
+            <a:pPr>
+              <a:defRPr sz="1800" b="0">
+                <a:solidFill>
+                  <a:srgbClr val="586B79"/>
+                </a:solidFill>
+                <a:latin typeface="Arial"/>
+                <a:ea typeface="Arial"/>
+                <a:cs typeface="Arial"/>
+              </a:defRPr>
+            </a:pPr>
+            <a:r>
+              <a:rPr sz="1800" b="0">
+                <a:solidFill>
+                  <a:srgbClr val="586B79"/>
+                </a:solidFill>
+                <a:latin typeface="Arial"/>
+                <a:ea typeface="Arial"/>
+                <a:cs typeface="Arial"/>
+              </a:rPr>
+              <a:t>adicionais de ferramentas e elaboração do estudo de caso.</a:t>
             </a:r>
           </a:p>
         </p:txBody>
@@ -4444,7 +4558,7 @@
     </p:spTree>
     <p:extLst>
       <p:ext uri="{BB962C8B-B14F-4D97-AF65-F5344CB8AC3E}">
-        <p14:creationId xmlns:p14="http://schemas.microsoft.com/office/powerpoint/2010/main" val="2052276959"/>
+        <p14:creationId xmlns:p14="http://schemas.microsoft.com/office/powerpoint/2010/main" val="1015815037"/>
       </p:ext>
     </p:extLst>
   </p:cSld>
@@ -4472,10 +4586,10 @@
       </p:grpSpPr>
       <p:sp>
         <p:nvSpPr>
-          <p:cNvPr id="9" name="Correções e perguntas ainda abertas">
-            <a:extLst xmlns:a="http://schemas.openxmlformats.org/drawingml/2006/main">
-              <a:ext uri="{FF2B5EF4-FFF2-40B4-BE49-F238E27FC236}">
-                <a16:creationId xmlns:a16="http://schemas.microsoft.com/office/drawing/2014/main" id="{2D4ED27B-6396-43D1-A846-D3E4EE56752A}"/>
+          <p:cNvPr id="9" name="Um controle expôs confiança excessiva">
+            <a:extLst xmlns:a="http://schemas.openxmlformats.org/drawingml/2006/main">
+              <a:ext uri="{FF2B5EF4-FFF2-40B4-BE49-F238E27FC236}">
+                <a16:creationId xmlns:a16="http://schemas.microsoft.com/office/drawing/2014/main" id="{7A0F40C0-BC30-41EA-AA7A-753B88C3CE4E}"/>
               </a:ext>
             </a:extLst>
           </p:cNvPr>
@@ -4522,17 +4636,17 @@
                 <a:ea typeface="Arial"/>
                 <a:cs typeface="Arial"/>
               </a:rPr>
-              <a:t>Correções e perguntas ainda abertas</a:t>
-            </a:r>
-          </a:p>
-        </p:txBody>
-      </p:sp>
-      <p:sp>
-        <p:nvSpPr>
-          <p:cNvPr id="2" name="12 / 20">
-            <a:extLst xmlns:a="http://schemas.openxmlformats.org/drawingml/2006/main">
-              <a:ext uri="{FF2B5EF4-FFF2-40B4-BE49-F238E27FC236}">
-                <a16:creationId xmlns:a16="http://schemas.microsoft.com/office/drawing/2014/main" id="{9AAABA99-9966-4131-8A34-5CAE512F6872}"/>
+              <a:t>Um controle expôs confiança excessiva</a:t>
+            </a:r>
+          </a:p>
+        </p:txBody>
+      </p:sp>
+      <p:sp>
+        <p:nvSpPr>
+          <p:cNvPr id="2" name="12 / 21">
+            <a:extLst xmlns:a="http://schemas.openxmlformats.org/drawingml/2006/main">
+              <a:ext uri="{FF2B5EF4-FFF2-40B4-BE49-F238E27FC236}">
+                <a16:creationId xmlns:a16="http://schemas.microsoft.com/office/drawing/2014/main" id="{6371BB6C-1648-442A-BD38-95D8BB232D2E}"/>
               </a:ext>
             </a:extLst>
           </p:cNvPr>
@@ -4579,17 +4693,17 @@
                 <a:ea typeface="Arial"/>
                 <a:cs typeface="Arial"/>
               </a:rPr>
-              <a:t>12 / 20</a:t>
-            </a:r>
-          </a:p>
-        </p:txBody>
-      </p:sp>
-      <p:sp>
-        <p:nvSpPr>
-          <p:cNvPr id="3" name="Texto">
-            <a:extLst xmlns:a="http://schemas.openxmlformats.org/drawingml/2006/main">
-              <a:ext uri="{FF2B5EF4-FFF2-40B4-BE49-F238E27FC236}">
-                <a16:creationId xmlns:a16="http://schemas.microsoft.com/office/drawing/2014/main" id="{6A9E22DA-B49E-450E-B2C1-DB855FB51693}"/>
+              <a:t>12 / 21</a:t>
+            </a:r>
+          </a:p>
+        </p:txBody>
+      </p:sp>
+      <p:sp>
+        <p:nvSpPr>
+          <p:cNvPr id="3" name="90%">
+            <a:extLst xmlns:a="http://schemas.openxmlformats.org/drawingml/2006/main">
+              <a:ext uri="{FF2B5EF4-FFF2-40B4-BE49-F238E27FC236}">
+                <a16:creationId xmlns:a16="http://schemas.microsoft.com/office/drawing/2014/main" id="{4C9EC805-1E2E-4DD5-A966-D9D2015365B0}"/>
               </a:ext>
             </a:extLst>
           </p:cNvPr>
@@ -4601,24 +4715,24 @@
         <p:spPr>
           <a:xfrm xmlns:a="http://schemas.openxmlformats.org/drawingml/2006/main">
             <a:off x="685800" y="1905000"/>
-            <a:ext cx="2524125" cy="762000"/>
-          </a:xfrm>
-          <a:prstGeom xmlns:a="http://schemas.openxmlformats.org/drawingml/2006/main" prst="rect">
-            <a:avLst/>
-          </a:prstGeom>
-          <a:noFill xmlns:a="http://schemas.openxmlformats.org/drawingml/2006/main"/>
-          <a:ln xmlns:a="http://schemas.openxmlformats.org/drawingml/2006/main" w="0">
-            <a:noFill/>
-          </a:ln>
-        </p:spPr>
-        <p:txBody>
-          <a:bodyPr xmlns:a="http://schemas.openxmlformats.org/drawingml/2006/main" lIns="0" tIns="0" rIns="0" bIns="0" anchor="t">
-            <a:noAutofit/>
-          </a:bodyPr>
-          <a:lstStyle xmlns:a="http://schemas.openxmlformats.org/drawingml/2006/main"/>
-          <a:p xmlns:a="http://schemas.openxmlformats.org/drawingml/2006/main">
-            <a:pPr>
-              <a:defRPr sz="2250" b="1">
+            <a:ext cx="4953000" cy="952500"/>
+          </a:xfrm>
+          <a:prstGeom xmlns:a="http://schemas.openxmlformats.org/drawingml/2006/main" prst="rect">
+            <a:avLst/>
+          </a:prstGeom>
+          <a:noFill xmlns:a="http://schemas.openxmlformats.org/drawingml/2006/main"/>
+          <a:ln xmlns:a="http://schemas.openxmlformats.org/drawingml/2006/main" w="0">
+            <a:noFill/>
+          </a:ln>
+        </p:spPr>
+        <p:txBody>
+          <a:bodyPr xmlns:a="http://schemas.openxmlformats.org/drawingml/2006/main" lIns="0" tIns="0" rIns="0" bIns="0" anchor="t">
+            <a:noAutofit/>
+          </a:bodyPr>
+          <a:lstStyle xmlns:a="http://schemas.openxmlformats.org/drawingml/2006/main"/>
+          <a:p xmlns:a="http://schemas.openxmlformats.org/drawingml/2006/main">
+            <a:pPr>
+              <a:defRPr sz="5700" b="1">
                 <a:solidFill>
                   <a:srgbClr val="087F8C"/>
                 </a:solidFill>
@@ -4628,7 +4742,7 @@
               </a:defRPr>
             </a:pPr>
             <a:r>
-              <a:rPr sz="2250" b="1">
+              <a:rPr sz="5700" b="1">
                 <a:solidFill>
                   <a:srgbClr val="087F8C"/>
                 </a:solidFill>
@@ -4636,46 +4750,46 @@
                 <a:ea typeface="Arial"/>
                 <a:cs typeface="Arial"/>
               </a:rPr>
-              <a:t>Texto</a:t>
-            </a:r>
-          </a:p>
-        </p:txBody>
-      </p:sp>
-      <p:sp>
-        <p:nvSpPr>
-          <p:cNvPr id="4" name="Corrigiu uma descrição incompatível com o código.">
-            <a:extLst xmlns:a="http://schemas.openxmlformats.org/drawingml/2006/main">
-              <a:ext uri="{FF2B5EF4-FFF2-40B4-BE49-F238E27FC236}">
-                <a16:creationId xmlns:a16="http://schemas.microsoft.com/office/drawing/2014/main" id="{0C3F9578-23EF-431C-9062-D26B3E8961C3}"/>
-              </a:ext>
-            </a:extLst>
-          </p:cNvPr>
-          <p:cNvSpPr>
-            <a:spLocks xmlns:a="http://schemas.openxmlformats.org/drawingml/2006/main" noGrp="1"/>
-          </p:cNvSpPr>
-          <p:nvPr/>
-        </p:nvSpPr>
-        <p:spPr>
-          <a:xfrm xmlns:a="http://schemas.openxmlformats.org/drawingml/2006/main">
-            <a:off x="3619500" y="1905000"/>
-            <a:ext cx="7620000" cy="857250"/>
-          </a:xfrm>
-          <a:prstGeom xmlns:a="http://schemas.openxmlformats.org/drawingml/2006/main" prst="rect">
-            <a:avLst/>
-          </a:prstGeom>
-          <a:noFill xmlns:a="http://schemas.openxmlformats.org/drawingml/2006/main"/>
-          <a:ln xmlns:a="http://schemas.openxmlformats.org/drawingml/2006/main" w="0">
-            <a:noFill/>
-          </a:ln>
-        </p:spPr>
-        <p:txBody>
-          <a:bodyPr xmlns:a="http://schemas.openxmlformats.org/drawingml/2006/main" lIns="0" tIns="0" rIns="0" bIns="0" anchor="t">
-            <a:noAutofit/>
-          </a:bodyPr>
-          <a:lstStyle xmlns:a="http://schemas.openxmlformats.org/drawingml/2006/main"/>
-          <a:p xmlns:a="http://schemas.openxmlformats.org/drawingml/2006/main">
-            <a:pPr>
-              <a:defRPr sz="2175" b="0">
+              <a:t>90%</a:t>
+            </a:r>
+          </a:p>
+        </p:txBody>
+      </p:sp>
+      <p:sp>
+        <p:nvSpPr>
+          <p:cNvPr id="4" name="Cobertura nominal&#10;esperada">
+            <a:extLst xmlns:a="http://schemas.openxmlformats.org/drawingml/2006/main">
+              <a:ext uri="{FF2B5EF4-FFF2-40B4-BE49-F238E27FC236}">
+                <a16:creationId xmlns:a16="http://schemas.microsoft.com/office/drawing/2014/main" id="{E43CB008-9712-4865-9222-CCB2BA25DD67}"/>
+              </a:ext>
+            </a:extLst>
+          </p:cNvPr>
+          <p:cNvSpPr>
+            <a:spLocks xmlns:a="http://schemas.openxmlformats.org/drawingml/2006/main" noGrp="1"/>
+          </p:cNvSpPr>
+          <p:nvPr/>
+        </p:nvSpPr>
+        <p:spPr>
+          <a:xfrm xmlns:a="http://schemas.openxmlformats.org/drawingml/2006/main">
+            <a:off x="685800" y="3124200"/>
+            <a:ext cx="4953000" cy="1047750"/>
+          </a:xfrm>
+          <a:prstGeom xmlns:a="http://schemas.openxmlformats.org/drawingml/2006/main" prst="rect">
+            <a:avLst/>
+          </a:prstGeom>
+          <a:noFill xmlns:a="http://schemas.openxmlformats.org/drawingml/2006/main"/>
+          <a:ln xmlns:a="http://schemas.openxmlformats.org/drawingml/2006/main" w="0">
+            <a:noFill/>
+          </a:ln>
+        </p:spPr>
+        <p:txBody>
+          <a:bodyPr xmlns:a="http://schemas.openxmlformats.org/drawingml/2006/main" lIns="0" tIns="0" rIns="0" bIns="0" anchor="t">
+            <a:noAutofit/>
+          </a:bodyPr>
+          <a:lstStyle xmlns:a="http://schemas.openxmlformats.org/drawingml/2006/main"/>
+          <a:p xmlns:a="http://schemas.openxmlformats.org/drawingml/2006/main">
+            <a:pPr>
+              <a:defRPr sz="2400" b="0">
                 <a:solidFill>
                   <a:srgbClr val="253643"/>
                 </a:solidFill>
@@ -4685,7 +4799,7 @@
               </a:defRPr>
             </a:pPr>
             <a:r>
-              <a:rPr sz="2175" b="0">
+              <a:rPr sz="2400" b="0">
                 <a:solidFill>
                   <a:srgbClr val="253643"/>
                 </a:solidFill>
@@ -4693,103 +4807,12 @@
                 <a:ea typeface="Arial"/>
                 <a:cs typeface="Arial"/>
               </a:rPr>
-              <a:t>Corrigiu uma descrição incompatível com o código.</a:t>
-            </a:r>
-          </a:p>
-        </p:txBody>
-      </p:sp>
-      <p:sp>
-        <p:nvSpPr>
-          <p:cNvPr id="5" name="Execução">
-            <a:extLst xmlns:a="http://schemas.openxmlformats.org/drawingml/2006/main">
-              <a:ext uri="{FF2B5EF4-FFF2-40B4-BE49-F238E27FC236}">
-                <a16:creationId xmlns:a16="http://schemas.microsoft.com/office/drawing/2014/main" id="{3608599C-4965-485E-AC29-80F63FEA8FDC}"/>
-              </a:ext>
-            </a:extLst>
-          </p:cNvPr>
-          <p:cNvSpPr>
-            <a:spLocks xmlns:a="http://schemas.openxmlformats.org/drawingml/2006/main" noGrp="1"/>
-          </p:cNvSpPr>
-          <p:nvPr/>
-        </p:nvSpPr>
-        <p:spPr>
-          <a:xfrm xmlns:a="http://schemas.openxmlformats.org/drawingml/2006/main">
-            <a:off x="685800" y="3000375"/>
-            <a:ext cx="2524125" cy="762000"/>
-          </a:xfrm>
-          <a:prstGeom xmlns:a="http://schemas.openxmlformats.org/drawingml/2006/main" prst="rect">
-            <a:avLst/>
-          </a:prstGeom>
-          <a:noFill xmlns:a="http://schemas.openxmlformats.org/drawingml/2006/main"/>
-          <a:ln xmlns:a="http://schemas.openxmlformats.org/drawingml/2006/main" w="0">
-            <a:noFill/>
-          </a:ln>
-        </p:spPr>
-        <p:txBody>
-          <a:bodyPr xmlns:a="http://schemas.openxmlformats.org/drawingml/2006/main" lIns="0" tIns="0" rIns="0" bIns="0" anchor="t">
-            <a:noAutofit/>
-          </a:bodyPr>
-          <a:lstStyle xmlns:a="http://schemas.openxmlformats.org/drawingml/2006/main"/>
-          <a:p xmlns:a="http://schemas.openxmlformats.org/drawingml/2006/main">
-            <a:pPr>
-              <a:defRPr sz="2250" b="1">
-                <a:solidFill>
-                  <a:srgbClr val="087F8C"/>
-                </a:solidFill>
-                <a:latin typeface="Arial"/>
-                <a:ea typeface="Arial"/>
-                <a:cs typeface="Arial"/>
-              </a:defRPr>
-            </a:pPr>
-            <a:r>
-              <a:rPr sz="2250" b="1">
-                <a:solidFill>
-                  <a:srgbClr val="087F8C"/>
-                </a:solidFill>
-                <a:latin typeface="Arial"/>
-                <a:ea typeface="Arial"/>
-                <a:cs typeface="Arial"/>
-              </a:rPr>
-              <a:t>Execução</a:t>
-            </a:r>
-          </a:p>
-        </p:txBody>
-      </p:sp>
-      <p:sp>
-        <p:nvSpPr>
-          <p:cNvPr id="6" name="Recuperou cálculos e insumos após falhas operacionais.">
-            <a:extLst xmlns:a="http://schemas.openxmlformats.org/drawingml/2006/main">
-              <a:ext uri="{FF2B5EF4-FFF2-40B4-BE49-F238E27FC236}">
-                <a16:creationId xmlns:a16="http://schemas.microsoft.com/office/drawing/2014/main" id="{7A6F9C73-162F-4C38-AD5E-63B9974077C5}"/>
-              </a:ext>
-            </a:extLst>
-          </p:cNvPr>
-          <p:cNvSpPr>
-            <a:spLocks xmlns:a="http://schemas.openxmlformats.org/drawingml/2006/main" noGrp="1"/>
-          </p:cNvSpPr>
-          <p:nvPr/>
-        </p:nvSpPr>
-        <p:spPr>
-          <a:xfrm xmlns:a="http://schemas.openxmlformats.org/drawingml/2006/main">
-            <a:off x="3619500" y="3000375"/>
-            <a:ext cx="7620000" cy="857250"/>
-          </a:xfrm>
-          <a:prstGeom xmlns:a="http://schemas.openxmlformats.org/drawingml/2006/main" prst="rect">
-            <a:avLst/>
-          </a:prstGeom>
-          <a:noFill xmlns:a="http://schemas.openxmlformats.org/drawingml/2006/main"/>
-          <a:ln xmlns:a="http://schemas.openxmlformats.org/drawingml/2006/main" w="0">
-            <a:noFill/>
-          </a:ln>
-        </p:spPr>
-        <p:txBody>
-          <a:bodyPr xmlns:a="http://schemas.openxmlformats.org/drawingml/2006/main" lIns="0" tIns="0" rIns="0" bIns="0" anchor="t">
-            <a:noAutofit/>
-          </a:bodyPr>
-          <a:lstStyle xmlns:a="http://schemas.openxmlformats.org/drawingml/2006/main"/>
-          <a:p xmlns:a="http://schemas.openxmlformats.org/drawingml/2006/main">
-            <a:pPr>
-              <a:defRPr sz="2175" b="0">
+              <a:t>Cobertura nominal</a:t>
+            </a:r>
+          </a:p>
+          <a:p xmlns:a="http://schemas.openxmlformats.org/drawingml/2006/main">
+            <a:pPr>
+              <a:defRPr sz="2400" b="0">
                 <a:solidFill>
                   <a:srgbClr val="253643"/>
                 </a:solidFill>
@@ -4799,7 +4822,7 @@
               </a:defRPr>
             </a:pPr>
             <a:r>
-              <a:rPr sz="2175" b="0">
+              <a:rPr sz="2400" b="0">
                 <a:solidFill>
                   <a:srgbClr val="253643"/>
                 </a:solidFill>
@@ -4807,103 +4830,103 @@
                 <a:ea typeface="Arial"/>
                 <a:cs typeface="Arial"/>
               </a:rPr>
-              <a:t>Recuperou cálculos e insumos após falhas operacionais.</a:t>
-            </a:r>
-          </a:p>
-        </p:txBody>
-      </p:sp>
-      <p:sp>
-        <p:nvSpPr>
-          <p:cNvPr id="7" name="Escopo">
-            <a:extLst xmlns:a="http://schemas.openxmlformats.org/drawingml/2006/main">
-              <a:ext uri="{FF2B5EF4-FFF2-40B4-BE49-F238E27FC236}">
-                <a16:creationId xmlns:a16="http://schemas.microsoft.com/office/drawing/2014/main" id="{AEC309BA-37BB-461D-9F8B-593455CB240C}"/>
-              </a:ext>
-            </a:extLst>
-          </p:cNvPr>
-          <p:cNvSpPr>
-            <a:spLocks xmlns:a="http://schemas.openxmlformats.org/drawingml/2006/main" noGrp="1"/>
-          </p:cNvSpPr>
-          <p:nvPr/>
-        </p:nvSpPr>
-        <p:spPr>
-          <a:xfrm xmlns:a="http://schemas.openxmlformats.org/drawingml/2006/main">
-            <a:off x="685800" y="4095750"/>
-            <a:ext cx="2524125" cy="762000"/>
-          </a:xfrm>
-          <a:prstGeom xmlns:a="http://schemas.openxmlformats.org/drawingml/2006/main" prst="rect">
-            <a:avLst/>
-          </a:prstGeom>
-          <a:noFill xmlns:a="http://schemas.openxmlformats.org/drawingml/2006/main"/>
-          <a:ln xmlns:a="http://schemas.openxmlformats.org/drawingml/2006/main" w="0">
-            <a:noFill/>
-          </a:ln>
-        </p:spPr>
-        <p:txBody>
-          <a:bodyPr xmlns:a="http://schemas.openxmlformats.org/drawingml/2006/main" lIns="0" tIns="0" rIns="0" bIns="0" anchor="t">
-            <a:noAutofit/>
-          </a:bodyPr>
-          <a:lstStyle xmlns:a="http://schemas.openxmlformats.org/drawingml/2006/main"/>
-          <a:p xmlns:a="http://schemas.openxmlformats.org/drawingml/2006/main">
-            <a:pPr>
-              <a:defRPr sz="2250" b="1">
-                <a:solidFill>
-                  <a:srgbClr val="087F8C"/>
-                </a:solidFill>
-                <a:latin typeface="Arial"/>
-                <a:ea typeface="Arial"/>
-                <a:cs typeface="Arial"/>
-              </a:defRPr>
-            </a:pPr>
-            <a:r>
-              <a:rPr sz="2250" b="1">
-                <a:solidFill>
-                  <a:srgbClr val="087F8C"/>
-                </a:solidFill>
-                <a:latin typeface="Arial"/>
-                <a:ea typeface="Arial"/>
-                <a:cs typeface="Arial"/>
-              </a:rPr>
-              <a:t>Escopo</a:t>
-            </a:r>
-          </a:p>
-        </p:txBody>
-      </p:sp>
-      <p:sp>
-        <p:nvSpPr>
-          <p:cNvPr id="8" name="Resolveu um estudo mais restrito, preservando a inconcl">
-            <a:extLst xmlns:a="http://schemas.openxmlformats.org/drawingml/2006/main">
-              <a:ext uri="{FF2B5EF4-FFF2-40B4-BE49-F238E27FC236}">
-                <a16:creationId xmlns:a16="http://schemas.microsoft.com/office/drawing/2014/main" id="{ED60A4C1-DCC9-4C45-BF15-FA3C9361E64A}"/>
-              </a:ext>
-            </a:extLst>
-          </p:cNvPr>
-          <p:cNvSpPr>
-            <a:spLocks xmlns:a="http://schemas.openxmlformats.org/drawingml/2006/main" noGrp="1"/>
-          </p:cNvSpPr>
-          <p:nvPr/>
-        </p:nvSpPr>
-        <p:spPr>
-          <a:xfrm xmlns:a="http://schemas.openxmlformats.org/drawingml/2006/main">
-            <a:off x="3619500" y="4095750"/>
-            <a:ext cx="7620000" cy="857250"/>
-          </a:xfrm>
-          <a:prstGeom xmlns:a="http://schemas.openxmlformats.org/drawingml/2006/main" prst="rect">
-            <a:avLst/>
-          </a:prstGeom>
-          <a:noFill xmlns:a="http://schemas.openxmlformats.org/drawingml/2006/main"/>
-          <a:ln xmlns:a="http://schemas.openxmlformats.org/drawingml/2006/main" w="0">
-            <a:noFill/>
-          </a:ln>
-        </p:spPr>
-        <p:txBody>
-          <a:bodyPr xmlns:a="http://schemas.openxmlformats.org/drawingml/2006/main" lIns="0" tIns="0" rIns="0" bIns="0" anchor="t">
-            <a:noAutofit/>
-          </a:bodyPr>
-          <a:lstStyle xmlns:a="http://schemas.openxmlformats.org/drawingml/2006/main"/>
-          <a:p xmlns:a="http://schemas.openxmlformats.org/drawingml/2006/main">
-            <a:pPr>
-              <a:defRPr sz="2175" b="0">
+              <a:t>esperada</a:t>
+            </a:r>
+          </a:p>
+        </p:txBody>
+      </p:sp>
+      <p:sp>
+        <p:nvSpPr>
+          <p:cNvPr id="5" name="62,6%">
+            <a:extLst xmlns:a="http://schemas.openxmlformats.org/drawingml/2006/main">
+              <a:ext uri="{FF2B5EF4-FFF2-40B4-BE49-F238E27FC236}">
+                <a16:creationId xmlns:a16="http://schemas.microsoft.com/office/drawing/2014/main" id="{8EE74219-F28F-411C-A2CD-79051C06FD17}"/>
+              </a:ext>
+            </a:extLst>
+          </p:cNvPr>
+          <p:cNvSpPr>
+            <a:spLocks xmlns:a="http://schemas.openxmlformats.org/drawingml/2006/main" noGrp="1"/>
+          </p:cNvSpPr>
+          <p:nvPr/>
+        </p:nvSpPr>
+        <p:spPr>
+          <a:xfrm xmlns:a="http://schemas.openxmlformats.org/drawingml/2006/main">
+            <a:off x="6572250" y="1905000"/>
+            <a:ext cx="4953000" cy="952500"/>
+          </a:xfrm>
+          <a:prstGeom xmlns:a="http://schemas.openxmlformats.org/drawingml/2006/main" prst="rect">
+            <a:avLst/>
+          </a:prstGeom>
+          <a:noFill xmlns:a="http://schemas.openxmlformats.org/drawingml/2006/main"/>
+          <a:ln xmlns:a="http://schemas.openxmlformats.org/drawingml/2006/main" w="0">
+            <a:noFill/>
+          </a:ln>
+        </p:spPr>
+        <p:txBody>
+          <a:bodyPr xmlns:a="http://schemas.openxmlformats.org/drawingml/2006/main" lIns="0" tIns="0" rIns="0" bIns="0" anchor="t">
+            <a:noAutofit/>
+          </a:bodyPr>
+          <a:lstStyle xmlns:a="http://schemas.openxmlformats.org/drawingml/2006/main"/>
+          <a:p xmlns:a="http://schemas.openxmlformats.org/drawingml/2006/main">
+            <a:pPr>
+              <a:defRPr sz="5700" b="1">
+                <a:solidFill>
+                  <a:srgbClr val="B35B32"/>
+                </a:solidFill>
+                <a:latin typeface="Arial"/>
+                <a:ea typeface="Arial"/>
+                <a:cs typeface="Arial"/>
+              </a:defRPr>
+            </a:pPr>
+            <a:r>
+              <a:rPr sz="5700" b="1">
+                <a:solidFill>
+                  <a:srgbClr val="B35B32"/>
+                </a:solidFill>
+                <a:latin typeface="Arial"/>
+                <a:ea typeface="Arial"/>
+                <a:cs typeface="Arial"/>
+              </a:rPr>
+              <a:t>62,6%</a:t>
+            </a:r>
+          </a:p>
+        </p:txBody>
+      </p:sp>
+      <p:sp>
+        <p:nvSpPr>
+          <p:cNvPr id="6" name="Cobertura observada&#10;em um parâmetro">
+            <a:extLst xmlns:a="http://schemas.openxmlformats.org/drawingml/2006/main">
+              <a:ext uri="{FF2B5EF4-FFF2-40B4-BE49-F238E27FC236}">
+                <a16:creationId xmlns:a16="http://schemas.microsoft.com/office/drawing/2014/main" id="{4715FC29-ECE4-4364-8DA9-CFB7818531FD}"/>
+              </a:ext>
+            </a:extLst>
+          </p:cNvPr>
+          <p:cNvSpPr>
+            <a:spLocks xmlns:a="http://schemas.openxmlformats.org/drawingml/2006/main" noGrp="1"/>
+          </p:cNvSpPr>
+          <p:nvPr/>
+        </p:nvSpPr>
+        <p:spPr>
+          <a:xfrm xmlns:a="http://schemas.openxmlformats.org/drawingml/2006/main">
+            <a:off x="6572250" y="3124200"/>
+            <a:ext cx="4953000" cy="1047750"/>
+          </a:xfrm>
+          <a:prstGeom xmlns:a="http://schemas.openxmlformats.org/drawingml/2006/main" prst="rect">
+            <a:avLst/>
+          </a:prstGeom>
+          <a:noFill xmlns:a="http://schemas.openxmlformats.org/drawingml/2006/main"/>
+          <a:ln xmlns:a="http://schemas.openxmlformats.org/drawingml/2006/main" w="0">
+            <a:noFill/>
+          </a:ln>
+        </p:spPr>
+        <p:txBody>
+          <a:bodyPr xmlns:a="http://schemas.openxmlformats.org/drawingml/2006/main" lIns="0" tIns="0" rIns="0" bIns="0" anchor="t">
+            <a:noAutofit/>
+          </a:bodyPr>
+          <a:lstStyle xmlns:a="http://schemas.openxmlformats.org/drawingml/2006/main"/>
+          <a:p xmlns:a="http://schemas.openxmlformats.org/drawingml/2006/main">
+            <a:pPr>
+              <a:defRPr sz="2400" b="0">
                 <a:solidFill>
                   <a:srgbClr val="253643"/>
                 </a:solidFill>
@@ -4913,7 +4936,7 @@
               </a:defRPr>
             </a:pPr>
             <a:r>
-              <a:rPr sz="2175" b="0">
+              <a:rPr sz="2400" b="0">
                 <a:solidFill>
                   <a:srgbClr val="253643"/>
                 </a:solidFill>
@@ -4921,7 +4944,144 @@
                 <a:ea typeface="Arial"/>
                 <a:cs typeface="Arial"/>
               </a:rPr>
-              <a:t>Resolveu um estudo mais restrito, preservando a inconclusão ampla.</a:t>
+              <a:t>Cobertura observada</a:t>
+            </a:r>
+          </a:p>
+          <a:p xmlns:a="http://schemas.openxmlformats.org/drawingml/2006/main">
+            <a:pPr>
+              <a:defRPr sz="2400" b="0">
+                <a:solidFill>
+                  <a:srgbClr val="253643"/>
+                </a:solidFill>
+                <a:latin typeface="Arial"/>
+                <a:ea typeface="Arial"/>
+                <a:cs typeface="Arial"/>
+              </a:defRPr>
+            </a:pPr>
+            <a:r>
+              <a:rPr sz="2400" b="0">
+                <a:solidFill>
+                  <a:srgbClr val="253643"/>
+                </a:solidFill>
+                <a:latin typeface="Arial"/>
+                <a:ea typeface="Arial"/>
+                <a:cs typeface="Arial"/>
+              </a:rPr>
+              <a:t>em um parâmetro</a:t>
+            </a:r>
+          </a:p>
+        </p:txBody>
+      </p:sp>
+      <p:sp>
+        <p:nvSpPr>
+          <p:cNvPr id="7" name="313 de 500 casos continham a verdade simulada.">
+            <a:extLst xmlns:a="http://schemas.openxmlformats.org/drawingml/2006/main">
+              <a:ext uri="{FF2B5EF4-FFF2-40B4-BE49-F238E27FC236}">
+                <a16:creationId xmlns:a16="http://schemas.microsoft.com/office/drawing/2014/main" id="{900D5513-2272-4B38-A420-6B13BDEBD8A4}"/>
+              </a:ext>
+            </a:extLst>
+          </p:cNvPr>
+          <p:cNvSpPr>
+            <a:spLocks xmlns:a="http://schemas.openxmlformats.org/drawingml/2006/main" noGrp="1"/>
+          </p:cNvSpPr>
+          <p:nvPr/>
+        </p:nvSpPr>
+        <p:spPr>
+          <a:xfrm xmlns:a="http://schemas.openxmlformats.org/drawingml/2006/main">
+            <a:off x="685800" y="4838700"/>
+            <a:ext cx="10572750" cy="523875"/>
+          </a:xfrm>
+          <a:prstGeom xmlns:a="http://schemas.openxmlformats.org/drawingml/2006/main" prst="rect">
+            <a:avLst/>
+          </a:prstGeom>
+          <a:noFill xmlns:a="http://schemas.openxmlformats.org/drawingml/2006/main"/>
+          <a:ln xmlns:a="http://schemas.openxmlformats.org/drawingml/2006/main" w="0">
+            <a:noFill/>
+          </a:ln>
+        </p:spPr>
+        <p:txBody>
+          <a:bodyPr xmlns:a="http://schemas.openxmlformats.org/drawingml/2006/main" lIns="0" tIns="0" rIns="0" bIns="0" anchor="t">
+            <a:noAutofit/>
+          </a:bodyPr>
+          <a:lstStyle xmlns:a="http://schemas.openxmlformats.org/drawingml/2006/main"/>
+          <a:p xmlns:a="http://schemas.openxmlformats.org/drawingml/2006/main">
+            <a:pPr>
+              <a:defRPr sz="2625" b="1">
+                <a:solidFill>
+                  <a:srgbClr val="17324D"/>
+                </a:solidFill>
+                <a:latin typeface="Arial"/>
+                <a:ea typeface="Arial"/>
+                <a:cs typeface="Arial"/>
+              </a:defRPr>
+            </a:pPr>
+            <a:r>
+              <a:rPr sz="2625" b="1">
+                <a:solidFill>
+                  <a:srgbClr val="17324D"/>
+                </a:solidFill>
+                <a:latin typeface="Arial"/>
+                <a:ea typeface="Arial"/>
+                <a:cs typeface="Arial"/>
+              </a:rPr>
+              <a:t>313 de 500 casos continham a verdade simulada.</a:t>
+            </a:r>
+          </a:p>
+        </p:txBody>
+      </p:sp>
+      <p:sp>
+        <p:nvSpPr>
+          <p:cNvPr id="8" name="As simulações permitiram detectar uma limitação da apro">
+            <a:extLst xmlns:a="http://schemas.openxmlformats.org/drawingml/2006/main">
+              <a:ext uri="{FF2B5EF4-FFF2-40B4-BE49-F238E27FC236}">
+                <a16:creationId xmlns:a16="http://schemas.microsoft.com/office/drawing/2014/main" id="{A5878217-BD8A-44DB-807A-E32E46BECDDA}"/>
+              </a:ext>
+            </a:extLst>
+          </p:cNvPr>
+          <p:cNvSpPr>
+            <a:spLocks xmlns:a="http://schemas.openxmlformats.org/drawingml/2006/main" noGrp="1"/>
+          </p:cNvSpPr>
+          <p:nvPr/>
+        </p:nvSpPr>
+        <p:spPr>
+          <a:xfrm xmlns:a="http://schemas.openxmlformats.org/drawingml/2006/main">
+            <a:off x="685800" y="5581650"/>
+            <a:ext cx="10572750" cy="428625"/>
+          </a:xfrm>
+          <a:prstGeom xmlns:a="http://schemas.openxmlformats.org/drawingml/2006/main" prst="rect">
+            <a:avLst/>
+          </a:prstGeom>
+          <a:noFill xmlns:a="http://schemas.openxmlformats.org/drawingml/2006/main"/>
+          <a:ln xmlns:a="http://schemas.openxmlformats.org/drawingml/2006/main" w="0">
+            <a:noFill/>
+          </a:ln>
+        </p:spPr>
+        <p:txBody>
+          <a:bodyPr xmlns:a="http://schemas.openxmlformats.org/drawingml/2006/main" lIns="0" tIns="0" rIns="0" bIns="0" anchor="t">
+            <a:noAutofit/>
+          </a:bodyPr>
+          <a:lstStyle xmlns:a="http://schemas.openxmlformats.org/drawingml/2006/main"/>
+          <a:p xmlns:a="http://schemas.openxmlformats.org/drawingml/2006/main">
+            <a:pPr>
+              <a:defRPr sz="2025" b="0">
+                <a:solidFill>
+                  <a:srgbClr val="586B79"/>
+                </a:solidFill>
+                <a:latin typeface="Arial"/>
+                <a:ea typeface="Arial"/>
+                <a:cs typeface="Arial"/>
+              </a:defRPr>
+            </a:pPr>
+            <a:r>
+              <a:rPr sz="2025" b="0">
+                <a:solidFill>
+                  <a:srgbClr val="586B79"/>
+                </a:solidFill>
+                <a:latin typeface="Arial"/>
+                <a:ea typeface="Arial"/>
+                <a:cs typeface="Arial"/>
+              </a:rPr>
+              <a:t>As simulações permitiram detectar uma limitação da aproximação.</a:t>
             </a:r>
           </a:p>
         </p:txBody>
@@ -4929,7 +5089,7 @@
     </p:spTree>
     <p:extLst>
       <p:ext uri="{BB962C8B-B14F-4D97-AF65-F5344CB8AC3E}">
-        <p14:creationId xmlns:p14="http://schemas.microsoft.com/office/powerpoint/2010/main" val="1054425527"/>
+        <p14:creationId xmlns:p14="http://schemas.microsoft.com/office/powerpoint/2010/main" val="829823110"/>
       </p:ext>
     </p:extLst>
   </p:cSld>
@@ -4957,10 +5117,10 @@
       </p:grpSpPr>
       <p:sp>
         <p:nvSpPr>
-          <p:cNvPr id="8" name="Dois ciclos de revisão com Gemini">
-            <a:extLst xmlns:a="http://schemas.openxmlformats.org/drawingml/2006/main">
-              <a:ext uri="{FF2B5EF4-FFF2-40B4-BE49-F238E27FC236}">
-                <a16:creationId xmlns:a16="http://schemas.microsoft.com/office/drawing/2014/main" id="{9D610A88-D382-4136-AFA7-907C1A4F6FB4}"/>
+          <p:cNvPr id="9" name="Correções e perguntas ainda abertas">
+            <a:extLst xmlns:a="http://schemas.openxmlformats.org/drawingml/2006/main">
+              <a:ext uri="{FF2B5EF4-FFF2-40B4-BE49-F238E27FC236}">
+                <a16:creationId xmlns:a16="http://schemas.microsoft.com/office/drawing/2014/main" id="{2FA86077-2A5E-4C27-A4A2-0173408B8781}"/>
               </a:ext>
             </a:extLst>
           </p:cNvPr>
@@ -5007,17 +5167,17 @@
                 <a:ea typeface="Arial"/>
                 <a:cs typeface="Arial"/>
               </a:rPr>
-              <a:t>Dois ciclos de revisão com Gemini</a:t>
-            </a:r>
-          </a:p>
-        </p:txBody>
-      </p:sp>
-      <p:sp>
-        <p:nvSpPr>
-          <p:cNvPr id="2" name="13 / 20">
-            <a:extLst xmlns:a="http://schemas.openxmlformats.org/drawingml/2006/main">
-              <a:ext uri="{FF2B5EF4-FFF2-40B4-BE49-F238E27FC236}">
-                <a16:creationId xmlns:a16="http://schemas.microsoft.com/office/drawing/2014/main" id="{2E4B6F36-5207-4D3B-9D91-B7DD33360C1C}"/>
+              <a:t>Correções e perguntas ainda abertas</a:t>
+            </a:r>
+          </a:p>
+        </p:txBody>
+      </p:sp>
+      <p:sp>
+        <p:nvSpPr>
+          <p:cNvPr id="2" name="13 / 21">
+            <a:extLst xmlns:a="http://schemas.openxmlformats.org/drawingml/2006/main">
+              <a:ext uri="{FF2B5EF4-FFF2-40B4-BE49-F238E27FC236}">
+                <a16:creationId xmlns:a16="http://schemas.microsoft.com/office/drawing/2014/main" id="{3A7F9042-EC77-4E99-8DDE-403AF07DD8DB}"/>
               </a:ext>
             </a:extLst>
           </p:cNvPr>
@@ -5064,29 +5224,29 @@
                 <a:ea typeface="Arial"/>
                 <a:cs typeface="Arial"/>
               </a:rPr>
-              <a:t>13 / 20</a:t>
-            </a:r>
-          </a:p>
-        </p:txBody>
-      </p:sp>
-      <p:sp>
-        <p:nvSpPr>
-          <p:cNvPr id="3" name="Dissertação">
-            <a:extLst xmlns:a="http://schemas.openxmlformats.org/drawingml/2006/main">
-              <a:ext uri="{FF2B5EF4-FFF2-40B4-BE49-F238E27FC236}">
-                <a16:creationId xmlns:a16="http://schemas.microsoft.com/office/drawing/2014/main" id="{7168B7B0-729A-4FD8-9F38-B688A0C4382F}"/>
-              </a:ext>
-            </a:extLst>
-          </p:cNvPr>
-          <p:cNvSpPr>
-            <a:spLocks xmlns:a="http://schemas.openxmlformats.org/drawingml/2006/main" noGrp="1"/>
-          </p:cNvSpPr>
-          <p:nvPr/>
-        </p:nvSpPr>
-        <p:spPr>
-          <a:xfrm xmlns:a="http://schemas.openxmlformats.org/drawingml/2006/main">
-            <a:off x="685800" y="1981200"/>
-            <a:ext cx="4953000" cy="514350"/>
+              <a:t>13 / 21</a:t>
+            </a:r>
+          </a:p>
+        </p:txBody>
+      </p:sp>
+      <p:sp>
+        <p:nvSpPr>
+          <p:cNvPr id="3" name="Texto">
+            <a:extLst xmlns:a="http://schemas.openxmlformats.org/drawingml/2006/main">
+              <a:ext uri="{FF2B5EF4-FFF2-40B4-BE49-F238E27FC236}">
+                <a16:creationId xmlns:a16="http://schemas.microsoft.com/office/drawing/2014/main" id="{BA8CE73D-7C54-4759-9416-2C3EA2CFD2A4}"/>
+              </a:ext>
+            </a:extLst>
+          </p:cNvPr>
+          <p:cNvSpPr>
+            <a:spLocks xmlns:a="http://schemas.openxmlformats.org/drawingml/2006/main" noGrp="1"/>
+          </p:cNvSpPr>
+          <p:nvPr/>
+        </p:nvSpPr>
+        <p:spPr>
+          <a:xfrm xmlns:a="http://schemas.openxmlformats.org/drawingml/2006/main">
+            <a:off x="685800" y="1905000"/>
+            <a:ext cx="2524125" cy="762000"/>
           </a:xfrm>
           <a:prstGeom xmlns:a="http://schemas.openxmlformats.org/drawingml/2006/main" prst="rect">
             <a:avLst/>
@@ -5121,29 +5281,29 @@
                 <a:ea typeface="Arial"/>
                 <a:cs typeface="Arial"/>
               </a:rPr>
-              <a:t>Dissertação</a:t>
-            </a:r>
-          </a:p>
-        </p:txBody>
-      </p:sp>
-      <p:sp>
-        <p:nvSpPr>
-          <p:cNvPr id="4" name="Críticas científicas&#10;Novos estudos pontuais&#10;Revisão do ">
-            <a:extLst xmlns:a="http://schemas.openxmlformats.org/drawingml/2006/main">
-              <a:ext uri="{FF2B5EF4-FFF2-40B4-BE49-F238E27FC236}">
-                <a16:creationId xmlns:a16="http://schemas.microsoft.com/office/drawing/2014/main" id="{2D53956B-8ACF-491E-9A28-D4E8836A3BD6}"/>
-              </a:ext>
-            </a:extLst>
-          </p:cNvPr>
-          <p:cNvSpPr>
-            <a:spLocks xmlns:a="http://schemas.openxmlformats.org/drawingml/2006/main" noGrp="1"/>
-          </p:cNvSpPr>
-          <p:nvPr/>
-        </p:nvSpPr>
-        <p:spPr>
-          <a:xfrm xmlns:a="http://schemas.openxmlformats.org/drawingml/2006/main">
-            <a:off x="685800" y="2686050"/>
-            <a:ext cx="4953000" cy="2619375"/>
+              <a:t>Texto</a:t>
+            </a:r>
+          </a:p>
+        </p:txBody>
+      </p:sp>
+      <p:sp>
+        <p:nvSpPr>
+          <p:cNvPr id="4" name="Corrigiu uma descrição incompatível com o código.">
+            <a:extLst xmlns:a="http://schemas.openxmlformats.org/drawingml/2006/main">
+              <a:ext uri="{FF2B5EF4-FFF2-40B4-BE49-F238E27FC236}">
+                <a16:creationId xmlns:a16="http://schemas.microsoft.com/office/drawing/2014/main" id="{2952DF3E-4800-40E5-900A-F75298672AAD}"/>
+              </a:ext>
+            </a:extLst>
+          </p:cNvPr>
+          <p:cNvSpPr>
+            <a:spLocks xmlns:a="http://schemas.openxmlformats.org/drawingml/2006/main" noGrp="1"/>
+          </p:cNvSpPr>
+          <p:nvPr/>
+        </p:nvSpPr>
+        <p:spPr>
+          <a:xfrm xmlns:a="http://schemas.openxmlformats.org/drawingml/2006/main">
+            <a:off x="3619500" y="1905000"/>
+            <a:ext cx="7620000" cy="857250"/>
           </a:xfrm>
           <a:prstGeom xmlns:a="http://schemas.openxmlformats.org/drawingml/2006/main" prst="rect">
             <a:avLst/>
@@ -5178,9 +5338,100 @@
                 <a:ea typeface="Arial"/>
                 <a:cs typeface="Arial"/>
               </a:rPr>
-              <a:t>Críticas científicas</a:t>
-            </a:r>
-          </a:p>
+              <a:t>Corrigiu uma descrição incompatível com o código.</a:t>
+            </a:r>
+          </a:p>
+        </p:txBody>
+      </p:sp>
+      <p:sp>
+        <p:nvSpPr>
+          <p:cNvPr id="5" name="Execução">
+            <a:extLst xmlns:a="http://schemas.openxmlformats.org/drawingml/2006/main">
+              <a:ext uri="{FF2B5EF4-FFF2-40B4-BE49-F238E27FC236}">
+                <a16:creationId xmlns:a16="http://schemas.microsoft.com/office/drawing/2014/main" id="{EC281F3B-9958-4CF0-8DED-3B3FD274FA3A}"/>
+              </a:ext>
+            </a:extLst>
+          </p:cNvPr>
+          <p:cNvSpPr>
+            <a:spLocks xmlns:a="http://schemas.openxmlformats.org/drawingml/2006/main" noGrp="1"/>
+          </p:cNvSpPr>
+          <p:nvPr/>
+        </p:nvSpPr>
+        <p:spPr>
+          <a:xfrm xmlns:a="http://schemas.openxmlformats.org/drawingml/2006/main">
+            <a:off x="685800" y="3000375"/>
+            <a:ext cx="2524125" cy="762000"/>
+          </a:xfrm>
+          <a:prstGeom xmlns:a="http://schemas.openxmlformats.org/drawingml/2006/main" prst="rect">
+            <a:avLst/>
+          </a:prstGeom>
+          <a:noFill xmlns:a="http://schemas.openxmlformats.org/drawingml/2006/main"/>
+          <a:ln xmlns:a="http://schemas.openxmlformats.org/drawingml/2006/main" w="0">
+            <a:noFill/>
+          </a:ln>
+        </p:spPr>
+        <p:txBody>
+          <a:bodyPr xmlns:a="http://schemas.openxmlformats.org/drawingml/2006/main" lIns="0" tIns="0" rIns="0" bIns="0" anchor="t">
+            <a:noAutofit/>
+          </a:bodyPr>
+          <a:lstStyle xmlns:a="http://schemas.openxmlformats.org/drawingml/2006/main"/>
+          <a:p xmlns:a="http://schemas.openxmlformats.org/drawingml/2006/main">
+            <a:pPr>
+              <a:defRPr sz="2250" b="1">
+                <a:solidFill>
+                  <a:srgbClr val="087F8C"/>
+                </a:solidFill>
+                <a:latin typeface="Arial"/>
+                <a:ea typeface="Arial"/>
+                <a:cs typeface="Arial"/>
+              </a:defRPr>
+            </a:pPr>
+            <a:r>
+              <a:rPr sz="2250" b="1">
+                <a:solidFill>
+                  <a:srgbClr val="087F8C"/>
+                </a:solidFill>
+                <a:latin typeface="Arial"/>
+                <a:ea typeface="Arial"/>
+                <a:cs typeface="Arial"/>
+              </a:rPr>
+              <a:t>Execução</a:t>
+            </a:r>
+          </a:p>
+        </p:txBody>
+      </p:sp>
+      <p:sp>
+        <p:nvSpPr>
+          <p:cNvPr id="6" name="Recuperou cálculos e insumos após falhas operacionais.">
+            <a:extLst xmlns:a="http://schemas.openxmlformats.org/drawingml/2006/main">
+              <a:ext uri="{FF2B5EF4-FFF2-40B4-BE49-F238E27FC236}">
+                <a16:creationId xmlns:a16="http://schemas.microsoft.com/office/drawing/2014/main" id="{066B0BCB-0BB5-4919-BDC1-E3D69B5B1268}"/>
+              </a:ext>
+            </a:extLst>
+          </p:cNvPr>
+          <p:cNvSpPr>
+            <a:spLocks xmlns:a="http://schemas.openxmlformats.org/drawingml/2006/main" noGrp="1"/>
+          </p:cNvSpPr>
+          <p:nvPr/>
+        </p:nvSpPr>
+        <p:spPr>
+          <a:xfrm xmlns:a="http://schemas.openxmlformats.org/drawingml/2006/main">
+            <a:off x="3619500" y="3000375"/>
+            <a:ext cx="7620000" cy="857250"/>
+          </a:xfrm>
+          <a:prstGeom xmlns:a="http://schemas.openxmlformats.org/drawingml/2006/main" prst="rect">
+            <a:avLst/>
+          </a:prstGeom>
+          <a:noFill xmlns:a="http://schemas.openxmlformats.org/drawingml/2006/main"/>
+          <a:ln xmlns:a="http://schemas.openxmlformats.org/drawingml/2006/main" w="0">
+            <a:noFill/>
+          </a:ln>
+        </p:spPr>
+        <p:txBody>
+          <a:bodyPr xmlns:a="http://schemas.openxmlformats.org/drawingml/2006/main" lIns="0" tIns="0" rIns="0" bIns="0" anchor="t">
+            <a:noAutofit/>
+          </a:bodyPr>
+          <a:lstStyle xmlns:a="http://schemas.openxmlformats.org/drawingml/2006/main"/>
           <a:p xmlns:a="http://schemas.openxmlformats.org/drawingml/2006/main">
             <a:pPr>
               <a:defRPr sz="2175" b="0">
@@ -5201,9 +5452,100 @@
                 <a:ea typeface="Arial"/>
                 <a:cs typeface="Arial"/>
               </a:rPr>
-              <a:t>Novos estudos pontuais</a:t>
-            </a:r>
-          </a:p>
+              <a:t>Recuperou cálculos e insumos após falhas operacionais.</a:t>
+            </a:r>
+          </a:p>
+        </p:txBody>
+      </p:sp>
+      <p:sp>
+        <p:nvSpPr>
+          <p:cNvPr id="7" name="Escopo">
+            <a:extLst xmlns:a="http://schemas.openxmlformats.org/drawingml/2006/main">
+              <a:ext uri="{FF2B5EF4-FFF2-40B4-BE49-F238E27FC236}">
+                <a16:creationId xmlns:a16="http://schemas.microsoft.com/office/drawing/2014/main" id="{147CF06B-BA83-46D9-93F0-CAAA53A95463}"/>
+              </a:ext>
+            </a:extLst>
+          </p:cNvPr>
+          <p:cNvSpPr>
+            <a:spLocks xmlns:a="http://schemas.openxmlformats.org/drawingml/2006/main" noGrp="1"/>
+          </p:cNvSpPr>
+          <p:nvPr/>
+        </p:nvSpPr>
+        <p:spPr>
+          <a:xfrm xmlns:a="http://schemas.openxmlformats.org/drawingml/2006/main">
+            <a:off x="685800" y="4095750"/>
+            <a:ext cx="2524125" cy="762000"/>
+          </a:xfrm>
+          <a:prstGeom xmlns:a="http://schemas.openxmlformats.org/drawingml/2006/main" prst="rect">
+            <a:avLst/>
+          </a:prstGeom>
+          <a:noFill xmlns:a="http://schemas.openxmlformats.org/drawingml/2006/main"/>
+          <a:ln xmlns:a="http://schemas.openxmlformats.org/drawingml/2006/main" w="0">
+            <a:noFill/>
+          </a:ln>
+        </p:spPr>
+        <p:txBody>
+          <a:bodyPr xmlns:a="http://schemas.openxmlformats.org/drawingml/2006/main" lIns="0" tIns="0" rIns="0" bIns="0" anchor="t">
+            <a:noAutofit/>
+          </a:bodyPr>
+          <a:lstStyle xmlns:a="http://schemas.openxmlformats.org/drawingml/2006/main"/>
+          <a:p xmlns:a="http://schemas.openxmlformats.org/drawingml/2006/main">
+            <a:pPr>
+              <a:defRPr sz="2250" b="1">
+                <a:solidFill>
+                  <a:srgbClr val="087F8C"/>
+                </a:solidFill>
+                <a:latin typeface="Arial"/>
+                <a:ea typeface="Arial"/>
+                <a:cs typeface="Arial"/>
+              </a:defRPr>
+            </a:pPr>
+            <a:r>
+              <a:rPr sz="2250" b="1">
+                <a:solidFill>
+                  <a:srgbClr val="087F8C"/>
+                </a:solidFill>
+                <a:latin typeface="Arial"/>
+                <a:ea typeface="Arial"/>
+                <a:cs typeface="Arial"/>
+              </a:rPr>
+              <a:t>Escopo</a:t>
+            </a:r>
+          </a:p>
+        </p:txBody>
+      </p:sp>
+      <p:sp>
+        <p:nvSpPr>
+          <p:cNvPr id="8" name="Resolveu um estudo mais restrito, preservando a inconcl">
+            <a:extLst xmlns:a="http://schemas.openxmlformats.org/drawingml/2006/main">
+              <a:ext uri="{FF2B5EF4-FFF2-40B4-BE49-F238E27FC236}">
+                <a16:creationId xmlns:a16="http://schemas.microsoft.com/office/drawing/2014/main" id="{96D134FF-5A5B-42F7-A807-6337F7ED2BBA}"/>
+              </a:ext>
+            </a:extLst>
+          </p:cNvPr>
+          <p:cNvSpPr>
+            <a:spLocks xmlns:a="http://schemas.openxmlformats.org/drawingml/2006/main" noGrp="1"/>
+          </p:cNvSpPr>
+          <p:nvPr/>
+        </p:nvSpPr>
+        <p:spPr>
+          <a:xfrm xmlns:a="http://schemas.openxmlformats.org/drawingml/2006/main">
+            <a:off x="3619500" y="4095750"/>
+            <a:ext cx="7620000" cy="857250"/>
+          </a:xfrm>
+          <a:prstGeom xmlns:a="http://schemas.openxmlformats.org/drawingml/2006/main" prst="rect">
+            <a:avLst/>
+          </a:prstGeom>
+          <a:noFill xmlns:a="http://schemas.openxmlformats.org/drawingml/2006/main"/>
+          <a:ln xmlns:a="http://schemas.openxmlformats.org/drawingml/2006/main" w="0">
+            <a:noFill/>
+          </a:ln>
+        </p:spPr>
+        <p:txBody>
+          <a:bodyPr xmlns:a="http://schemas.openxmlformats.org/drawingml/2006/main" lIns="0" tIns="0" rIns="0" bIns="0" anchor="t">
+            <a:noAutofit/>
+          </a:bodyPr>
+          <a:lstStyle xmlns:a="http://schemas.openxmlformats.org/drawingml/2006/main"/>
           <a:p xmlns:a="http://schemas.openxmlformats.org/drawingml/2006/main">
             <a:pPr>
               <a:defRPr sz="2175" b="0">
@@ -5224,224 +5566,7 @@
                 <a:ea typeface="Arial"/>
                 <a:cs typeface="Arial"/>
               </a:rPr>
-              <a:t>Revisão do texto e figuras</a:t>
-            </a:r>
-          </a:p>
-        </p:txBody>
-      </p:sp>
-      <p:sp>
-        <p:nvSpPr>
-          <p:cNvPr id="5" name="Manuscrito">
-            <a:extLst xmlns:a="http://schemas.openxmlformats.org/drawingml/2006/main">
-              <a:ext uri="{FF2B5EF4-FFF2-40B4-BE49-F238E27FC236}">
-                <a16:creationId xmlns:a16="http://schemas.microsoft.com/office/drawing/2014/main" id="{F95460CC-5F80-4966-9830-D2AB58F93235}"/>
-              </a:ext>
-            </a:extLst>
-          </p:cNvPr>
-          <p:cNvSpPr>
-            <a:spLocks xmlns:a="http://schemas.openxmlformats.org/drawingml/2006/main" noGrp="1"/>
-          </p:cNvSpPr>
-          <p:nvPr/>
-        </p:nvSpPr>
-        <p:spPr>
-          <a:xfrm xmlns:a="http://schemas.openxmlformats.org/drawingml/2006/main">
-            <a:off x="6572250" y="1981200"/>
-            <a:ext cx="4953000" cy="514350"/>
-          </a:xfrm>
-          <a:prstGeom xmlns:a="http://schemas.openxmlformats.org/drawingml/2006/main" prst="rect">
-            <a:avLst/>
-          </a:prstGeom>
-          <a:noFill xmlns:a="http://schemas.openxmlformats.org/drawingml/2006/main"/>
-          <a:ln xmlns:a="http://schemas.openxmlformats.org/drawingml/2006/main" w="0">
-            <a:noFill/>
-          </a:ln>
-        </p:spPr>
-        <p:txBody>
-          <a:bodyPr xmlns:a="http://schemas.openxmlformats.org/drawingml/2006/main" lIns="0" tIns="0" rIns="0" bIns="0" anchor="t">
-            <a:noAutofit/>
-          </a:bodyPr>
-          <a:lstStyle xmlns:a="http://schemas.openxmlformats.org/drawingml/2006/main"/>
-          <a:p xmlns:a="http://schemas.openxmlformats.org/drawingml/2006/main">
-            <a:pPr>
-              <a:defRPr sz="2250" b="1">
-                <a:solidFill>
-                  <a:srgbClr val="087F8C"/>
-                </a:solidFill>
-                <a:latin typeface="Arial"/>
-                <a:ea typeface="Arial"/>
-                <a:cs typeface="Arial"/>
-              </a:defRPr>
-            </a:pPr>
-            <a:r>
-              <a:rPr sz="2250" b="1">
-                <a:solidFill>
-                  <a:srgbClr val="087F8C"/>
-                </a:solidFill>
-                <a:latin typeface="Arial"/>
-                <a:ea typeface="Arial"/>
-                <a:cs typeface="Arial"/>
-              </a:rPr>
-              <a:t>Manuscrito</a:t>
-            </a:r>
-          </a:p>
-        </p:txBody>
-      </p:sp>
-      <p:sp>
-        <p:nvSpPr>
-          <p:cNvPr id="6" name="Estrutura e interpretação&#10;Fluxograma e referências&#10;Resu">
-            <a:extLst xmlns:a="http://schemas.openxmlformats.org/drawingml/2006/main">
-              <a:ext uri="{FF2B5EF4-FFF2-40B4-BE49-F238E27FC236}">
-                <a16:creationId xmlns:a16="http://schemas.microsoft.com/office/drawing/2014/main" id="{4B444ED5-A713-445F-A17B-1F75ED22274B}"/>
-              </a:ext>
-            </a:extLst>
-          </p:cNvPr>
-          <p:cNvSpPr>
-            <a:spLocks xmlns:a="http://schemas.openxmlformats.org/drawingml/2006/main" noGrp="1"/>
-          </p:cNvSpPr>
-          <p:nvPr/>
-        </p:nvSpPr>
-        <p:spPr>
-          <a:xfrm xmlns:a="http://schemas.openxmlformats.org/drawingml/2006/main">
-            <a:off x="6572250" y="2686050"/>
-            <a:ext cx="4953000" cy="2619375"/>
-          </a:xfrm>
-          <a:prstGeom xmlns:a="http://schemas.openxmlformats.org/drawingml/2006/main" prst="rect">
-            <a:avLst/>
-          </a:prstGeom>
-          <a:noFill xmlns:a="http://schemas.openxmlformats.org/drawingml/2006/main"/>
-          <a:ln xmlns:a="http://schemas.openxmlformats.org/drawingml/2006/main" w="0">
-            <a:noFill/>
-          </a:ln>
-        </p:spPr>
-        <p:txBody>
-          <a:bodyPr xmlns:a="http://schemas.openxmlformats.org/drawingml/2006/main" lIns="0" tIns="0" rIns="0" bIns="0" anchor="t">
-            <a:noAutofit/>
-          </a:bodyPr>
-          <a:lstStyle xmlns:a="http://schemas.openxmlformats.org/drawingml/2006/main"/>
-          <a:p xmlns:a="http://schemas.openxmlformats.org/drawingml/2006/main">
-            <a:pPr>
-              <a:defRPr sz="2175" b="0">
-                <a:solidFill>
-                  <a:srgbClr val="253643"/>
-                </a:solidFill>
-                <a:latin typeface="Arial"/>
-                <a:ea typeface="Arial"/>
-                <a:cs typeface="Arial"/>
-              </a:defRPr>
-            </a:pPr>
-            <a:r>
-              <a:rPr sz="2175" b="0">
-                <a:solidFill>
-                  <a:srgbClr val="253643"/>
-                </a:solidFill>
-                <a:latin typeface="Arial"/>
-                <a:ea typeface="Arial"/>
-                <a:cs typeface="Arial"/>
-              </a:rPr>
-              <a:t>Estrutura e interpretação</a:t>
-            </a:r>
-          </a:p>
-          <a:p xmlns:a="http://schemas.openxmlformats.org/drawingml/2006/main">
-            <a:pPr>
-              <a:defRPr sz="2175" b="0">
-                <a:solidFill>
-                  <a:srgbClr val="253643"/>
-                </a:solidFill>
-                <a:latin typeface="Arial"/>
-                <a:ea typeface="Arial"/>
-                <a:cs typeface="Arial"/>
-              </a:defRPr>
-            </a:pPr>
-            <a:r>
-              <a:rPr sz="2175" b="0">
-                <a:solidFill>
-                  <a:srgbClr val="253643"/>
-                </a:solidFill>
-                <a:latin typeface="Arial"/>
-                <a:ea typeface="Arial"/>
-                <a:cs typeface="Arial"/>
-              </a:rPr>
-              <a:t>Fluxograma e referências</a:t>
-            </a:r>
-          </a:p>
-          <a:p xmlns:a="http://schemas.openxmlformats.org/drawingml/2006/main">
-            <a:pPr>
-              <a:defRPr sz="2175" b="0">
-                <a:solidFill>
-                  <a:srgbClr val="253643"/>
-                </a:solidFill>
-                <a:latin typeface="Arial"/>
-                <a:ea typeface="Arial"/>
-                <a:cs typeface="Arial"/>
-              </a:defRPr>
-            </a:pPr>
-            <a:r>
-              <a:rPr sz="2175" b="0">
-                <a:solidFill>
-                  <a:srgbClr val="253643"/>
-                </a:solidFill>
-                <a:latin typeface="Arial"/>
-                <a:ea typeface="Arial"/>
-                <a:cs typeface="Arial"/>
-              </a:rPr>
-              <a:t>Resultados existentes</a:t>
-            </a:r>
-          </a:p>
-        </p:txBody>
-      </p:sp>
-      <p:sp>
-        <p:nvSpPr>
-          <p:cNvPr id="7" name="O usuário mediou a revisão e o Codex conferiu as recome">
-            <a:extLst xmlns:a="http://schemas.openxmlformats.org/drawingml/2006/main">
-              <a:ext uri="{FF2B5EF4-FFF2-40B4-BE49-F238E27FC236}">
-                <a16:creationId xmlns:a16="http://schemas.microsoft.com/office/drawing/2014/main" id="{5DAEEC35-5163-401B-AFA8-F29F92F8D647}"/>
-              </a:ext>
-            </a:extLst>
-          </p:cNvPr>
-          <p:cNvSpPr>
-            <a:spLocks xmlns:a="http://schemas.openxmlformats.org/drawingml/2006/main" noGrp="1"/>
-          </p:cNvSpPr>
-          <p:nvPr/>
-        </p:nvSpPr>
-        <p:spPr>
-          <a:xfrm xmlns:a="http://schemas.openxmlformats.org/drawingml/2006/main">
-            <a:off x="685800" y="5572125"/>
-            <a:ext cx="10477500" cy="476250"/>
-          </a:xfrm>
-          <a:prstGeom xmlns:a="http://schemas.openxmlformats.org/drawingml/2006/main" prst="rect">
-            <a:avLst/>
-          </a:prstGeom>
-          <a:noFill xmlns:a="http://schemas.openxmlformats.org/drawingml/2006/main"/>
-          <a:ln xmlns:a="http://schemas.openxmlformats.org/drawingml/2006/main" w="0">
-            <a:noFill/>
-          </a:ln>
-        </p:spPr>
-        <p:txBody>
-          <a:bodyPr xmlns:a="http://schemas.openxmlformats.org/drawingml/2006/main" lIns="0" tIns="0" rIns="0" bIns="0" anchor="t">
-            <a:noAutofit/>
-          </a:bodyPr>
-          <a:lstStyle xmlns:a="http://schemas.openxmlformats.org/drawingml/2006/main"/>
-          <a:p xmlns:a="http://schemas.openxmlformats.org/drawingml/2006/main">
-            <a:pPr>
-              <a:defRPr sz="2100" b="1">
-                <a:solidFill>
-                  <a:srgbClr val="17324D"/>
-                </a:solidFill>
-                <a:latin typeface="Arial"/>
-                <a:ea typeface="Arial"/>
-                <a:cs typeface="Arial"/>
-              </a:defRPr>
-            </a:pPr>
-            <a:r>
-              <a:rPr sz="2100" b="1">
-                <a:solidFill>
-                  <a:srgbClr val="17324D"/>
-                </a:solidFill>
-                <a:latin typeface="Arial"/>
-                <a:ea typeface="Arial"/>
-                <a:cs typeface="Arial"/>
-              </a:rPr>
-              <a:t>O usuário mediou a revisão e o Codex conferiu as recomendações.</a:t>
+              <a:t>Resolveu um estudo mais restrito, preservando a inconclusão ampla.</a:t>
             </a:r>
           </a:p>
         </p:txBody>
@@ -5449,7 +5574,7 @@
     </p:spTree>
     <p:extLst>
       <p:ext uri="{BB962C8B-B14F-4D97-AF65-F5344CB8AC3E}">
-        <p14:creationId xmlns:p14="http://schemas.microsoft.com/office/powerpoint/2010/main" val="61132174"/>
+        <p14:creationId xmlns:p14="http://schemas.microsoft.com/office/powerpoint/2010/main" val="1561466529"/>
       </p:ext>
     </p:extLst>
   </p:cSld>
@@ -5477,10 +5602,10 @@
       </p:grpSpPr>
       <p:sp>
         <p:nvSpPr>
-          <p:cNvPr id="8" name="O Codex filtrou o segundo parecer">
-            <a:extLst xmlns:a="http://schemas.openxmlformats.org/drawingml/2006/main">
-              <a:ext uri="{FF2B5EF4-FFF2-40B4-BE49-F238E27FC236}">
-                <a16:creationId xmlns:a16="http://schemas.microsoft.com/office/drawing/2014/main" id="{E8BF2129-ACF9-4E45-A098-8535DAAA0FEE}"/>
+          <p:cNvPr id="8" name="Dois ciclos de revisão com Gemini">
+            <a:extLst xmlns:a="http://schemas.openxmlformats.org/drawingml/2006/main">
+              <a:ext uri="{FF2B5EF4-FFF2-40B4-BE49-F238E27FC236}">
+                <a16:creationId xmlns:a16="http://schemas.microsoft.com/office/drawing/2014/main" id="{19077D9C-0BD7-4242-B44F-3BEE805A71A8}"/>
               </a:ext>
             </a:extLst>
           </p:cNvPr>
@@ -5527,17 +5652,17 @@
                 <a:ea typeface="Arial"/>
                 <a:cs typeface="Arial"/>
               </a:rPr>
-              <a:t>O Codex filtrou o segundo parecer</a:t>
-            </a:r>
-          </a:p>
-        </p:txBody>
-      </p:sp>
-      <p:sp>
-        <p:nvSpPr>
-          <p:cNvPr id="2" name="14 / 20">
-            <a:extLst xmlns:a="http://schemas.openxmlformats.org/drawingml/2006/main">
-              <a:ext uri="{FF2B5EF4-FFF2-40B4-BE49-F238E27FC236}">
-                <a16:creationId xmlns:a16="http://schemas.microsoft.com/office/drawing/2014/main" id="{7DF696EE-79E0-4F74-950C-1BC46093D667}"/>
+              <a:t>Dois ciclos de revisão com Gemini</a:t>
+            </a:r>
+          </a:p>
+        </p:txBody>
+      </p:sp>
+      <p:sp>
+        <p:nvSpPr>
+          <p:cNvPr id="2" name="14 / 21">
+            <a:extLst xmlns:a="http://schemas.openxmlformats.org/drawingml/2006/main">
+              <a:ext uri="{FF2B5EF4-FFF2-40B4-BE49-F238E27FC236}">
+                <a16:creationId xmlns:a16="http://schemas.microsoft.com/office/drawing/2014/main" id="{6755C8F0-A8C7-4F8F-8CE1-EFEB33964E19}"/>
               </a:ext>
             </a:extLst>
           </p:cNvPr>
@@ -5584,28 +5709,28 @@
                 <a:ea typeface="Arial"/>
                 <a:cs typeface="Arial"/>
               </a:rPr>
-              <a:t>14 / 20</a:t>
-            </a:r>
-          </a:p>
-        </p:txBody>
-      </p:sp>
-      <p:sp>
-        <p:nvSpPr>
-          <p:cNvPr id="3" name="Melhorias incorporadas">
-            <a:extLst xmlns:a="http://schemas.openxmlformats.org/drawingml/2006/main">
-              <a:ext uri="{FF2B5EF4-FFF2-40B4-BE49-F238E27FC236}">
-                <a16:creationId xmlns:a16="http://schemas.microsoft.com/office/drawing/2014/main" id="{005BE628-B272-4351-B42E-867786625452}"/>
-              </a:ext>
-            </a:extLst>
-          </p:cNvPr>
-          <p:cNvSpPr>
-            <a:spLocks xmlns:a="http://schemas.openxmlformats.org/drawingml/2006/main" noGrp="1"/>
-          </p:cNvSpPr>
-          <p:nvPr/>
-        </p:nvSpPr>
-        <p:spPr>
-          <a:xfrm xmlns:a="http://schemas.openxmlformats.org/drawingml/2006/main">
-            <a:off x="685800" y="1952625"/>
+              <a:t>14 / 21</a:t>
+            </a:r>
+          </a:p>
+        </p:txBody>
+      </p:sp>
+      <p:sp>
+        <p:nvSpPr>
+          <p:cNvPr id="3" name="Dissertação">
+            <a:extLst xmlns:a="http://schemas.openxmlformats.org/drawingml/2006/main">
+              <a:ext uri="{FF2B5EF4-FFF2-40B4-BE49-F238E27FC236}">
+                <a16:creationId xmlns:a16="http://schemas.microsoft.com/office/drawing/2014/main" id="{B52061C8-3D93-4CDC-955C-817F8763E689}"/>
+              </a:ext>
+            </a:extLst>
+          </p:cNvPr>
+          <p:cNvSpPr>
+            <a:spLocks xmlns:a="http://schemas.openxmlformats.org/drawingml/2006/main" noGrp="1"/>
+          </p:cNvSpPr>
+          <p:nvPr/>
+        </p:nvSpPr>
+        <p:spPr>
+          <a:xfrm xmlns:a="http://schemas.openxmlformats.org/drawingml/2006/main">
+            <a:off x="685800" y="1981200"/>
             <a:ext cx="4953000" cy="514350"/>
           </a:xfrm>
           <a:prstGeom xmlns:a="http://schemas.openxmlformats.org/drawingml/2006/main" prst="rect">
@@ -5641,28 +5766,28 @@
                 <a:ea typeface="Arial"/>
                 <a:cs typeface="Arial"/>
               </a:rPr>
-              <a:t>Melhorias incorporadas</a:t>
-            </a:r>
-          </a:p>
-        </p:txBody>
-      </p:sp>
-      <p:sp>
-        <p:nvSpPr>
-          <p:cNvPr id="4" name="Contribuição mais clara&#10;Resultados reorganizados&#10;Diagra">
-            <a:extLst xmlns:a="http://schemas.openxmlformats.org/drawingml/2006/main">
-              <a:ext uri="{FF2B5EF4-FFF2-40B4-BE49-F238E27FC236}">
-                <a16:creationId xmlns:a16="http://schemas.microsoft.com/office/drawing/2014/main" id="{6407777C-7337-435D-B5FE-613EF911636A}"/>
-              </a:ext>
-            </a:extLst>
-          </p:cNvPr>
-          <p:cNvSpPr>
-            <a:spLocks xmlns:a="http://schemas.openxmlformats.org/drawingml/2006/main" noGrp="1"/>
-          </p:cNvSpPr>
-          <p:nvPr/>
-        </p:nvSpPr>
-        <p:spPr>
-          <a:xfrm xmlns:a="http://schemas.openxmlformats.org/drawingml/2006/main">
-            <a:off x="685800" y="2657475"/>
+              <a:t>Dissertação</a:t>
+            </a:r>
+          </a:p>
+        </p:txBody>
+      </p:sp>
+      <p:sp>
+        <p:nvSpPr>
+          <p:cNvPr id="4" name="Críticas científicas&#10;Novos estudos pontuais&#10;Revisão do ">
+            <a:extLst xmlns:a="http://schemas.openxmlformats.org/drawingml/2006/main">
+              <a:ext uri="{FF2B5EF4-FFF2-40B4-BE49-F238E27FC236}">
+                <a16:creationId xmlns:a16="http://schemas.microsoft.com/office/drawing/2014/main" id="{4CB843DF-008B-4C74-94C0-A1B98E1A2146}"/>
+              </a:ext>
+            </a:extLst>
+          </p:cNvPr>
+          <p:cNvSpPr>
+            <a:spLocks xmlns:a="http://schemas.openxmlformats.org/drawingml/2006/main" noGrp="1"/>
+          </p:cNvSpPr>
+          <p:nvPr/>
+        </p:nvSpPr>
+        <p:spPr>
+          <a:xfrm xmlns:a="http://schemas.openxmlformats.org/drawingml/2006/main">
+            <a:off x="685800" y="2686050"/>
             <a:ext cx="4953000" cy="2619375"/>
           </a:xfrm>
           <a:prstGeom xmlns:a="http://schemas.openxmlformats.org/drawingml/2006/main" prst="rect">
@@ -5698,7 +5823,7 @@
                 <a:ea typeface="Arial"/>
                 <a:cs typeface="Arial"/>
               </a:rPr>
-              <a:t>Contribuição mais clara</a:t>
+              <a:t>Críticas científicas</a:t>
             </a:r>
           </a:p>
           <a:p xmlns:a="http://schemas.openxmlformats.org/drawingml/2006/main">
@@ -5721,7 +5846,7 @@
                 <a:ea typeface="Arial"/>
                 <a:cs typeface="Arial"/>
               </a:rPr>
-              <a:t>Resultados reorganizados</a:t>
+              <a:t>Novos estudos pontuais</a:t>
             </a:r>
           </a:p>
           <a:p xmlns:a="http://schemas.openxmlformats.org/drawingml/2006/main">
@@ -5744,28 +5869,28 @@
                 <a:ea typeface="Arial"/>
                 <a:cs typeface="Arial"/>
               </a:rPr>
-              <a:t>Diagrama explicativo</a:t>
-            </a:r>
-          </a:p>
-        </p:txBody>
-      </p:sp>
-      <p:sp>
-        <p:nvSpPr>
-          <p:cNvPr id="5" name="Generalizações limitadas">
-            <a:extLst xmlns:a="http://schemas.openxmlformats.org/drawingml/2006/main">
-              <a:ext uri="{FF2B5EF4-FFF2-40B4-BE49-F238E27FC236}">
-                <a16:creationId xmlns:a16="http://schemas.microsoft.com/office/drawing/2014/main" id="{071F2F07-0674-41FA-9218-6C9BCBB2DD44}"/>
-              </a:ext>
-            </a:extLst>
-          </p:cNvPr>
-          <p:cNvSpPr>
-            <a:spLocks xmlns:a="http://schemas.openxmlformats.org/drawingml/2006/main" noGrp="1"/>
-          </p:cNvSpPr>
-          <p:nvPr/>
-        </p:nvSpPr>
-        <p:spPr>
-          <a:xfrm xmlns:a="http://schemas.openxmlformats.org/drawingml/2006/main">
-            <a:off x="6572250" y="1952625"/>
+              <a:t>Revisão do texto e figuras</a:t>
+            </a:r>
+          </a:p>
+        </p:txBody>
+      </p:sp>
+      <p:sp>
+        <p:nvSpPr>
+          <p:cNvPr id="5" name="Manuscrito">
+            <a:extLst xmlns:a="http://schemas.openxmlformats.org/drawingml/2006/main">
+              <a:ext uri="{FF2B5EF4-FFF2-40B4-BE49-F238E27FC236}">
+                <a16:creationId xmlns:a16="http://schemas.microsoft.com/office/drawing/2014/main" id="{E9CD7F6A-EDC5-4514-A9CE-726EEFA2FA8C}"/>
+              </a:ext>
+            </a:extLst>
+          </p:cNvPr>
+          <p:cNvSpPr>
+            <a:spLocks xmlns:a="http://schemas.openxmlformats.org/drawingml/2006/main" noGrp="1"/>
+          </p:cNvSpPr>
+          <p:nvPr/>
+        </p:nvSpPr>
+        <p:spPr>
+          <a:xfrm xmlns:a="http://schemas.openxmlformats.org/drawingml/2006/main">
+            <a:off x="6572250" y="1981200"/>
             <a:ext cx="4953000" cy="514350"/>
           </a:xfrm>
           <a:prstGeom xmlns:a="http://schemas.openxmlformats.org/drawingml/2006/main" prst="rect">
@@ -5801,28 +5926,28 @@
                 <a:ea typeface="Arial"/>
                 <a:cs typeface="Arial"/>
               </a:rPr>
-              <a:t>Generalizações limitadas</a:t>
-            </a:r>
-          </a:p>
-        </p:txBody>
-      </p:sp>
-      <p:sp>
-        <p:nvSpPr>
-          <p:cNvPr id="6" name="Ineditismo absoluto&#10;Falha inevitável em dados reais&#10;Cau">
-            <a:extLst xmlns:a="http://schemas.openxmlformats.org/drawingml/2006/main">
-              <a:ext uri="{FF2B5EF4-FFF2-40B4-BE49-F238E27FC236}">
-                <a16:creationId xmlns:a16="http://schemas.microsoft.com/office/drawing/2014/main" id="{4B06160B-95BB-48F2-9429-36AAC348ECE5}"/>
-              </a:ext>
-            </a:extLst>
-          </p:cNvPr>
-          <p:cNvSpPr>
-            <a:spLocks xmlns:a="http://schemas.openxmlformats.org/drawingml/2006/main" noGrp="1"/>
-          </p:cNvSpPr>
-          <p:nvPr/>
-        </p:nvSpPr>
-        <p:spPr>
-          <a:xfrm xmlns:a="http://schemas.openxmlformats.org/drawingml/2006/main">
-            <a:off x="6572250" y="2657475"/>
+              <a:t>Manuscrito</a:t>
+            </a:r>
+          </a:p>
+        </p:txBody>
+      </p:sp>
+      <p:sp>
+        <p:nvSpPr>
+          <p:cNvPr id="6" name="Estrutura e interpretação&#10;Fluxograma e referências&#10;Resu">
+            <a:extLst xmlns:a="http://schemas.openxmlformats.org/drawingml/2006/main">
+              <a:ext uri="{FF2B5EF4-FFF2-40B4-BE49-F238E27FC236}">
+                <a16:creationId xmlns:a16="http://schemas.microsoft.com/office/drawing/2014/main" id="{FB3A9227-E2E5-48CC-8F3D-253D637FB3A7}"/>
+              </a:ext>
+            </a:extLst>
+          </p:cNvPr>
+          <p:cNvSpPr>
+            <a:spLocks xmlns:a="http://schemas.openxmlformats.org/drawingml/2006/main" noGrp="1"/>
+          </p:cNvSpPr>
+          <p:nvPr/>
+        </p:nvSpPr>
+        <p:spPr>
+          <a:xfrm xmlns:a="http://schemas.openxmlformats.org/drawingml/2006/main">
+            <a:off x="6572250" y="2686050"/>
             <a:ext cx="4953000" cy="2619375"/>
           </a:xfrm>
           <a:prstGeom xmlns:a="http://schemas.openxmlformats.org/drawingml/2006/main" prst="rect">
@@ -5858,7 +5983,7 @@
                 <a:ea typeface="Arial"/>
                 <a:cs typeface="Arial"/>
               </a:rPr>
-              <a:t>Ineditismo absoluto</a:t>
+              <a:t>Estrutura e interpretação</a:t>
             </a:r>
           </a:p>
           <a:p xmlns:a="http://schemas.openxmlformats.org/drawingml/2006/main">
@@ -5881,7 +6006,7 @@
                 <a:ea typeface="Arial"/>
                 <a:cs typeface="Arial"/>
               </a:rPr>
-              <a:t>Falha inevitável em dados reais</a:t>
+              <a:t>Fluxograma e referências</a:t>
             </a:r>
           </a:p>
           <a:p xmlns:a="http://schemas.openxmlformats.org/drawingml/2006/main">
@@ -5904,17 +6029,17 @@
                 <a:ea typeface="Arial"/>
                 <a:cs typeface="Arial"/>
               </a:rPr>
-              <a:t>Causas não demonstradas</a:t>
-            </a:r>
-          </a:p>
-        </p:txBody>
-      </p:sp>
-      <p:sp>
-        <p:nvSpPr>
-          <p:cNvPr id="7" name="A revisão ampliou o artigo de 7 para 9 páginas, sem nov">
-            <a:extLst xmlns:a="http://schemas.openxmlformats.org/drawingml/2006/main">
-              <a:ext uri="{FF2B5EF4-FFF2-40B4-BE49-F238E27FC236}">
-                <a16:creationId xmlns:a16="http://schemas.microsoft.com/office/drawing/2014/main" id="{AE225757-1F5C-45B3-B3AC-61006042FD01}"/>
+              <a:t>Resultados existentes</a:t>
+            </a:r>
+          </a:p>
+        </p:txBody>
+      </p:sp>
+      <p:sp>
+        <p:nvSpPr>
+          <p:cNvPr id="7" name="O usuário mediou a revisão e o Codex conferiu as recome">
+            <a:extLst xmlns:a="http://schemas.openxmlformats.org/drawingml/2006/main">
+              <a:ext uri="{FF2B5EF4-FFF2-40B4-BE49-F238E27FC236}">
+                <a16:creationId xmlns:a16="http://schemas.microsoft.com/office/drawing/2014/main" id="{929EF5C2-69DE-4A94-9B01-92C77F61ED4E}"/>
               </a:ext>
             </a:extLst>
           </p:cNvPr>
@@ -5926,24 +6051,24 @@
         <p:spPr>
           <a:xfrm xmlns:a="http://schemas.openxmlformats.org/drawingml/2006/main">
             <a:off x="685800" y="5572125"/>
-            <a:ext cx="10668000" cy="476250"/>
-          </a:xfrm>
-          <a:prstGeom xmlns:a="http://schemas.openxmlformats.org/drawingml/2006/main" prst="rect">
-            <a:avLst/>
-          </a:prstGeom>
-          <a:noFill xmlns:a="http://schemas.openxmlformats.org/drawingml/2006/main"/>
-          <a:ln xmlns:a="http://schemas.openxmlformats.org/drawingml/2006/main" w="0">
-            <a:noFill/>
-          </a:ln>
-        </p:spPr>
-        <p:txBody>
-          <a:bodyPr xmlns:a="http://schemas.openxmlformats.org/drawingml/2006/main" lIns="0" tIns="0" rIns="0" bIns="0" anchor="t">
-            <a:noAutofit/>
-          </a:bodyPr>
-          <a:lstStyle xmlns:a="http://schemas.openxmlformats.org/drawingml/2006/main"/>
-          <a:p xmlns:a="http://schemas.openxmlformats.org/drawingml/2006/main">
-            <a:pPr>
-              <a:defRPr sz="2025" b="1">
+            <a:ext cx="10477500" cy="476250"/>
+          </a:xfrm>
+          <a:prstGeom xmlns:a="http://schemas.openxmlformats.org/drawingml/2006/main" prst="rect">
+            <a:avLst/>
+          </a:prstGeom>
+          <a:noFill xmlns:a="http://schemas.openxmlformats.org/drawingml/2006/main"/>
+          <a:ln xmlns:a="http://schemas.openxmlformats.org/drawingml/2006/main" w="0">
+            <a:noFill/>
+          </a:ln>
+        </p:spPr>
+        <p:txBody>
+          <a:bodyPr xmlns:a="http://schemas.openxmlformats.org/drawingml/2006/main" lIns="0" tIns="0" rIns="0" bIns="0" anchor="t">
+            <a:noAutofit/>
+          </a:bodyPr>
+          <a:lstStyle xmlns:a="http://schemas.openxmlformats.org/drawingml/2006/main"/>
+          <a:p xmlns:a="http://schemas.openxmlformats.org/drawingml/2006/main">
+            <a:pPr>
+              <a:defRPr sz="2100" b="1">
                 <a:solidFill>
                   <a:srgbClr val="17324D"/>
                 </a:solidFill>
@@ -5953,7 +6078,7 @@
               </a:defRPr>
             </a:pPr>
             <a:r>
-              <a:rPr sz="2025" b="1">
+              <a:rPr sz="2100" b="1">
                 <a:solidFill>
                   <a:srgbClr val="17324D"/>
                 </a:solidFill>
@@ -5961,7 +6086,7 @@
                 <a:ea typeface="Arial"/>
                 <a:cs typeface="Arial"/>
               </a:rPr>
-              <a:t>A revisão ampliou o artigo de 7 para 9 páginas, sem novas simulações.</a:t>
+              <a:t>O usuário mediou a revisão e o Codex conferiu as recomendações.</a:t>
             </a:r>
           </a:p>
         </p:txBody>
@@ -5969,7 +6094,7 @@
     </p:spTree>
     <p:extLst>
       <p:ext uri="{BB962C8B-B14F-4D97-AF65-F5344CB8AC3E}">
-        <p14:creationId xmlns:p14="http://schemas.microsoft.com/office/powerpoint/2010/main" val="717038639"/>
+        <p14:creationId xmlns:p14="http://schemas.microsoft.com/office/powerpoint/2010/main" val="1901254201"/>
       </p:ext>
     </p:extLst>
   </p:cSld>
@@ -5997,10 +6122,10 @@
       </p:grpSpPr>
       <p:sp>
         <p:nvSpPr>
-          <p:cNvPr id="7" name="O que o caso demonstra">
-            <a:extLst xmlns:a="http://schemas.openxmlformats.org/drawingml/2006/main">
-              <a:ext uri="{FF2B5EF4-FFF2-40B4-BE49-F238E27FC236}">
-                <a16:creationId xmlns:a16="http://schemas.microsoft.com/office/drawing/2014/main" id="{084C4E49-F8B2-414A-8252-291A5AA53C6B}"/>
+          <p:cNvPr id="8" name="O Codex filtrou o segundo parecer">
+            <a:extLst xmlns:a="http://schemas.openxmlformats.org/drawingml/2006/main">
+              <a:ext uri="{FF2B5EF4-FFF2-40B4-BE49-F238E27FC236}">
+                <a16:creationId xmlns:a16="http://schemas.microsoft.com/office/drawing/2014/main" id="{AD062ACB-2DA3-49F0-B9B4-F2D86F173F78}"/>
               </a:ext>
             </a:extLst>
           </p:cNvPr>
@@ -6047,17 +6172,17 @@
                 <a:ea typeface="Arial"/>
                 <a:cs typeface="Arial"/>
               </a:rPr>
-              <a:t>O que o caso demonstra</a:t>
-            </a:r>
-          </a:p>
-        </p:txBody>
-      </p:sp>
-      <p:sp>
-        <p:nvSpPr>
-          <p:cNvPr id="2" name="15 / 20">
-            <a:extLst xmlns:a="http://schemas.openxmlformats.org/drawingml/2006/main">
-              <a:ext uri="{FF2B5EF4-FFF2-40B4-BE49-F238E27FC236}">
-                <a16:creationId xmlns:a16="http://schemas.microsoft.com/office/drawing/2014/main" id="{33B1D6A8-5902-4B1E-9B5C-DF5D935D806F}"/>
+              <a:t>O Codex filtrou o segundo parecer</a:t>
+            </a:r>
+          </a:p>
+        </p:txBody>
+      </p:sp>
+      <p:sp>
+        <p:nvSpPr>
+          <p:cNvPr id="2" name="15 / 21">
+            <a:extLst xmlns:a="http://schemas.openxmlformats.org/drawingml/2006/main">
+              <a:ext uri="{FF2B5EF4-FFF2-40B4-BE49-F238E27FC236}">
+                <a16:creationId xmlns:a16="http://schemas.microsoft.com/office/drawing/2014/main" id="{4911348D-9ABC-419B-9007-998D7CE5119B}"/>
               </a:ext>
             </a:extLst>
           </p:cNvPr>
@@ -6104,28 +6229,28 @@
                 <a:ea typeface="Arial"/>
                 <a:cs typeface="Arial"/>
               </a:rPr>
-              <a:t>15 / 20</a:t>
-            </a:r>
-          </a:p>
-        </p:txBody>
-      </p:sp>
-      <p:sp>
-        <p:nvSpPr>
-          <p:cNvPr id="3" name="Evidência disponível">
-            <a:extLst xmlns:a="http://schemas.openxmlformats.org/drawingml/2006/main">
-              <a:ext uri="{FF2B5EF4-FFF2-40B4-BE49-F238E27FC236}">
-                <a16:creationId xmlns:a16="http://schemas.microsoft.com/office/drawing/2014/main" id="{2051D3EE-A425-4A04-A360-337FD9317F0C}"/>
-              </a:ext>
-            </a:extLst>
-          </p:cNvPr>
-          <p:cNvSpPr>
-            <a:spLocks xmlns:a="http://schemas.openxmlformats.org/drawingml/2006/main" noGrp="1"/>
-          </p:cNvSpPr>
-          <p:nvPr/>
-        </p:nvSpPr>
-        <p:spPr>
-          <a:xfrm xmlns:a="http://schemas.openxmlformats.org/drawingml/2006/main">
-            <a:off x="685800" y="1809750"/>
+              <a:t>15 / 21</a:t>
+            </a:r>
+          </a:p>
+        </p:txBody>
+      </p:sp>
+      <p:sp>
+        <p:nvSpPr>
+          <p:cNvPr id="3" name="Melhorias incorporadas">
+            <a:extLst xmlns:a="http://schemas.openxmlformats.org/drawingml/2006/main">
+              <a:ext uri="{FF2B5EF4-FFF2-40B4-BE49-F238E27FC236}">
+                <a16:creationId xmlns:a16="http://schemas.microsoft.com/office/drawing/2014/main" id="{BBA3682C-F885-4BD8-9EA6-24778EE5CAA3}"/>
+              </a:ext>
+            </a:extLst>
+          </p:cNvPr>
+          <p:cNvSpPr>
+            <a:spLocks xmlns:a="http://schemas.openxmlformats.org/drawingml/2006/main" noGrp="1"/>
+          </p:cNvSpPr>
+          <p:nvPr/>
+        </p:nvSpPr>
+        <p:spPr>
+          <a:xfrm xmlns:a="http://schemas.openxmlformats.org/drawingml/2006/main">
+            <a:off x="685800" y="1952625"/>
             <a:ext cx="4953000" cy="514350"/>
           </a:xfrm>
           <a:prstGeom xmlns:a="http://schemas.openxmlformats.org/drawingml/2006/main" prst="rect">
@@ -6161,28 +6286,28 @@
                 <a:ea typeface="Arial"/>
                 <a:cs typeface="Arial"/>
               </a:rPr>
-              <a:t>Evidência disponível</a:t>
-            </a:r>
-          </a:p>
-        </p:txBody>
-      </p:sp>
-      <p:sp>
-        <p:nvSpPr>
-          <p:cNvPr id="4" name="Formulação e execução extensas&#10;Controles e correções&#10;Pr">
-            <a:extLst xmlns:a="http://schemas.openxmlformats.org/drawingml/2006/main">
-              <a:ext uri="{FF2B5EF4-FFF2-40B4-BE49-F238E27FC236}">
-                <a16:creationId xmlns:a16="http://schemas.microsoft.com/office/drawing/2014/main" id="{B9BB61E4-2ED7-495A-B256-6A9C10DF555D}"/>
-              </a:ext>
-            </a:extLst>
-          </p:cNvPr>
-          <p:cNvSpPr>
-            <a:spLocks xmlns:a="http://schemas.openxmlformats.org/drawingml/2006/main" noGrp="1"/>
-          </p:cNvSpPr>
-          <p:nvPr/>
-        </p:nvSpPr>
-        <p:spPr>
-          <a:xfrm xmlns:a="http://schemas.openxmlformats.org/drawingml/2006/main">
-            <a:off x="685800" y="2514600"/>
+              <a:t>Melhorias incorporadas</a:t>
+            </a:r>
+          </a:p>
+        </p:txBody>
+      </p:sp>
+      <p:sp>
+        <p:nvSpPr>
+          <p:cNvPr id="4" name="Contribuição mais clara&#10;Resultados reorganizados&#10;Diagra">
+            <a:extLst xmlns:a="http://schemas.openxmlformats.org/drawingml/2006/main">
+              <a:ext uri="{FF2B5EF4-FFF2-40B4-BE49-F238E27FC236}">
+                <a16:creationId xmlns:a16="http://schemas.microsoft.com/office/drawing/2014/main" id="{49283404-F4E9-4272-B4DA-AD6A778DE7EC}"/>
+              </a:ext>
+            </a:extLst>
+          </p:cNvPr>
+          <p:cNvSpPr>
+            <a:spLocks xmlns:a="http://schemas.openxmlformats.org/drawingml/2006/main" noGrp="1"/>
+          </p:cNvSpPr>
+          <p:nvPr/>
+        </p:nvSpPr>
+        <p:spPr>
+          <a:xfrm xmlns:a="http://schemas.openxmlformats.org/drawingml/2006/main">
+            <a:off x="685800" y="2657475"/>
             <a:ext cx="4953000" cy="2619375"/>
           </a:xfrm>
           <a:prstGeom xmlns:a="http://schemas.openxmlformats.org/drawingml/2006/main" prst="rect">
@@ -6218,7 +6343,7 @@
                 <a:ea typeface="Arial"/>
                 <a:cs typeface="Arial"/>
               </a:rPr>
-              <a:t>Formulação e execução extensas</a:t>
+              <a:t>Contribuição mais clara</a:t>
             </a:r>
           </a:p>
           <a:p xmlns:a="http://schemas.openxmlformats.org/drawingml/2006/main">
@@ -6241,7 +6366,7 @@
                 <a:ea typeface="Arial"/>
                 <a:cs typeface="Arial"/>
               </a:rPr>
-              <a:t>Controles e correções</a:t>
+              <a:t>Resultados reorganizados</a:t>
             </a:r>
           </a:p>
           <a:p xmlns:a="http://schemas.openxmlformats.org/drawingml/2006/main">
@@ -6264,28 +6389,28 @@
                 <a:ea typeface="Arial"/>
                 <a:cs typeface="Arial"/>
               </a:rPr>
-              <a:t>Produtos reproduzíveis no escopo</a:t>
-            </a:r>
-          </a:p>
-        </p:txBody>
-      </p:sp>
-      <p:sp>
-        <p:nvSpPr>
-          <p:cNvPr id="5" name="Questões abertas">
-            <a:extLst xmlns:a="http://schemas.openxmlformats.org/drawingml/2006/main">
-              <a:ext uri="{FF2B5EF4-FFF2-40B4-BE49-F238E27FC236}">
-                <a16:creationId xmlns:a16="http://schemas.microsoft.com/office/drawing/2014/main" id="{93446D02-DF0E-44E6-A643-AC6FD13D9C29}"/>
-              </a:ext>
-            </a:extLst>
-          </p:cNvPr>
-          <p:cNvSpPr>
-            <a:spLocks xmlns:a="http://schemas.openxmlformats.org/drawingml/2006/main" noGrp="1"/>
-          </p:cNvSpPr>
-          <p:nvPr/>
-        </p:nvSpPr>
-        <p:spPr>
-          <a:xfrm xmlns:a="http://schemas.openxmlformats.org/drawingml/2006/main">
-            <a:off x="6572250" y="1809750"/>
+              <a:t>Diagrama explicativo</a:t>
+            </a:r>
+          </a:p>
+        </p:txBody>
+      </p:sp>
+      <p:sp>
+        <p:nvSpPr>
+          <p:cNvPr id="5" name="Generalizações limitadas">
+            <a:extLst xmlns:a="http://schemas.openxmlformats.org/drawingml/2006/main">
+              <a:ext uri="{FF2B5EF4-FFF2-40B4-BE49-F238E27FC236}">
+                <a16:creationId xmlns:a16="http://schemas.microsoft.com/office/drawing/2014/main" id="{8E12FC8C-BB7B-41D3-9D19-783D00438DFF}"/>
+              </a:ext>
+            </a:extLst>
+          </p:cNvPr>
+          <p:cNvSpPr>
+            <a:spLocks xmlns:a="http://schemas.openxmlformats.org/drawingml/2006/main" noGrp="1"/>
+          </p:cNvSpPr>
+          <p:nvPr/>
+        </p:nvSpPr>
+        <p:spPr>
+          <a:xfrm xmlns:a="http://schemas.openxmlformats.org/drawingml/2006/main">
+            <a:off x="6572250" y="1952625"/>
             <a:ext cx="4953000" cy="514350"/>
           </a:xfrm>
           <a:prstGeom xmlns:a="http://schemas.openxmlformats.org/drawingml/2006/main" prst="rect">
@@ -6321,28 +6446,28 @@
                 <a:ea typeface="Arial"/>
                 <a:cs typeface="Arial"/>
               </a:rPr>
-              <a:t>Questões abertas</a:t>
-            </a:r>
-          </a:p>
-        </p:txBody>
-      </p:sp>
-      <p:sp>
-        <p:nvSpPr>
-          <p:cNvPr id="6" name="Originalidade definitiva&#10;Qualidade julgada por especial">
-            <a:extLst xmlns:a="http://schemas.openxmlformats.org/drawingml/2006/main">
-              <a:ext uri="{FF2B5EF4-FFF2-40B4-BE49-F238E27FC236}">
-                <a16:creationId xmlns:a16="http://schemas.microsoft.com/office/drawing/2014/main" id="{5E713E74-C1C0-4771-B115-BF1E0AE0EB2B}"/>
-              </a:ext>
-            </a:extLst>
-          </p:cNvPr>
-          <p:cNvSpPr>
-            <a:spLocks xmlns:a="http://schemas.openxmlformats.org/drawingml/2006/main" noGrp="1"/>
-          </p:cNvSpPr>
-          <p:nvPr/>
-        </p:nvSpPr>
-        <p:spPr>
-          <a:xfrm xmlns:a="http://schemas.openxmlformats.org/drawingml/2006/main">
-            <a:off x="6572250" y="2514600"/>
+              <a:t>Generalizações limitadas</a:t>
+            </a:r>
+          </a:p>
+        </p:txBody>
+      </p:sp>
+      <p:sp>
+        <p:nvSpPr>
+          <p:cNvPr id="6" name="Ineditismo absoluto&#10;Falha inevitável em dados reais&#10;Cau">
+            <a:extLst xmlns:a="http://schemas.openxmlformats.org/drawingml/2006/main">
+              <a:ext uri="{FF2B5EF4-FFF2-40B4-BE49-F238E27FC236}">
+                <a16:creationId xmlns:a16="http://schemas.microsoft.com/office/drawing/2014/main" id="{E59EB15F-9957-41D9-AD58-29522AAF5B63}"/>
+              </a:ext>
+            </a:extLst>
+          </p:cNvPr>
+          <p:cNvSpPr>
+            <a:spLocks xmlns:a="http://schemas.openxmlformats.org/drawingml/2006/main" noGrp="1"/>
+          </p:cNvSpPr>
+          <p:nvPr/>
+        </p:nvSpPr>
+        <p:spPr>
+          <a:xfrm xmlns:a="http://schemas.openxmlformats.org/drawingml/2006/main">
+            <a:off x="6572250" y="2657475"/>
             <a:ext cx="4953000" cy="2619375"/>
           </a:xfrm>
           <a:prstGeom xmlns:a="http://schemas.openxmlformats.org/drawingml/2006/main" prst="rect">
@@ -6378,7 +6503,7 @@
                 <a:ea typeface="Arial"/>
                 <a:cs typeface="Arial"/>
               </a:rPr>
-              <a:t>Originalidade definitiva</a:t>
+              <a:t>Ineditismo absoluto</a:t>
             </a:r>
           </a:p>
           <a:p xmlns:a="http://schemas.openxmlformats.org/drawingml/2006/main">
@@ -6401,7 +6526,7 @@
                 <a:ea typeface="Arial"/>
                 <a:cs typeface="Arial"/>
               </a:rPr>
-              <a:t>Qualidade julgada por especialistas</a:t>
+              <a:t>Falha inevitável em dados reais</a:t>
             </a:r>
           </a:p>
           <a:p xmlns:a="http://schemas.openxmlformats.org/drawingml/2006/main">
@@ -6424,7 +6549,64 @@
                 <a:ea typeface="Arial"/>
                 <a:cs typeface="Arial"/>
               </a:rPr>
-              <a:t>Aprendizagem e ganho de produtividade</a:t>
+              <a:t>Causas não demonstradas</a:t>
+            </a:r>
+          </a:p>
+        </p:txBody>
+      </p:sp>
+      <p:sp>
+        <p:nvSpPr>
+          <p:cNvPr id="7" name="A revisão ampliou o artigo de 7 para 9 páginas, sem nov">
+            <a:extLst xmlns:a="http://schemas.openxmlformats.org/drawingml/2006/main">
+              <a:ext uri="{FF2B5EF4-FFF2-40B4-BE49-F238E27FC236}">
+                <a16:creationId xmlns:a16="http://schemas.microsoft.com/office/drawing/2014/main" id="{F51F0B00-D303-4415-A76B-2FC60A3CAAF4}"/>
+              </a:ext>
+            </a:extLst>
+          </p:cNvPr>
+          <p:cNvSpPr>
+            <a:spLocks xmlns:a="http://schemas.openxmlformats.org/drawingml/2006/main" noGrp="1"/>
+          </p:cNvSpPr>
+          <p:nvPr/>
+        </p:nvSpPr>
+        <p:spPr>
+          <a:xfrm xmlns:a="http://schemas.openxmlformats.org/drawingml/2006/main">
+            <a:off x="685800" y="5572125"/>
+            <a:ext cx="10668000" cy="476250"/>
+          </a:xfrm>
+          <a:prstGeom xmlns:a="http://schemas.openxmlformats.org/drawingml/2006/main" prst="rect">
+            <a:avLst/>
+          </a:prstGeom>
+          <a:noFill xmlns:a="http://schemas.openxmlformats.org/drawingml/2006/main"/>
+          <a:ln xmlns:a="http://schemas.openxmlformats.org/drawingml/2006/main" w="0">
+            <a:noFill/>
+          </a:ln>
+        </p:spPr>
+        <p:txBody>
+          <a:bodyPr xmlns:a="http://schemas.openxmlformats.org/drawingml/2006/main" lIns="0" tIns="0" rIns="0" bIns="0" anchor="t">
+            <a:noAutofit/>
+          </a:bodyPr>
+          <a:lstStyle xmlns:a="http://schemas.openxmlformats.org/drawingml/2006/main"/>
+          <a:p xmlns:a="http://schemas.openxmlformats.org/drawingml/2006/main">
+            <a:pPr>
+              <a:defRPr sz="2025" b="1">
+                <a:solidFill>
+                  <a:srgbClr val="17324D"/>
+                </a:solidFill>
+                <a:latin typeface="Arial"/>
+                <a:ea typeface="Arial"/>
+                <a:cs typeface="Arial"/>
+              </a:defRPr>
+            </a:pPr>
+            <a:r>
+              <a:rPr sz="2025" b="1">
+                <a:solidFill>
+                  <a:srgbClr val="17324D"/>
+                </a:solidFill>
+                <a:latin typeface="Arial"/>
+                <a:ea typeface="Arial"/>
+                <a:cs typeface="Arial"/>
+              </a:rPr>
+              <a:t>A revisão ampliou o artigo de 7 para 9 páginas, sem novas simulações.</a:t>
             </a:r>
           </a:p>
         </p:txBody>
@@ -6432,7 +6614,7 @@
     </p:spTree>
     <p:extLst>
       <p:ext uri="{BB962C8B-B14F-4D97-AF65-F5344CB8AC3E}">
-        <p14:creationId xmlns:p14="http://schemas.microsoft.com/office/powerpoint/2010/main" val="336734841"/>
+        <p14:creationId xmlns:p14="http://schemas.microsoft.com/office/powerpoint/2010/main" val="630405139"/>
       </p:ext>
     </p:extLst>
   </p:cSld>
@@ -6460,10 +6642,10 @@
       </p:grpSpPr>
       <p:sp>
         <p:nvSpPr>
-          <p:cNvPr id="8" name="A divisão do trabalho pode mudar">
-            <a:extLst xmlns:a="http://schemas.openxmlformats.org/drawingml/2006/main">
-              <a:ext uri="{FF2B5EF4-FFF2-40B4-BE49-F238E27FC236}">
-                <a16:creationId xmlns:a16="http://schemas.microsoft.com/office/drawing/2014/main" id="{BC285850-3A85-4E27-BA0E-FA44FBBA6611}"/>
+          <p:cNvPr id="7" name="O que o caso demonstra">
+            <a:extLst xmlns:a="http://schemas.openxmlformats.org/drawingml/2006/main">
+              <a:ext uri="{FF2B5EF4-FFF2-40B4-BE49-F238E27FC236}">
+                <a16:creationId xmlns:a16="http://schemas.microsoft.com/office/drawing/2014/main" id="{0A3687DB-7592-4F26-963D-0B1F5628DA8F}"/>
               </a:ext>
             </a:extLst>
           </p:cNvPr>
@@ -6510,17 +6692,17 @@
                 <a:ea typeface="Arial"/>
                 <a:cs typeface="Arial"/>
               </a:rPr>
-              <a:t>A divisão do trabalho pode mudar</a:t>
-            </a:r>
-          </a:p>
-        </p:txBody>
-      </p:sp>
-      <p:sp>
-        <p:nvSpPr>
-          <p:cNvPr id="2" name="16 / 20">
-            <a:extLst xmlns:a="http://schemas.openxmlformats.org/drawingml/2006/main">
-              <a:ext uri="{FF2B5EF4-FFF2-40B4-BE49-F238E27FC236}">
-                <a16:creationId xmlns:a16="http://schemas.microsoft.com/office/drawing/2014/main" id="{4F348D87-BD58-4811-AFC4-183C75F62307}"/>
+              <a:t>O que o caso demonstra</a:t>
+            </a:r>
+          </a:p>
+        </p:txBody>
+      </p:sp>
+      <p:sp>
+        <p:nvSpPr>
+          <p:cNvPr id="2" name="16 / 21">
+            <a:extLst xmlns:a="http://schemas.openxmlformats.org/drawingml/2006/main">
+              <a:ext uri="{FF2B5EF4-FFF2-40B4-BE49-F238E27FC236}">
+                <a16:creationId xmlns:a16="http://schemas.microsoft.com/office/drawing/2014/main" id="{9AB2D822-81AB-4AA7-A29B-75E569C81A55}"/>
               </a:ext>
             </a:extLst>
           </p:cNvPr>
@@ -6567,85 +6749,28 @@
                 <a:ea typeface="Arial"/>
                 <a:cs typeface="Arial"/>
               </a:rPr>
-              <a:t>16 / 20</a:t>
-            </a:r>
-          </a:p>
-        </p:txBody>
-      </p:sp>
-      <p:sp>
-        <p:nvSpPr>
-          <p:cNvPr id="3" name="Mais capacidade de explorar ideias">
-            <a:extLst xmlns:a="http://schemas.openxmlformats.org/drawingml/2006/main">
-              <a:ext uri="{FF2B5EF4-FFF2-40B4-BE49-F238E27FC236}">
-                <a16:creationId xmlns:a16="http://schemas.microsoft.com/office/drawing/2014/main" id="{E03C5139-87FF-4A62-9227-624B73B92FDF}"/>
-              </a:ext>
-            </a:extLst>
-          </p:cNvPr>
-          <p:cNvSpPr>
-            <a:spLocks xmlns:a="http://schemas.openxmlformats.org/drawingml/2006/main" noGrp="1"/>
-          </p:cNvSpPr>
-          <p:nvPr/>
-        </p:nvSpPr>
-        <p:spPr>
-          <a:xfrm xmlns:a="http://schemas.openxmlformats.org/drawingml/2006/main">
-            <a:off x="685800" y="1666875"/>
-            <a:ext cx="10763250" cy="1428750"/>
-          </a:xfrm>
-          <a:prstGeom xmlns:a="http://schemas.openxmlformats.org/drawingml/2006/main" prst="rect">
-            <a:avLst/>
-          </a:prstGeom>
-          <a:noFill xmlns:a="http://schemas.openxmlformats.org/drawingml/2006/main"/>
-          <a:ln xmlns:a="http://schemas.openxmlformats.org/drawingml/2006/main" w="0">
-            <a:noFill/>
-          </a:ln>
-        </p:spPr>
-        <p:txBody>
-          <a:bodyPr xmlns:a="http://schemas.openxmlformats.org/drawingml/2006/main" lIns="0" tIns="0" rIns="0" bIns="0" anchor="t">
-            <a:noAutofit/>
-          </a:bodyPr>
-          <a:lstStyle xmlns:a="http://schemas.openxmlformats.org/drawingml/2006/main"/>
-          <a:p xmlns:a="http://schemas.openxmlformats.org/drawingml/2006/main">
-            <a:pPr>
-              <a:defRPr sz="3000" b="1">
-                <a:solidFill>
-                  <a:srgbClr val="17324D"/>
-                </a:solidFill>
-                <a:latin typeface="Arial"/>
-                <a:ea typeface="Arial"/>
-                <a:cs typeface="Arial"/>
-              </a:defRPr>
-            </a:pPr>
-            <a:r>
-              <a:rPr sz="3000" b="1">
-                <a:solidFill>
-                  <a:srgbClr val="17324D"/>
-                </a:solidFill>
-                <a:latin typeface="Arial"/>
-                <a:ea typeface="Arial"/>
-                <a:cs typeface="Arial"/>
-              </a:rPr>
-              <a:t>Mais capacidade de explorar ideias</a:t>
-            </a:r>
-          </a:p>
-        </p:txBody>
-      </p:sp>
-      <p:sp>
-        <p:nvSpPr>
-          <p:cNvPr id="4" name="Trabalho delegável">
-            <a:extLst xmlns:a="http://schemas.openxmlformats.org/drawingml/2006/main">
-              <a:ext uri="{FF2B5EF4-FFF2-40B4-BE49-F238E27FC236}">
-                <a16:creationId xmlns:a16="http://schemas.microsoft.com/office/drawing/2014/main" id="{49A6EEBD-C8AD-4A7E-9FD0-87A99E7D39FE}"/>
-              </a:ext>
-            </a:extLst>
-          </p:cNvPr>
-          <p:cNvSpPr>
-            <a:spLocks xmlns:a="http://schemas.openxmlformats.org/drawingml/2006/main" noGrp="1"/>
-          </p:cNvSpPr>
-          <p:nvPr/>
-        </p:nvSpPr>
-        <p:spPr>
-          <a:xfrm xmlns:a="http://schemas.openxmlformats.org/drawingml/2006/main">
-            <a:off x="685800" y="3238500"/>
+              <a:t>16 / 21</a:t>
+            </a:r>
+          </a:p>
+        </p:txBody>
+      </p:sp>
+      <p:sp>
+        <p:nvSpPr>
+          <p:cNvPr id="3" name="Evidência disponível">
+            <a:extLst xmlns:a="http://schemas.openxmlformats.org/drawingml/2006/main">
+              <a:ext uri="{FF2B5EF4-FFF2-40B4-BE49-F238E27FC236}">
+                <a16:creationId xmlns:a16="http://schemas.microsoft.com/office/drawing/2014/main" id="{4C7BCE78-7906-46BC-9A87-F447790F11C7}"/>
+              </a:ext>
+            </a:extLst>
+          </p:cNvPr>
+          <p:cNvSpPr>
+            <a:spLocks xmlns:a="http://schemas.openxmlformats.org/drawingml/2006/main" noGrp="1"/>
+          </p:cNvSpPr>
+          <p:nvPr/>
+        </p:nvSpPr>
+        <p:spPr>
+          <a:xfrm xmlns:a="http://schemas.openxmlformats.org/drawingml/2006/main">
+            <a:off x="685800" y="1809750"/>
             <a:ext cx="4953000" cy="514350"/>
           </a:xfrm>
           <a:prstGeom xmlns:a="http://schemas.openxmlformats.org/drawingml/2006/main" prst="rect">
@@ -6681,28 +6806,28 @@
                 <a:ea typeface="Arial"/>
                 <a:cs typeface="Arial"/>
               </a:rPr>
-              <a:t>Trabalho delegável</a:t>
-            </a:r>
-          </a:p>
-        </p:txBody>
-      </p:sp>
-      <p:sp>
-        <p:nvSpPr>
-          <p:cNvPr id="5" name="Primeiras formulações&#10;Código e controles&#10;Organização do">
-            <a:extLst xmlns:a="http://schemas.openxmlformats.org/drawingml/2006/main">
-              <a:ext uri="{FF2B5EF4-FFF2-40B4-BE49-F238E27FC236}">
-                <a16:creationId xmlns:a16="http://schemas.microsoft.com/office/drawing/2014/main" id="{6EC9BF5A-E724-4827-8572-3455796CADA5}"/>
-              </a:ext>
-            </a:extLst>
-          </p:cNvPr>
-          <p:cNvSpPr>
-            <a:spLocks xmlns:a="http://schemas.openxmlformats.org/drawingml/2006/main" noGrp="1"/>
-          </p:cNvSpPr>
-          <p:nvPr/>
-        </p:nvSpPr>
-        <p:spPr>
-          <a:xfrm xmlns:a="http://schemas.openxmlformats.org/drawingml/2006/main">
-            <a:off x="685800" y="3943350"/>
+              <a:t>Evidência disponível</a:t>
+            </a:r>
+          </a:p>
+        </p:txBody>
+      </p:sp>
+      <p:sp>
+        <p:nvSpPr>
+          <p:cNvPr id="4" name="Formulação e execução extensas&#10;Controles e correções&#10;Pr">
+            <a:extLst xmlns:a="http://schemas.openxmlformats.org/drawingml/2006/main">
+              <a:ext uri="{FF2B5EF4-FFF2-40B4-BE49-F238E27FC236}">
+                <a16:creationId xmlns:a16="http://schemas.microsoft.com/office/drawing/2014/main" id="{C6131481-DEFA-47C4-8159-DE2AD1E331A6}"/>
+              </a:ext>
+            </a:extLst>
+          </p:cNvPr>
+          <p:cNvSpPr>
+            <a:spLocks xmlns:a="http://schemas.openxmlformats.org/drawingml/2006/main" noGrp="1"/>
+          </p:cNvSpPr>
+          <p:nvPr/>
+        </p:nvSpPr>
+        <p:spPr>
+          <a:xfrm xmlns:a="http://schemas.openxmlformats.org/drawingml/2006/main">
+            <a:off x="685800" y="2514600"/>
             <a:ext cx="4953000" cy="2619375"/>
           </a:xfrm>
           <a:prstGeom xmlns:a="http://schemas.openxmlformats.org/drawingml/2006/main" prst="rect">
@@ -6738,7 +6863,7 @@
                 <a:ea typeface="Arial"/>
                 <a:cs typeface="Arial"/>
               </a:rPr>
-              <a:t>Primeiras formulações</a:t>
+              <a:t>Formulação e execução extensas</a:t>
             </a:r>
           </a:p>
           <a:p xmlns:a="http://schemas.openxmlformats.org/drawingml/2006/main">
@@ -6761,7 +6886,7 @@
                 <a:ea typeface="Arial"/>
                 <a:cs typeface="Arial"/>
               </a:rPr>
-              <a:t>Código e controles</a:t>
+              <a:t>Controles e correções</a:t>
             </a:r>
           </a:p>
           <a:p xmlns:a="http://schemas.openxmlformats.org/drawingml/2006/main">
@@ -6784,28 +6909,28 @@
                 <a:ea typeface="Arial"/>
                 <a:cs typeface="Arial"/>
               </a:rPr>
-              <a:t>Organização dos resultados</a:t>
-            </a:r>
-          </a:p>
-        </p:txBody>
-      </p:sp>
-      <p:sp>
-        <p:nvSpPr>
-          <p:cNvPr id="6" name="Trabalho a avaliar">
-            <a:extLst xmlns:a="http://schemas.openxmlformats.org/drawingml/2006/main">
-              <a:ext uri="{FF2B5EF4-FFF2-40B4-BE49-F238E27FC236}">
-                <a16:creationId xmlns:a16="http://schemas.microsoft.com/office/drawing/2014/main" id="{C0E75519-19FD-444E-8895-6F4A12774C36}"/>
-              </a:ext>
-            </a:extLst>
-          </p:cNvPr>
-          <p:cNvSpPr>
-            <a:spLocks xmlns:a="http://schemas.openxmlformats.org/drawingml/2006/main" noGrp="1"/>
-          </p:cNvSpPr>
-          <p:nvPr/>
-        </p:nvSpPr>
-        <p:spPr>
-          <a:xfrm xmlns:a="http://schemas.openxmlformats.org/drawingml/2006/main">
-            <a:off x="6572250" y="3238500"/>
+              <a:t>Produtos reproduzíveis no escopo</a:t>
+            </a:r>
+          </a:p>
+        </p:txBody>
+      </p:sp>
+      <p:sp>
+        <p:nvSpPr>
+          <p:cNvPr id="5" name="Questões abertas">
+            <a:extLst xmlns:a="http://schemas.openxmlformats.org/drawingml/2006/main">
+              <a:ext uri="{FF2B5EF4-FFF2-40B4-BE49-F238E27FC236}">
+                <a16:creationId xmlns:a16="http://schemas.microsoft.com/office/drawing/2014/main" id="{FA50062B-5711-41BC-91A7-503E5865AEDC}"/>
+              </a:ext>
+            </a:extLst>
+          </p:cNvPr>
+          <p:cNvSpPr>
+            <a:spLocks xmlns:a="http://schemas.openxmlformats.org/drawingml/2006/main" noGrp="1"/>
+          </p:cNvSpPr>
+          <p:nvPr/>
+        </p:nvSpPr>
+        <p:spPr>
+          <a:xfrm xmlns:a="http://schemas.openxmlformats.org/drawingml/2006/main">
+            <a:off x="6572250" y="1809750"/>
             <a:ext cx="4953000" cy="514350"/>
           </a:xfrm>
           <a:prstGeom xmlns:a="http://schemas.openxmlformats.org/drawingml/2006/main" prst="rect">
@@ -6841,28 +6966,28 @@
                 <a:ea typeface="Arial"/>
                 <a:cs typeface="Arial"/>
               </a:rPr>
-              <a:t>Trabalho a avaliar</a:t>
-            </a:r>
-          </a:p>
-        </p:txBody>
-      </p:sp>
-      <p:sp>
-        <p:nvSpPr>
-          <p:cNvPr id="7" name="Escolha da pergunta&#10;Julgamento das evidências&#10;Decisão d">
-            <a:extLst xmlns:a="http://schemas.openxmlformats.org/drawingml/2006/main">
-              <a:ext uri="{FF2B5EF4-FFF2-40B4-BE49-F238E27FC236}">
-                <a16:creationId xmlns:a16="http://schemas.microsoft.com/office/drawing/2014/main" id="{F6C25B1E-3469-42AB-A4BF-454F4D6CB220}"/>
-              </a:ext>
-            </a:extLst>
-          </p:cNvPr>
-          <p:cNvSpPr>
-            <a:spLocks xmlns:a="http://schemas.openxmlformats.org/drawingml/2006/main" noGrp="1"/>
-          </p:cNvSpPr>
-          <p:nvPr/>
-        </p:nvSpPr>
-        <p:spPr>
-          <a:xfrm xmlns:a="http://schemas.openxmlformats.org/drawingml/2006/main">
-            <a:off x="6572250" y="3943350"/>
+              <a:t>Questões abertas</a:t>
+            </a:r>
+          </a:p>
+        </p:txBody>
+      </p:sp>
+      <p:sp>
+        <p:nvSpPr>
+          <p:cNvPr id="6" name="Originalidade definitiva&#10;Qualidade julgada por especial">
+            <a:extLst xmlns:a="http://schemas.openxmlformats.org/drawingml/2006/main">
+              <a:ext uri="{FF2B5EF4-FFF2-40B4-BE49-F238E27FC236}">
+                <a16:creationId xmlns:a16="http://schemas.microsoft.com/office/drawing/2014/main" id="{54BD98B8-CC9F-421D-A2C9-B843317CFC73}"/>
+              </a:ext>
+            </a:extLst>
+          </p:cNvPr>
+          <p:cNvSpPr>
+            <a:spLocks xmlns:a="http://schemas.openxmlformats.org/drawingml/2006/main" noGrp="1"/>
+          </p:cNvSpPr>
+          <p:nvPr/>
+        </p:nvSpPr>
+        <p:spPr>
+          <a:xfrm xmlns:a="http://schemas.openxmlformats.org/drawingml/2006/main">
+            <a:off x="6572250" y="2514600"/>
             <a:ext cx="4953000" cy="2619375"/>
           </a:xfrm>
           <a:prstGeom xmlns:a="http://schemas.openxmlformats.org/drawingml/2006/main" prst="rect">
@@ -6898,7 +7023,7 @@
                 <a:ea typeface="Arial"/>
                 <a:cs typeface="Arial"/>
               </a:rPr>
-              <a:t>Escolha da pergunta</a:t>
+              <a:t>Originalidade definitiva</a:t>
             </a:r>
           </a:p>
           <a:p xmlns:a="http://schemas.openxmlformats.org/drawingml/2006/main">
@@ -6921,7 +7046,7 @@
                 <a:ea typeface="Arial"/>
                 <a:cs typeface="Arial"/>
               </a:rPr>
-              <a:t>Julgamento das evidências</a:t>
+              <a:t>Qualidade julgada por especialistas</a:t>
             </a:r>
           </a:p>
           <a:p xmlns:a="http://schemas.openxmlformats.org/drawingml/2006/main">
@@ -6944,7 +7069,7 @@
                 <a:ea typeface="Arial"/>
                 <a:cs typeface="Arial"/>
               </a:rPr>
-              <a:t>Decisão de continuar ou parar</a:t>
+              <a:t>Aprendizagem e ganho de produtividade</a:t>
             </a:r>
           </a:p>
         </p:txBody>
@@ -6952,7 +7077,7 @@
     </p:spTree>
     <p:extLst>
       <p:ext uri="{BB962C8B-B14F-4D97-AF65-F5344CB8AC3E}">
-        <p14:creationId xmlns:p14="http://schemas.microsoft.com/office/powerpoint/2010/main" val="1634003914"/>
+        <p14:creationId xmlns:p14="http://schemas.microsoft.com/office/powerpoint/2010/main" val="2099886650"/>
       </p:ext>
     </p:extLst>
   </p:cSld>
@@ -6980,10 +7105,10 @@
       </p:grpSpPr>
       <p:sp>
         <p:nvSpPr>
-          <p:cNvPr id="9" name="Formação precisa aparecer no processo">
-            <a:extLst xmlns:a="http://schemas.openxmlformats.org/drawingml/2006/main">
-              <a:ext uri="{FF2B5EF4-FFF2-40B4-BE49-F238E27FC236}">
-                <a16:creationId xmlns:a16="http://schemas.microsoft.com/office/drawing/2014/main" id="{39DB97C3-08B4-4AA7-B049-12F083C53D3E}"/>
+          <p:cNvPr id="8" name="A divisão do trabalho pode mudar">
+            <a:extLst xmlns:a="http://schemas.openxmlformats.org/drawingml/2006/main">
+              <a:ext uri="{FF2B5EF4-FFF2-40B4-BE49-F238E27FC236}">
+                <a16:creationId xmlns:a16="http://schemas.microsoft.com/office/drawing/2014/main" id="{495E8086-988A-4A87-96D5-7DA63B0DB951}"/>
               </a:ext>
             </a:extLst>
           </p:cNvPr>
@@ -7030,17 +7155,17 @@
                 <a:ea typeface="Arial"/>
                 <a:cs typeface="Arial"/>
               </a:rPr>
-              <a:t>Formação precisa aparecer no processo</a:t>
-            </a:r>
-          </a:p>
-        </p:txBody>
-      </p:sp>
-      <p:sp>
-        <p:nvSpPr>
-          <p:cNvPr id="2" name="17 / 20">
-            <a:extLst xmlns:a="http://schemas.openxmlformats.org/drawingml/2006/main">
-              <a:ext uri="{FF2B5EF4-FFF2-40B4-BE49-F238E27FC236}">
-                <a16:creationId xmlns:a16="http://schemas.microsoft.com/office/drawing/2014/main" id="{CA890997-EC56-4A1B-90C8-02F0C56B9607}"/>
+              <a:t>A divisão do trabalho pode mudar</a:t>
+            </a:r>
+          </a:p>
+        </p:txBody>
+      </p:sp>
+      <p:sp>
+        <p:nvSpPr>
+          <p:cNvPr id="2" name="17 / 21">
+            <a:extLst xmlns:a="http://schemas.openxmlformats.org/drawingml/2006/main">
+              <a:ext uri="{FF2B5EF4-FFF2-40B4-BE49-F238E27FC236}">
+                <a16:creationId xmlns:a16="http://schemas.microsoft.com/office/drawing/2014/main" id="{CB857A30-CA6D-4C06-9B25-F5CA34311972}"/>
               </a:ext>
             </a:extLst>
           </p:cNvPr>
@@ -7087,29 +7212,86 @@
                 <a:ea typeface="Arial"/>
                 <a:cs typeface="Arial"/>
               </a:rPr>
-              <a:t>17 / 20</a:t>
-            </a:r>
-          </a:p>
-        </p:txBody>
-      </p:sp>
-      <p:sp>
-        <p:nvSpPr>
-          <p:cNvPr id="3" name="Antes de executar">
-            <a:extLst xmlns:a="http://schemas.openxmlformats.org/drawingml/2006/main">
-              <a:ext uri="{FF2B5EF4-FFF2-40B4-BE49-F238E27FC236}">
-                <a16:creationId xmlns:a16="http://schemas.microsoft.com/office/drawing/2014/main" id="{3ED3D561-1013-4A9C-A963-460A504E1773}"/>
-              </a:ext>
-            </a:extLst>
-          </p:cNvPr>
-          <p:cNvSpPr>
-            <a:spLocks xmlns:a="http://schemas.openxmlformats.org/drawingml/2006/main" noGrp="1"/>
-          </p:cNvSpPr>
-          <p:nvPr/>
-        </p:nvSpPr>
-        <p:spPr>
-          <a:xfrm xmlns:a="http://schemas.openxmlformats.org/drawingml/2006/main">
-            <a:off x="685800" y="1905000"/>
-            <a:ext cx="2524125" cy="762000"/>
+              <a:t>17 / 21</a:t>
+            </a:r>
+          </a:p>
+        </p:txBody>
+      </p:sp>
+      <p:sp>
+        <p:nvSpPr>
+          <p:cNvPr id="3" name="Mais capacidade de explorar ideias">
+            <a:extLst xmlns:a="http://schemas.openxmlformats.org/drawingml/2006/main">
+              <a:ext uri="{FF2B5EF4-FFF2-40B4-BE49-F238E27FC236}">
+                <a16:creationId xmlns:a16="http://schemas.microsoft.com/office/drawing/2014/main" id="{0E13F579-0995-4F8A-A818-CD85B05970DE}"/>
+              </a:ext>
+            </a:extLst>
+          </p:cNvPr>
+          <p:cNvSpPr>
+            <a:spLocks xmlns:a="http://schemas.openxmlformats.org/drawingml/2006/main" noGrp="1"/>
+          </p:cNvSpPr>
+          <p:nvPr/>
+        </p:nvSpPr>
+        <p:spPr>
+          <a:xfrm xmlns:a="http://schemas.openxmlformats.org/drawingml/2006/main">
+            <a:off x="685800" y="1666875"/>
+            <a:ext cx="10763250" cy="1428750"/>
+          </a:xfrm>
+          <a:prstGeom xmlns:a="http://schemas.openxmlformats.org/drawingml/2006/main" prst="rect">
+            <a:avLst/>
+          </a:prstGeom>
+          <a:noFill xmlns:a="http://schemas.openxmlformats.org/drawingml/2006/main"/>
+          <a:ln xmlns:a="http://schemas.openxmlformats.org/drawingml/2006/main" w="0">
+            <a:noFill/>
+          </a:ln>
+        </p:spPr>
+        <p:txBody>
+          <a:bodyPr xmlns:a="http://schemas.openxmlformats.org/drawingml/2006/main" lIns="0" tIns="0" rIns="0" bIns="0" anchor="t">
+            <a:noAutofit/>
+          </a:bodyPr>
+          <a:lstStyle xmlns:a="http://schemas.openxmlformats.org/drawingml/2006/main"/>
+          <a:p xmlns:a="http://schemas.openxmlformats.org/drawingml/2006/main">
+            <a:pPr>
+              <a:defRPr sz="3000" b="1">
+                <a:solidFill>
+                  <a:srgbClr val="17324D"/>
+                </a:solidFill>
+                <a:latin typeface="Arial"/>
+                <a:ea typeface="Arial"/>
+                <a:cs typeface="Arial"/>
+              </a:defRPr>
+            </a:pPr>
+            <a:r>
+              <a:rPr sz="3000" b="1">
+                <a:solidFill>
+                  <a:srgbClr val="17324D"/>
+                </a:solidFill>
+                <a:latin typeface="Arial"/>
+                <a:ea typeface="Arial"/>
+                <a:cs typeface="Arial"/>
+              </a:rPr>
+              <a:t>Mais capacidade de explorar ideias</a:t>
+            </a:r>
+          </a:p>
+        </p:txBody>
+      </p:sp>
+      <p:sp>
+        <p:nvSpPr>
+          <p:cNvPr id="4" name="Trabalho delegável">
+            <a:extLst xmlns:a="http://schemas.openxmlformats.org/drawingml/2006/main">
+              <a:ext uri="{FF2B5EF4-FFF2-40B4-BE49-F238E27FC236}">
+                <a16:creationId xmlns:a16="http://schemas.microsoft.com/office/drawing/2014/main" id="{2567A355-F5EB-4F5A-841A-5AABA7FA041E}"/>
+              </a:ext>
+            </a:extLst>
+          </p:cNvPr>
+          <p:cNvSpPr>
+            <a:spLocks xmlns:a="http://schemas.openxmlformats.org/drawingml/2006/main" noGrp="1"/>
+          </p:cNvSpPr>
+          <p:nvPr/>
+        </p:nvSpPr>
+        <p:spPr>
+          <a:xfrm xmlns:a="http://schemas.openxmlformats.org/drawingml/2006/main">
+            <a:off x="685800" y="3238500"/>
+            <a:ext cx="4953000" cy="514350"/>
           </a:xfrm>
           <a:prstGeom xmlns:a="http://schemas.openxmlformats.org/drawingml/2006/main" prst="rect">
             <a:avLst/>
@@ -7144,29 +7326,29 @@
                 <a:ea typeface="Arial"/>
                 <a:cs typeface="Arial"/>
               </a:rPr>
-              <a:t>Antes de executar</a:t>
-            </a:r>
-          </a:p>
-        </p:txBody>
-      </p:sp>
-      <p:sp>
-        <p:nvSpPr>
-          <p:cNvPr id="4" name="Explicar a hipótese e prever o efeito de uma mudança.">
-            <a:extLst xmlns:a="http://schemas.openxmlformats.org/drawingml/2006/main">
-              <a:ext uri="{FF2B5EF4-FFF2-40B4-BE49-F238E27FC236}">
-                <a16:creationId xmlns:a16="http://schemas.microsoft.com/office/drawing/2014/main" id="{DC2111CF-E1C7-40D3-84CA-4035655BB729}"/>
-              </a:ext>
-            </a:extLst>
-          </p:cNvPr>
-          <p:cNvSpPr>
-            <a:spLocks xmlns:a="http://schemas.openxmlformats.org/drawingml/2006/main" noGrp="1"/>
-          </p:cNvSpPr>
-          <p:nvPr/>
-        </p:nvSpPr>
-        <p:spPr>
-          <a:xfrm xmlns:a="http://schemas.openxmlformats.org/drawingml/2006/main">
-            <a:off x="3619500" y="1905000"/>
-            <a:ext cx="7620000" cy="857250"/>
+              <a:t>Trabalho delegável</a:t>
+            </a:r>
+          </a:p>
+        </p:txBody>
+      </p:sp>
+      <p:sp>
+        <p:nvSpPr>
+          <p:cNvPr id="5" name="Primeiras formulações&#10;Código e controles&#10;Organização do">
+            <a:extLst xmlns:a="http://schemas.openxmlformats.org/drawingml/2006/main">
+              <a:ext uri="{FF2B5EF4-FFF2-40B4-BE49-F238E27FC236}">
+                <a16:creationId xmlns:a16="http://schemas.microsoft.com/office/drawing/2014/main" id="{5C20FDF7-5660-45C7-9091-DDA23E990587}"/>
+              </a:ext>
+            </a:extLst>
+          </p:cNvPr>
+          <p:cNvSpPr>
+            <a:spLocks xmlns:a="http://schemas.openxmlformats.org/drawingml/2006/main" noGrp="1"/>
+          </p:cNvSpPr>
+          <p:nvPr/>
+        </p:nvSpPr>
+        <p:spPr>
+          <a:xfrm xmlns:a="http://schemas.openxmlformats.org/drawingml/2006/main">
+            <a:off x="685800" y="3943350"/>
+            <a:ext cx="4953000" cy="2619375"/>
           </a:xfrm>
           <a:prstGeom xmlns:a="http://schemas.openxmlformats.org/drawingml/2006/main" prst="rect">
             <a:avLst/>
@@ -7201,29 +7383,75 @@
                 <a:ea typeface="Arial"/>
                 <a:cs typeface="Arial"/>
               </a:rPr>
-              <a:t>Explicar a hipótese e prever o efeito de uma mudança.</a:t>
-            </a:r>
-          </a:p>
-        </p:txBody>
-      </p:sp>
-      <p:sp>
-        <p:nvSpPr>
-          <p:cNvPr id="5" name="Durante o trabalho">
-            <a:extLst xmlns:a="http://schemas.openxmlformats.org/drawingml/2006/main">
-              <a:ext uri="{FF2B5EF4-FFF2-40B4-BE49-F238E27FC236}">
-                <a16:creationId xmlns:a16="http://schemas.microsoft.com/office/drawing/2014/main" id="{7B7AF50D-D99B-48FD-9FC3-411368A49D5A}"/>
-              </a:ext>
-            </a:extLst>
-          </p:cNvPr>
-          <p:cNvSpPr>
-            <a:spLocks xmlns:a="http://schemas.openxmlformats.org/drawingml/2006/main" noGrp="1"/>
-          </p:cNvSpPr>
-          <p:nvPr/>
-        </p:nvSpPr>
-        <p:spPr>
-          <a:xfrm xmlns:a="http://schemas.openxmlformats.org/drawingml/2006/main">
-            <a:off x="685800" y="3000375"/>
-            <a:ext cx="2524125" cy="762000"/>
+              <a:t>Primeiras formulações</a:t>
+            </a:r>
+          </a:p>
+          <a:p xmlns:a="http://schemas.openxmlformats.org/drawingml/2006/main">
+            <a:pPr>
+              <a:defRPr sz="2175" b="0">
+                <a:solidFill>
+                  <a:srgbClr val="253643"/>
+                </a:solidFill>
+                <a:latin typeface="Arial"/>
+                <a:ea typeface="Arial"/>
+                <a:cs typeface="Arial"/>
+              </a:defRPr>
+            </a:pPr>
+            <a:r>
+              <a:rPr sz="2175" b="0">
+                <a:solidFill>
+                  <a:srgbClr val="253643"/>
+                </a:solidFill>
+                <a:latin typeface="Arial"/>
+                <a:ea typeface="Arial"/>
+                <a:cs typeface="Arial"/>
+              </a:rPr>
+              <a:t>Código e controles</a:t>
+            </a:r>
+          </a:p>
+          <a:p xmlns:a="http://schemas.openxmlformats.org/drawingml/2006/main">
+            <a:pPr>
+              <a:defRPr sz="2175" b="0">
+                <a:solidFill>
+                  <a:srgbClr val="253643"/>
+                </a:solidFill>
+                <a:latin typeface="Arial"/>
+                <a:ea typeface="Arial"/>
+                <a:cs typeface="Arial"/>
+              </a:defRPr>
+            </a:pPr>
+            <a:r>
+              <a:rPr sz="2175" b="0">
+                <a:solidFill>
+                  <a:srgbClr val="253643"/>
+                </a:solidFill>
+                <a:latin typeface="Arial"/>
+                <a:ea typeface="Arial"/>
+                <a:cs typeface="Arial"/>
+              </a:rPr>
+              <a:t>Organização dos resultados</a:t>
+            </a:r>
+          </a:p>
+        </p:txBody>
+      </p:sp>
+      <p:sp>
+        <p:nvSpPr>
+          <p:cNvPr id="6" name="Trabalho a avaliar">
+            <a:extLst xmlns:a="http://schemas.openxmlformats.org/drawingml/2006/main">
+              <a:ext uri="{FF2B5EF4-FFF2-40B4-BE49-F238E27FC236}">
+                <a16:creationId xmlns:a16="http://schemas.microsoft.com/office/drawing/2014/main" id="{881FDB17-C7B3-42E9-8D48-616622BB6050}"/>
+              </a:ext>
+            </a:extLst>
+          </p:cNvPr>
+          <p:cNvSpPr>
+            <a:spLocks xmlns:a="http://schemas.openxmlformats.org/drawingml/2006/main" noGrp="1"/>
+          </p:cNvSpPr>
+          <p:nvPr/>
+        </p:nvSpPr>
+        <p:spPr>
+          <a:xfrm xmlns:a="http://schemas.openxmlformats.org/drawingml/2006/main">
+            <a:off x="6572250" y="3238500"/>
+            <a:ext cx="4953000" cy="514350"/>
           </a:xfrm>
           <a:prstGeom xmlns:a="http://schemas.openxmlformats.org/drawingml/2006/main" prst="rect">
             <a:avLst/>
@@ -7258,29 +7486,29 @@
                 <a:ea typeface="Arial"/>
                 <a:cs typeface="Arial"/>
               </a:rPr>
-              <a:t>Durante o trabalho</a:t>
-            </a:r>
-          </a:p>
-        </p:txBody>
-      </p:sp>
-      <p:sp>
-        <p:nvSpPr>
-          <p:cNvPr id="6" name="Interpretar controles e justificar escolhas.">
-            <a:extLst xmlns:a="http://schemas.openxmlformats.org/drawingml/2006/main">
-              <a:ext uri="{FF2B5EF4-FFF2-40B4-BE49-F238E27FC236}">
-                <a16:creationId xmlns:a16="http://schemas.microsoft.com/office/drawing/2014/main" id="{5F41442B-84C4-4646-97C5-BAE109DEC3C0}"/>
-              </a:ext>
-            </a:extLst>
-          </p:cNvPr>
-          <p:cNvSpPr>
-            <a:spLocks xmlns:a="http://schemas.openxmlformats.org/drawingml/2006/main" noGrp="1"/>
-          </p:cNvSpPr>
-          <p:nvPr/>
-        </p:nvSpPr>
-        <p:spPr>
-          <a:xfrm xmlns:a="http://schemas.openxmlformats.org/drawingml/2006/main">
-            <a:off x="3619500" y="3000375"/>
-            <a:ext cx="7620000" cy="857250"/>
+              <a:t>Trabalho a avaliar</a:t>
+            </a:r>
+          </a:p>
+        </p:txBody>
+      </p:sp>
+      <p:sp>
+        <p:nvSpPr>
+          <p:cNvPr id="7" name="Escolha da pergunta&#10;Julgamento das evidências&#10;Decisão d">
+            <a:extLst xmlns:a="http://schemas.openxmlformats.org/drawingml/2006/main">
+              <a:ext uri="{FF2B5EF4-FFF2-40B4-BE49-F238E27FC236}">
+                <a16:creationId xmlns:a16="http://schemas.microsoft.com/office/drawing/2014/main" id="{12384AE2-8655-4EB9-830A-E6EB7D11E57C}"/>
+              </a:ext>
+            </a:extLst>
+          </p:cNvPr>
+          <p:cNvSpPr>
+            <a:spLocks xmlns:a="http://schemas.openxmlformats.org/drawingml/2006/main" noGrp="1"/>
+          </p:cNvSpPr>
+          <p:nvPr/>
+        </p:nvSpPr>
+        <p:spPr>
+          <a:xfrm xmlns:a="http://schemas.openxmlformats.org/drawingml/2006/main">
+            <a:off x="6572250" y="3943350"/>
+            <a:ext cx="4953000" cy="2619375"/>
           </a:xfrm>
           <a:prstGeom xmlns:a="http://schemas.openxmlformats.org/drawingml/2006/main" prst="rect">
             <a:avLst/>
@@ -7315,100 +7543,9 @@
                 <a:ea typeface="Arial"/>
                 <a:cs typeface="Arial"/>
               </a:rPr>
-              <a:t>Interpretar controles e justificar escolhas.</a:t>
-            </a:r>
-          </a:p>
-        </p:txBody>
-      </p:sp>
-      <p:sp>
-        <p:nvSpPr>
-          <p:cNvPr id="7" name="Ao concluir">
-            <a:extLst xmlns:a="http://schemas.openxmlformats.org/drawingml/2006/main">
-              <a:ext uri="{FF2B5EF4-FFF2-40B4-BE49-F238E27FC236}">
-                <a16:creationId xmlns:a16="http://schemas.microsoft.com/office/drawing/2014/main" id="{F405AD88-CAFE-41B0-83FF-0ECF2C7B1B54}"/>
-              </a:ext>
-            </a:extLst>
-          </p:cNvPr>
-          <p:cNvSpPr>
-            <a:spLocks xmlns:a="http://schemas.openxmlformats.org/drawingml/2006/main" noGrp="1"/>
-          </p:cNvSpPr>
-          <p:nvPr/>
-        </p:nvSpPr>
-        <p:spPr>
-          <a:xfrm xmlns:a="http://schemas.openxmlformats.org/drawingml/2006/main">
-            <a:off x="685800" y="4095750"/>
-            <a:ext cx="2524125" cy="762000"/>
-          </a:xfrm>
-          <a:prstGeom xmlns:a="http://schemas.openxmlformats.org/drawingml/2006/main" prst="rect">
-            <a:avLst/>
-          </a:prstGeom>
-          <a:noFill xmlns:a="http://schemas.openxmlformats.org/drawingml/2006/main"/>
-          <a:ln xmlns:a="http://schemas.openxmlformats.org/drawingml/2006/main" w="0">
-            <a:noFill/>
-          </a:ln>
-        </p:spPr>
-        <p:txBody>
-          <a:bodyPr xmlns:a="http://schemas.openxmlformats.org/drawingml/2006/main" lIns="0" tIns="0" rIns="0" bIns="0" anchor="t">
-            <a:noAutofit/>
-          </a:bodyPr>
-          <a:lstStyle xmlns:a="http://schemas.openxmlformats.org/drawingml/2006/main"/>
-          <a:p xmlns:a="http://schemas.openxmlformats.org/drawingml/2006/main">
-            <a:pPr>
-              <a:defRPr sz="2250" b="1">
-                <a:solidFill>
-                  <a:srgbClr val="087F8C"/>
-                </a:solidFill>
-                <a:latin typeface="Arial"/>
-                <a:ea typeface="Arial"/>
-                <a:cs typeface="Arial"/>
-              </a:defRPr>
-            </a:pPr>
-            <a:r>
-              <a:rPr sz="2250" b="1">
-                <a:solidFill>
-                  <a:srgbClr val="087F8C"/>
-                </a:solidFill>
-                <a:latin typeface="Arial"/>
-                <a:ea typeface="Arial"/>
-                <a:cs typeface="Arial"/>
-              </a:rPr>
-              <a:t>Ao concluir</a:t>
-            </a:r>
-          </a:p>
-        </p:txBody>
-      </p:sp>
-      <p:sp>
-        <p:nvSpPr>
-          <p:cNvPr id="8" name="Reconstruir o argumento e responder por seus limites.">
-            <a:extLst xmlns:a="http://schemas.openxmlformats.org/drawingml/2006/main">
-              <a:ext uri="{FF2B5EF4-FFF2-40B4-BE49-F238E27FC236}">
-                <a16:creationId xmlns:a16="http://schemas.microsoft.com/office/drawing/2014/main" id="{00ADC3EC-7636-445F-9226-2C65DAFFB185}"/>
-              </a:ext>
-            </a:extLst>
-          </p:cNvPr>
-          <p:cNvSpPr>
-            <a:spLocks xmlns:a="http://schemas.openxmlformats.org/drawingml/2006/main" noGrp="1"/>
-          </p:cNvSpPr>
-          <p:nvPr/>
-        </p:nvSpPr>
-        <p:spPr>
-          <a:xfrm xmlns:a="http://schemas.openxmlformats.org/drawingml/2006/main">
-            <a:off x="3619500" y="4095750"/>
-            <a:ext cx="7620000" cy="857250"/>
-          </a:xfrm>
-          <a:prstGeom xmlns:a="http://schemas.openxmlformats.org/drawingml/2006/main" prst="rect">
-            <a:avLst/>
-          </a:prstGeom>
-          <a:noFill xmlns:a="http://schemas.openxmlformats.org/drawingml/2006/main"/>
-          <a:ln xmlns:a="http://schemas.openxmlformats.org/drawingml/2006/main" w="0">
-            <a:noFill/>
-          </a:ln>
-        </p:spPr>
-        <p:txBody>
-          <a:bodyPr xmlns:a="http://schemas.openxmlformats.org/drawingml/2006/main" lIns="0" tIns="0" rIns="0" bIns="0" anchor="t">
-            <a:noAutofit/>
-          </a:bodyPr>
-          <a:lstStyle xmlns:a="http://schemas.openxmlformats.org/drawingml/2006/main"/>
+              <a:t>Escolha da pergunta</a:t>
+            </a:r>
+          </a:p>
           <a:p xmlns:a="http://schemas.openxmlformats.org/drawingml/2006/main">
             <a:pPr>
               <a:defRPr sz="2175" b="0">
@@ -7429,7 +7566,30 @@
                 <a:ea typeface="Arial"/>
                 <a:cs typeface="Arial"/>
               </a:rPr>
-              <a:t>Reconstruir o argumento e responder por seus limites.</a:t>
+              <a:t>Julgamento das evidências</a:t>
+            </a:r>
+          </a:p>
+          <a:p xmlns:a="http://schemas.openxmlformats.org/drawingml/2006/main">
+            <a:pPr>
+              <a:defRPr sz="2175" b="0">
+                <a:solidFill>
+                  <a:srgbClr val="253643"/>
+                </a:solidFill>
+                <a:latin typeface="Arial"/>
+                <a:ea typeface="Arial"/>
+                <a:cs typeface="Arial"/>
+              </a:defRPr>
+            </a:pPr>
+            <a:r>
+              <a:rPr sz="2175" b="0">
+                <a:solidFill>
+                  <a:srgbClr val="253643"/>
+                </a:solidFill>
+                <a:latin typeface="Arial"/>
+                <a:ea typeface="Arial"/>
+                <a:cs typeface="Arial"/>
+              </a:rPr>
+              <a:t>Decisão de continuar ou parar</a:t>
             </a:r>
           </a:p>
         </p:txBody>
@@ -7437,7 +7597,7 @@
     </p:spTree>
     <p:extLst>
       <p:ext uri="{BB962C8B-B14F-4D97-AF65-F5344CB8AC3E}">
-        <p14:creationId xmlns:p14="http://schemas.microsoft.com/office/powerpoint/2010/main" val="1286862908"/>
+        <p14:creationId xmlns:p14="http://schemas.microsoft.com/office/powerpoint/2010/main" val="1289644275"/>
       </p:ext>
     </p:extLst>
   </p:cSld>
@@ -7465,10 +7625,10 @@
       </p:grpSpPr>
       <p:sp>
         <p:nvSpPr>
-          <p:cNvPr id="6" name="Relevância e capacidade de revisão">
-            <a:extLst xmlns:a="http://schemas.openxmlformats.org/drawingml/2006/main">
-              <a:ext uri="{FF2B5EF4-FFF2-40B4-BE49-F238E27FC236}">
-                <a16:creationId xmlns:a16="http://schemas.microsoft.com/office/drawing/2014/main" id="{FA427914-9CAE-43C0-8CDA-EBDBCF49A664}"/>
+          <p:cNvPr id="9" name="Formação precisa aparecer no processo">
+            <a:extLst xmlns:a="http://schemas.openxmlformats.org/drawingml/2006/main">
+              <a:ext uri="{FF2B5EF4-FFF2-40B4-BE49-F238E27FC236}">
+                <a16:creationId xmlns:a16="http://schemas.microsoft.com/office/drawing/2014/main" id="{CE069792-5A29-4325-822A-FC8EF2A1A1B2}"/>
               </a:ext>
             </a:extLst>
           </p:cNvPr>
@@ -7515,17 +7675,17 @@
                 <a:ea typeface="Arial"/>
                 <a:cs typeface="Arial"/>
               </a:rPr>
-              <a:t>Relevância e capacidade de revisão</a:t>
-            </a:r>
-          </a:p>
-        </p:txBody>
-      </p:sp>
-      <p:sp>
-        <p:nvSpPr>
-          <p:cNvPr id="2" name="18 / 20">
-            <a:extLst xmlns:a="http://schemas.openxmlformats.org/drawingml/2006/main">
-              <a:ext uri="{FF2B5EF4-FFF2-40B4-BE49-F238E27FC236}">
-                <a16:creationId xmlns:a16="http://schemas.microsoft.com/office/drawing/2014/main" id="{F1F315EB-A171-4336-9A64-14B8A057A3EA}"/>
+              <a:t>Formação precisa aparecer no processo</a:t>
+            </a:r>
+          </a:p>
+        </p:txBody>
+      </p:sp>
+      <p:sp>
+        <p:nvSpPr>
+          <p:cNvPr id="2" name="18 / 21">
+            <a:extLst xmlns:a="http://schemas.openxmlformats.org/drawingml/2006/main">
+              <a:ext uri="{FF2B5EF4-FFF2-40B4-BE49-F238E27FC236}">
+                <a16:creationId xmlns:a16="http://schemas.microsoft.com/office/drawing/2014/main" id="{AAAF0863-2BE3-4EFE-B9F4-405D9E359844}"/>
               </a:ext>
             </a:extLst>
           </p:cNvPr>
@@ -7572,103 +7732,103 @@
                 <a:ea typeface="Arial"/>
                 <a:cs typeface="Arial"/>
               </a:rPr>
-              <a:t>18 / 20</a:t>
-            </a:r>
-          </a:p>
-        </p:txBody>
-      </p:sp>
-      <p:sp>
-        <p:nvSpPr>
-          <p:cNvPr id="3" name="Mais resultados exigem mais capacidade de julgar o que ">
-            <a:extLst xmlns:a="http://schemas.openxmlformats.org/drawingml/2006/main">
-              <a:ext uri="{FF2B5EF4-FFF2-40B4-BE49-F238E27FC236}">
-                <a16:creationId xmlns:a16="http://schemas.microsoft.com/office/drawing/2014/main" id="{EF566908-BBDB-4FBC-9570-58B73CF32A85}"/>
-              </a:ext>
-            </a:extLst>
-          </p:cNvPr>
-          <p:cNvSpPr>
-            <a:spLocks xmlns:a="http://schemas.openxmlformats.org/drawingml/2006/main" noGrp="1"/>
-          </p:cNvSpPr>
-          <p:nvPr/>
-        </p:nvSpPr>
-        <p:spPr>
-          <a:xfrm xmlns:a="http://schemas.openxmlformats.org/drawingml/2006/main">
-            <a:off x="685800" y="1666875"/>
-            <a:ext cx="10763250" cy="1428750"/>
-          </a:xfrm>
-          <a:prstGeom xmlns:a="http://schemas.openxmlformats.org/drawingml/2006/main" prst="rect">
-            <a:avLst/>
-          </a:prstGeom>
-          <a:noFill xmlns:a="http://schemas.openxmlformats.org/drawingml/2006/main"/>
-          <a:ln xmlns:a="http://schemas.openxmlformats.org/drawingml/2006/main" w="0">
-            <a:noFill/>
-          </a:ln>
-        </p:spPr>
-        <p:txBody>
-          <a:bodyPr xmlns:a="http://schemas.openxmlformats.org/drawingml/2006/main" lIns="0" tIns="0" rIns="0" bIns="0" anchor="t">
-            <a:noAutofit/>
-          </a:bodyPr>
-          <a:lstStyle xmlns:a="http://schemas.openxmlformats.org/drawingml/2006/main"/>
-          <a:p xmlns:a="http://schemas.openxmlformats.org/drawingml/2006/main">
-            <a:pPr>
-              <a:defRPr sz="3000" b="1">
-                <a:solidFill>
-                  <a:srgbClr val="17324D"/>
-                </a:solidFill>
-                <a:latin typeface="Arial"/>
-                <a:ea typeface="Arial"/>
-                <a:cs typeface="Arial"/>
-              </a:defRPr>
-            </a:pPr>
-            <a:r>
-              <a:rPr sz="3000" b="1">
-                <a:solidFill>
-                  <a:srgbClr val="17324D"/>
-                </a:solidFill>
-                <a:latin typeface="Arial"/>
-                <a:ea typeface="Arial"/>
-                <a:cs typeface="Arial"/>
-              </a:rPr>
-              <a:t>Mais resultados exigem mais capacidade de julgar o que importa</a:t>
-            </a:r>
-          </a:p>
-        </p:txBody>
-      </p:sp>
-      <p:sp>
-        <p:nvSpPr>
-          <p:cNvPr id="4" name="Uma contribuição pode valer pela pergunta que resolve, ">
-            <a:extLst xmlns:a="http://schemas.openxmlformats.org/drawingml/2006/main">
-              <a:ext uri="{FF2B5EF4-FFF2-40B4-BE49-F238E27FC236}">
-                <a16:creationId xmlns:a16="http://schemas.microsoft.com/office/drawing/2014/main" id="{6BBD39CC-E645-41E3-A835-E4129D0A02FF}"/>
-              </a:ext>
-            </a:extLst>
-          </p:cNvPr>
-          <p:cNvSpPr>
-            <a:spLocks xmlns:a="http://schemas.openxmlformats.org/drawingml/2006/main" noGrp="1"/>
-          </p:cNvSpPr>
-          <p:nvPr/>
-        </p:nvSpPr>
-        <p:spPr>
-          <a:xfrm xmlns:a="http://schemas.openxmlformats.org/drawingml/2006/main">
-            <a:off x="685800" y="3524250"/>
-            <a:ext cx="10287000" cy="1333500"/>
-          </a:xfrm>
-          <a:prstGeom xmlns:a="http://schemas.openxmlformats.org/drawingml/2006/main" prst="rect">
-            <a:avLst/>
-          </a:prstGeom>
-          <a:noFill xmlns:a="http://schemas.openxmlformats.org/drawingml/2006/main"/>
-          <a:ln xmlns:a="http://schemas.openxmlformats.org/drawingml/2006/main" w="0">
-            <a:noFill/>
-          </a:ln>
-        </p:spPr>
-        <p:txBody>
-          <a:bodyPr xmlns:a="http://schemas.openxmlformats.org/drawingml/2006/main" lIns="0" tIns="0" rIns="0" bIns="0" anchor="t">
-            <a:noAutofit/>
-          </a:bodyPr>
-          <a:lstStyle xmlns:a="http://schemas.openxmlformats.org/drawingml/2006/main"/>
-          <a:p xmlns:a="http://schemas.openxmlformats.org/drawingml/2006/main">
-            <a:pPr>
-              <a:defRPr sz="2700" b="0">
+              <a:t>18 / 21</a:t>
+            </a:r>
+          </a:p>
+        </p:txBody>
+      </p:sp>
+      <p:sp>
+        <p:nvSpPr>
+          <p:cNvPr id="3" name="Antes de executar">
+            <a:extLst xmlns:a="http://schemas.openxmlformats.org/drawingml/2006/main">
+              <a:ext uri="{FF2B5EF4-FFF2-40B4-BE49-F238E27FC236}">
+                <a16:creationId xmlns:a16="http://schemas.microsoft.com/office/drawing/2014/main" id="{4A722369-42C4-4D72-80BB-25615562B8EB}"/>
+              </a:ext>
+            </a:extLst>
+          </p:cNvPr>
+          <p:cNvSpPr>
+            <a:spLocks xmlns:a="http://schemas.openxmlformats.org/drawingml/2006/main" noGrp="1"/>
+          </p:cNvSpPr>
+          <p:nvPr/>
+        </p:nvSpPr>
+        <p:spPr>
+          <a:xfrm xmlns:a="http://schemas.openxmlformats.org/drawingml/2006/main">
+            <a:off x="685800" y="1905000"/>
+            <a:ext cx="2524125" cy="762000"/>
+          </a:xfrm>
+          <a:prstGeom xmlns:a="http://schemas.openxmlformats.org/drawingml/2006/main" prst="rect">
+            <a:avLst/>
+          </a:prstGeom>
+          <a:noFill xmlns:a="http://schemas.openxmlformats.org/drawingml/2006/main"/>
+          <a:ln xmlns:a="http://schemas.openxmlformats.org/drawingml/2006/main" w="0">
+            <a:noFill/>
+          </a:ln>
+        </p:spPr>
+        <p:txBody>
+          <a:bodyPr xmlns:a="http://schemas.openxmlformats.org/drawingml/2006/main" lIns="0" tIns="0" rIns="0" bIns="0" anchor="t">
+            <a:noAutofit/>
+          </a:bodyPr>
+          <a:lstStyle xmlns:a="http://schemas.openxmlformats.org/drawingml/2006/main"/>
+          <a:p xmlns:a="http://schemas.openxmlformats.org/drawingml/2006/main">
+            <a:pPr>
+              <a:defRPr sz="2250" b="1">
+                <a:solidFill>
+                  <a:srgbClr val="087F8C"/>
+                </a:solidFill>
+                <a:latin typeface="Arial"/>
+                <a:ea typeface="Arial"/>
+                <a:cs typeface="Arial"/>
+              </a:defRPr>
+            </a:pPr>
+            <a:r>
+              <a:rPr sz="2250" b="1">
+                <a:solidFill>
+                  <a:srgbClr val="087F8C"/>
+                </a:solidFill>
+                <a:latin typeface="Arial"/>
+                <a:ea typeface="Arial"/>
+                <a:cs typeface="Arial"/>
+              </a:rPr>
+              <a:t>Antes de executar</a:t>
+            </a:r>
+          </a:p>
+        </p:txBody>
+      </p:sp>
+      <p:sp>
+        <p:nvSpPr>
+          <p:cNvPr id="4" name="Explicar a hipótese e prever o efeito de uma mudança.">
+            <a:extLst xmlns:a="http://schemas.openxmlformats.org/drawingml/2006/main">
+              <a:ext uri="{FF2B5EF4-FFF2-40B4-BE49-F238E27FC236}">
+                <a16:creationId xmlns:a16="http://schemas.microsoft.com/office/drawing/2014/main" id="{B5BC2A4E-59BF-4260-A18A-FD580A6EBDFE}"/>
+              </a:ext>
+            </a:extLst>
+          </p:cNvPr>
+          <p:cNvSpPr>
+            <a:spLocks xmlns:a="http://schemas.openxmlformats.org/drawingml/2006/main" noGrp="1"/>
+          </p:cNvSpPr>
+          <p:nvPr/>
+        </p:nvSpPr>
+        <p:spPr>
+          <a:xfrm xmlns:a="http://schemas.openxmlformats.org/drawingml/2006/main">
+            <a:off x="3619500" y="1905000"/>
+            <a:ext cx="7620000" cy="857250"/>
+          </a:xfrm>
+          <a:prstGeom xmlns:a="http://schemas.openxmlformats.org/drawingml/2006/main" prst="rect">
+            <a:avLst/>
+          </a:prstGeom>
+          <a:noFill xmlns:a="http://schemas.openxmlformats.org/drawingml/2006/main"/>
+          <a:ln xmlns:a="http://schemas.openxmlformats.org/drawingml/2006/main" w="0">
+            <a:noFill/>
+          </a:ln>
+        </p:spPr>
+        <p:txBody>
+          <a:bodyPr xmlns:a="http://schemas.openxmlformats.org/drawingml/2006/main" lIns="0" tIns="0" rIns="0" bIns="0" anchor="t">
+            <a:noAutofit/>
+          </a:bodyPr>
+          <a:lstStyle xmlns:a="http://schemas.openxmlformats.org/drawingml/2006/main"/>
+          <a:p xmlns:a="http://schemas.openxmlformats.org/drawingml/2006/main">
+            <a:pPr>
+              <a:defRPr sz="2175" b="0">
                 <a:solidFill>
                   <a:srgbClr val="253643"/>
                 </a:solidFill>
@@ -7678,7 +7838,7 @@
               </a:defRPr>
             </a:pPr>
             <a:r>
-              <a:rPr sz="2700" b="0">
+              <a:rPr sz="2175" b="0">
                 <a:solidFill>
                   <a:srgbClr val="253643"/>
                 </a:solidFill>
@@ -7686,64 +7846,235 @@
                 <a:ea typeface="Arial"/>
                 <a:cs typeface="Arial"/>
               </a:rPr>
-              <a:t>Uma contribuição pode valer pela pergunta que resolve, pela incerteza que elimina ou pelo limite que estabelece.</a:t>
-            </a:r>
-          </a:p>
-        </p:txBody>
-      </p:sp>
-      <p:sp>
-        <p:nvSpPr>
-          <p:cNvPr id="5" name="Contagem de artigos e volume de código não substituem e">
-            <a:extLst xmlns:a="http://schemas.openxmlformats.org/drawingml/2006/main">
-              <a:ext uri="{FF2B5EF4-FFF2-40B4-BE49-F238E27FC236}">
-                <a16:creationId xmlns:a16="http://schemas.microsoft.com/office/drawing/2014/main" id="{1B1C01AE-EDE4-43CA-85F0-BA2F61B8EAE4}"/>
-              </a:ext>
-            </a:extLst>
-          </p:cNvPr>
-          <p:cNvSpPr>
-            <a:spLocks xmlns:a="http://schemas.openxmlformats.org/drawingml/2006/main" noGrp="1"/>
-          </p:cNvSpPr>
-          <p:nvPr/>
-        </p:nvSpPr>
-        <p:spPr>
-          <a:xfrm xmlns:a="http://schemas.openxmlformats.org/drawingml/2006/main">
-            <a:off x="685800" y="5524500"/>
-            <a:ext cx="10572750" cy="476250"/>
-          </a:xfrm>
-          <a:prstGeom xmlns:a="http://schemas.openxmlformats.org/drawingml/2006/main" prst="rect">
-            <a:avLst/>
-          </a:prstGeom>
-          <a:noFill xmlns:a="http://schemas.openxmlformats.org/drawingml/2006/main"/>
-          <a:ln xmlns:a="http://schemas.openxmlformats.org/drawingml/2006/main" w="0">
-            <a:noFill/>
-          </a:ln>
-        </p:spPr>
-        <p:txBody>
-          <a:bodyPr xmlns:a="http://schemas.openxmlformats.org/drawingml/2006/main" lIns="0" tIns="0" rIns="0" bIns="0" anchor="t">
-            <a:noAutofit/>
-          </a:bodyPr>
-          <a:lstStyle xmlns:a="http://schemas.openxmlformats.org/drawingml/2006/main"/>
-          <a:p xmlns:a="http://schemas.openxmlformats.org/drawingml/2006/main">
-            <a:pPr>
-              <a:defRPr sz="2025" b="0">
-                <a:solidFill>
-                  <a:srgbClr val="B35B32"/>
-                </a:solidFill>
-                <a:latin typeface="Arial"/>
-                <a:ea typeface="Arial"/>
-                <a:cs typeface="Arial"/>
-              </a:defRPr>
-            </a:pPr>
-            <a:r>
-              <a:rPr sz="2025" b="0">
-                <a:solidFill>
-                  <a:srgbClr val="B35B32"/>
-                </a:solidFill>
-                <a:latin typeface="Arial"/>
-                <a:ea typeface="Arial"/>
-                <a:cs typeface="Arial"/>
-              </a:rPr>
-              <a:t>Contagem de artigos e volume de código não substituem essa avaliação.</a:t>
+              <a:t>Explicar a hipótese e prever o efeito de uma mudança.</a:t>
+            </a:r>
+          </a:p>
+        </p:txBody>
+      </p:sp>
+      <p:sp>
+        <p:nvSpPr>
+          <p:cNvPr id="5" name="Durante o trabalho">
+            <a:extLst xmlns:a="http://schemas.openxmlformats.org/drawingml/2006/main">
+              <a:ext uri="{FF2B5EF4-FFF2-40B4-BE49-F238E27FC236}">
+                <a16:creationId xmlns:a16="http://schemas.microsoft.com/office/drawing/2014/main" id="{D1082FDE-3F05-4A72-B82F-237728E1C850}"/>
+              </a:ext>
+            </a:extLst>
+          </p:cNvPr>
+          <p:cNvSpPr>
+            <a:spLocks xmlns:a="http://schemas.openxmlformats.org/drawingml/2006/main" noGrp="1"/>
+          </p:cNvSpPr>
+          <p:nvPr/>
+        </p:nvSpPr>
+        <p:spPr>
+          <a:xfrm xmlns:a="http://schemas.openxmlformats.org/drawingml/2006/main">
+            <a:off x="685800" y="3000375"/>
+            <a:ext cx="2524125" cy="762000"/>
+          </a:xfrm>
+          <a:prstGeom xmlns:a="http://schemas.openxmlformats.org/drawingml/2006/main" prst="rect">
+            <a:avLst/>
+          </a:prstGeom>
+          <a:noFill xmlns:a="http://schemas.openxmlformats.org/drawingml/2006/main"/>
+          <a:ln xmlns:a="http://schemas.openxmlformats.org/drawingml/2006/main" w="0">
+            <a:noFill/>
+          </a:ln>
+        </p:spPr>
+        <p:txBody>
+          <a:bodyPr xmlns:a="http://schemas.openxmlformats.org/drawingml/2006/main" lIns="0" tIns="0" rIns="0" bIns="0" anchor="t">
+            <a:noAutofit/>
+          </a:bodyPr>
+          <a:lstStyle xmlns:a="http://schemas.openxmlformats.org/drawingml/2006/main"/>
+          <a:p xmlns:a="http://schemas.openxmlformats.org/drawingml/2006/main">
+            <a:pPr>
+              <a:defRPr sz="2250" b="1">
+                <a:solidFill>
+                  <a:srgbClr val="087F8C"/>
+                </a:solidFill>
+                <a:latin typeface="Arial"/>
+                <a:ea typeface="Arial"/>
+                <a:cs typeface="Arial"/>
+              </a:defRPr>
+            </a:pPr>
+            <a:r>
+              <a:rPr sz="2250" b="1">
+                <a:solidFill>
+                  <a:srgbClr val="087F8C"/>
+                </a:solidFill>
+                <a:latin typeface="Arial"/>
+                <a:ea typeface="Arial"/>
+                <a:cs typeface="Arial"/>
+              </a:rPr>
+              <a:t>Durante o trabalho</a:t>
+            </a:r>
+          </a:p>
+        </p:txBody>
+      </p:sp>
+      <p:sp>
+        <p:nvSpPr>
+          <p:cNvPr id="6" name="Interpretar controles e justificar escolhas.">
+            <a:extLst xmlns:a="http://schemas.openxmlformats.org/drawingml/2006/main">
+              <a:ext uri="{FF2B5EF4-FFF2-40B4-BE49-F238E27FC236}">
+                <a16:creationId xmlns:a16="http://schemas.microsoft.com/office/drawing/2014/main" id="{8E271438-EB1A-4B1F-9D36-C1281A4FD342}"/>
+              </a:ext>
+            </a:extLst>
+          </p:cNvPr>
+          <p:cNvSpPr>
+            <a:spLocks xmlns:a="http://schemas.openxmlformats.org/drawingml/2006/main" noGrp="1"/>
+          </p:cNvSpPr>
+          <p:nvPr/>
+        </p:nvSpPr>
+        <p:spPr>
+          <a:xfrm xmlns:a="http://schemas.openxmlformats.org/drawingml/2006/main">
+            <a:off x="3619500" y="3000375"/>
+            <a:ext cx="7620000" cy="857250"/>
+          </a:xfrm>
+          <a:prstGeom xmlns:a="http://schemas.openxmlformats.org/drawingml/2006/main" prst="rect">
+            <a:avLst/>
+          </a:prstGeom>
+          <a:noFill xmlns:a="http://schemas.openxmlformats.org/drawingml/2006/main"/>
+          <a:ln xmlns:a="http://schemas.openxmlformats.org/drawingml/2006/main" w="0">
+            <a:noFill/>
+          </a:ln>
+        </p:spPr>
+        <p:txBody>
+          <a:bodyPr xmlns:a="http://schemas.openxmlformats.org/drawingml/2006/main" lIns="0" tIns="0" rIns="0" bIns="0" anchor="t">
+            <a:noAutofit/>
+          </a:bodyPr>
+          <a:lstStyle xmlns:a="http://schemas.openxmlformats.org/drawingml/2006/main"/>
+          <a:p xmlns:a="http://schemas.openxmlformats.org/drawingml/2006/main">
+            <a:pPr>
+              <a:defRPr sz="2175" b="0">
+                <a:solidFill>
+                  <a:srgbClr val="253643"/>
+                </a:solidFill>
+                <a:latin typeface="Arial"/>
+                <a:ea typeface="Arial"/>
+                <a:cs typeface="Arial"/>
+              </a:defRPr>
+            </a:pPr>
+            <a:r>
+              <a:rPr sz="2175" b="0">
+                <a:solidFill>
+                  <a:srgbClr val="253643"/>
+                </a:solidFill>
+                <a:latin typeface="Arial"/>
+                <a:ea typeface="Arial"/>
+                <a:cs typeface="Arial"/>
+              </a:rPr>
+              <a:t>Interpretar controles e justificar escolhas.</a:t>
+            </a:r>
+          </a:p>
+        </p:txBody>
+      </p:sp>
+      <p:sp>
+        <p:nvSpPr>
+          <p:cNvPr id="7" name="Ao concluir">
+            <a:extLst xmlns:a="http://schemas.openxmlformats.org/drawingml/2006/main">
+              <a:ext uri="{FF2B5EF4-FFF2-40B4-BE49-F238E27FC236}">
+                <a16:creationId xmlns:a16="http://schemas.microsoft.com/office/drawing/2014/main" id="{020A4B0F-02A1-4355-B6D9-E1E31D395BE0}"/>
+              </a:ext>
+            </a:extLst>
+          </p:cNvPr>
+          <p:cNvSpPr>
+            <a:spLocks xmlns:a="http://schemas.openxmlformats.org/drawingml/2006/main" noGrp="1"/>
+          </p:cNvSpPr>
+          <p:nvPr/>
+        </p:nvSpPr>
+        <p:spPr>
+          <a:xfrm xmlns:a="http://schemas.openxmlformats.org/drawingml/2006/main">
+            <a:off x="685800" y="4095750"/>
+            <a:ext cx="2524125" cy="762000"/>
+          </a:xfrm>
+          <a:prstGeom xmlns:a="http://schemas.openxmlformats.org/drawingml/2006/main" prst="rect">
+            <a:avLst/>
+          </a:prstGeom>
+          <a:noFill xmlns:a="http://schemas.openxmlformats.org/drawingml/2006/main"/>
+          <a:ln xmlns:a="http://schemas.openxmlformats.org/drawingml/2006/main" w="0">
+            <a:noFill/>
+          </a:ln>
+        </p:spPr>
+        <p:txBody>
+          <a:bodyPr xmlns:a="http://schemas.openxmlformats.org/drawingml/2006/main" lIns="0" tIns="0" rIns="0" bIns="0" anchor="t">
+            <a:noAutofit/>
+          </a:bodyPr>
+          <a:lstStyle xmlns:a="http://schemas.openxmlformats.org/drawingml/2006/main"/>
+          <a:p xmlns:a="http://schemas.openxmlformats.org/drawingml/2006/main">
+            <a:pPr>
+              <a:defRPr sz="2250" b="1">
+                <a:solidFill>
+                  <a:srgbClr val="087F8C"/>
+                </a:solidFill>
+                <a:latin typeface="Arial"/>
+                <a:ea typeface="Arial"/>
+                <a:cs typeface="Arial"/>
+              </a:defRPr>
+            </a:pPr>
+            <a:r>
+              <a:rPr sz="2250" b="1">
+                <a:solidFill>
+                  <a:srgbClr val="087F8C"/>
+                </a:solidFill>
+                <a:latin typeface="Arial"/>
+                <a:ea typeface="Arial"/>
+                <a:cs typeface="Arial"/>
+              </a:rPr>
+              <a:t>Ao concluir</a:t>
+            </a:r>
+          </a:p>
+        </p:txBody>
+      </p:sp>
+      <p:sp>
+        <p:nvSpPr>
+          <p:cNvPr id="8" name="Reconstruir o argumento e responder por seus limites.">
+            <a:extLst xmlns:a="http://schemas.openxmlformats.org/drawingml/2006/main">
+              <a:ext uri="{FF2B5EF4-FFF2-40B4-BE49-F238E27FC236}">
+                <a16:creationId xmlns:a16="http://schemas.microsoft.com/office/drawing/2014/main" id="{1768FA6E-B6DC-4B6C-A0C1-30DFEC2A81C6}"/>
+              </a:ext>
+            </a:extLst>
+          </p:cNvPr>
+          <p:cNvSpPr>
+            <a:spLocks xmlns:a="http://schemas.openxmlformats.org/drawingml/2006/main" noGrp="1"/>
+          </p:cNvSpPr>
+          <p:nvPr/>
+        </p:nvSpPr>
+        <p:spPr>
+          <a:xfrm xmlns:a="http://schemas.openxmlformats.org/drawingml/2006/main">
+            <a:off x="3619500" y="4095750"/>
+            <a:ext cx="7620000" cy="857250"/>
+          </a:xfrm>
+          <a:prstGeom xmlns:a="http://schemas.openxmlformats.org/drawingml/2006/main" prst="rect">
+            <a:avLst/>
+          </a:prstGeom>
+          <a:noFill xmlns:a="http://schemas.openxmlformats.org/drawingml/2006/main"/>
+          <a:ln xmlns:a="http://schemas.openxmlformats.org/drawingml/2006/main" w="0">
+            <a:noFill/>
+          </a:ln>
+        </p:spPr>
+        <p:txBody>
+          <a:bodyPr xmlns:a="http://schemas.openxmlformats.org/drawingml/2006/main" lIns="0" tIns="0" rIns="0" bIns="0" anchor="t">
+            <a:noAutofit/>
+          </a:bodyPr>
+          <a:lstStyle xmlns:a="http://schemas.openxmlformats.org/drawingml/2006/main"/>
+          <a:p xmlns:a="http://schemas.openxmlformats.org/drawingml/2006/main">
+            <a:pPr>
+              <a:defRPr sz="2175" b="0">
+                <a:solidFill>
+                  <a:srgbClr val="253643"/>
+                </a:solidFill>
+                <a:latin typeface="Arial"/>
+                <a:ea typeface="Arial"/>
+                <a:cs typeface="Arial"/>
+              </a:defRPr>
+            </a:pPr>
+            <a:r>
+              <a:rPr sz="2175" b="0">
+                <a:solidFill>
+                  <a:srgbClr val="253643"/>
+                </a:solidFill>
+                <a:latin typeface="Arial"/>
+                <a:ea typeface="Arial"/>
+                <a:cs typeface="Arial"/>
+              </a:rPr>
+              <a:t>Reconstruir o argumento e responder por seus limites.</a:t>
             </a:r>
           </a:p>
         </p:txBody>
@@ -7751,7 +8082,7 @@
     </p:spTree>
     <p:extLst>
       <p:ext uri="{BB962C8B-B14F-4D97-AF65-F5344CB8AC3E}">
-        <p14:creationId xmlns:p14="http://schemas.microsoft.com/office/powerpoint/2010/main" val="1258550477"/>
+        <p14:creationId xmlns:p14="http://schemas.microsoft.com/office/powerpoint/2010/main" val="520568925"/>
       </p:ext>
     </p:extLst>
   </p:cSld>
@@ -7779,10 +8110,10 @@
       </p:grpSpPr>
       <p:sp>
         <p:nvSpPr>
-          <p:cNvPr id="9" name="Próximas avaliações do experimento">
-            <a:extLst xmlns:a="http://schemas.openxmlformats.org/drawingml/2006/main">
-              <a:ext uri="{FF2B5EF4-FFF2-40B4-BE49-F238E27FC236}">
-                <a16:creationId xmlns:a16="http://schemas.microsoft.com/office/drawing/2014/main" id="{86816EA6-FB78-44AA-ACCE-BDAA5F840152}"/>
+          <p:cNvPr id="6" name="Relevância e capacidade de revisão">
+            <a:extLst xmlns:a="http://schemas.openxmlformats.org/drawingml/2006/main">
+              <a:ext uri="{FF2B5EF4-FFF2-40B4-BE49-F238E27FC236}">
+                <a16:creationId xmlns:a16="http://schemas.microsoft.com/office/drawing/2014/main" id="{E01FDCEA-F9D3-4988-B303-F36242CFDEAE}"/>
               </a:ext>
             </a:extLst>
           </p:cNvPr>
@@ -7829,17 +8160,17 @@
                 <a:ea typeface="Arial"/>
                 <a:cs typeface="Arial"/>
               </a:rPr>
-              <a:t>Próximas avaliações do experimento</a:t>
-            </a:r>
-          </a:p>
-        </p:txBody>
-      </p:sp>
-      <p:sp>
-        <p:nvSpPr>
-          <p:cNvPr id="2" name="19 / 20">
-            <a:extLst xmlns:a="http://schemas.openxmlformats.org/drawingml/2006/main">
-              <a:ext uri="{FF2B5EF4-FFF2-40B4-BE49-F238E27FC236}">
-                <a16:creationId xmlns:a16="http://schemas.microsoft.com/office/drawing/2014/main" id="{A31BF8F9-6835-4382-A972-4860D5B19FB9}"/>
+              <a:t>Relevância e capacidade de revisão</a:t>
+            </a:r>
+          </a:p>
+        </p:txBody>
+      </p:sp>
+      <p:sp>
+        <p:nvSpPr>
+          <p:cNvPr id="2" name="19 / 21">
+            <a:extLst xmlns:a="http://schemas.openxmlformats.org/drawingml/2006/main">
+              <a:ext uri="{FF2B5EF4-FFF2-40B4-BE49-F238E27FC236}">
+                <a16:creationId xmlns:a16="http://schemas.microsoft.com/office/drawing/2014/main" id="{698D4641-2973-41CA-A95D-2CDD2544BBA2}"/>
               </a:ext>
             </a:extLst>
           </p:cNvPr>
@@ -7886,103 +8217,103 @@
                 <a:ea typeface="Arial"/>
                 <a:cs typeface="Arial"/>
               </a:rPr>
-              <a:t>19 / 20</a:t>
-            </a:r>
-          </a:p>
-        </p:txBody>
-      </p:sp>
-      <p:sp>
-        <p:nvSpPr>
-          <p:cNvPr id="3" name="Qualidade científica">
-            <a:extLst xmlns:a="http://schemas.openxmlformats.org/drawingml/2006/main">
-              <a:ext uri="{FF2B5EF4-FFF2-40B4-BE49-F238E27FC236}">
-                <a16:creationId xmlns:a16="http://schemas.microsoft.com/office/drawing/2014/main" id="{9C0D6127-174B-4D50-9C37-42465D255E00}"/>
-              </a:ext>
-            </a:extLst>
-          </p:cNvPr>
-          <p:cNvSpPr>
-            <a:spLocks xmlns:a="http://schemas.openxmlformats.org/drawingml/2006/main" noGrp="1"/>
-          </p:cNvSpPr>
-          <p:nvPr/>
-        </p:nvSpPr>
-        <p:spPr>
-          <a:xfrm xmlns:a="http://schemas.openxmlformats.org/drawingml/2006/main">
-            <a:off x="685800" y="1905000"/>
-            <a:ext cx="2524125" cy="762000"/>
-          </a:xfrm>
-          <a:prstGeom xmlns:a="http://schemas.openxmlformats.org/drawingml/2006/main" prst="rect">
-            <a:avLst/>
-          </a:prstGeom>
-          <a:noFill xmlns:a="http://schemas.openxmlformats.org/drawingml/2006/main"/>
-          <a:ln xmlns:a="http://schemas.openxmlformats.org/drawingml/2006/main" w="0">
-            <a:noFill/>
-          </a:ln>
-        </p:spPr>
-        <p:txBody>
-          <a:bodyPr xmlns:a="http://schemas.openxmlformats.org/drawingml/2006/main" lIns="0" tIns="0" rIns="0" bIns="0" anchor="t">
-            <a:noAutofit/>
-          </a:bodyPr>
-          <a:lstStyle xmlns:a="http://schemas.openxmlformats.org/drawingml/2006/main"/>
-          <a:p xmlns:a="http://schemas.openxmlformats.org/drawingml/2006/main">
-            <a:pPr>
-              <a:defRPr sz="2250" b="1">
-                <a:solidFill>
-                  <a:srgbClr val="087F8C"/>
-                </a:solidFill>
-                <a:latin typeface="Arial"/>
-                <a:ea typeface="Arial"/>
-                <a:cs typeface="Arial"/>
-              </a:defRPr>
-            </a:pPr>
-            <a:r>
-              <a:rPr sz="2250" b="1">
-                <a:solidFill>
-                  <a:srgbClr val="087F8C"/>
-                </a:solidFill>
-                <a:latin typeface="Arial"/>
-                <a:ea typeface="Arial"/>
-                <a:cs typeface="Arial"/>
-              </a:rPr>
-              <a:t>Qualidade científica</a:t>
-            </a:r>
-          </a:p>
-        </p:txBody>
-      </p:sp>
-      <p:sp>
-        <p:nvSpPr>
-          <p:cNvPr id="4" name="Especialistas examinam as conclusões centrais.">
-            <a:extLst xmlns:a="http://schemas.openxmlformats.org/drawingml/2006/main">
-              <a:ext uri="{FF2B5EF4-FFF2-40B4-BE49-F238E27FC236}">
-                <a16:creationId xmlns:a16="http://schemas.microsoft.com/office/drawing/2014/main" id="{5AB216B1-325C-4BFC-9696-76FE666D9DE3}"/>
-              </a:ext>
-            </a:extLst>
-          </p:cNvPr>
-          <p:cNvSpPr>
-            <a:spLocks xmlns:a="http://schemas.openxmlformats.org/drawingml/2006/main" noGrp="1"/>
-          </p:cNvSpPr>
-          <p:nvPr/>
-        </p:nvSpPr>
-        <p:spPr>
-          <a:xfrm xmlns:a="http://schemas.openxmlformats.org/drawingml/2006/main">
-            <a:off x="3619500" y="1905000"/>
-            <a:ext cx="7620000" cy="857250"/>
-          </a:xfrm>
-          <a:prstGeom xmlns:a="http://schemas.openxmlformats.org/drawingml/2006/main" prst="rect">
-            <a:avLst/>
-          </a:prstGeom>
-          <a:noFill xmlns:a="http://schemas.openxmlformats.org/drawingml/2006/main"/>
-          <a:ln xmlns:a="http://schemas.openxmlformats.org/drawingml/2006/main" w="0">
-            <a:noFill/>
-          </a:ln>
-        </p:spPr>
-        <p:txBody>
-          <a:bodyPr xmlns:a="http://schemas.openxmlformats.org/drawingml/2006/main" lIns="0" tIns="0" rIns="0" bIns="0" anchor="t">
-            <a:noAutofit/>
-          </a:bodyPr>
-          <a:lstStyle xmlns:a="http://schemas.openxmlformats.org/drawingml/2006/main"/>
-          <a:p xmlns:a="http://schemas.openxmlformats.org/drawingml/2006/main">
-            <a:pPr>
-              <a:defRPr sz="2175" b="0">
+              <a:t>19 / 21</a:t>
+            </a:r>
+          </a:p>
+        </p:txBody>
+      </p:sp>
+      <p:sp>
+        <p:nvSpPr>
+          <p:cNvPr id="3" name="Mais resultados exigem mais capacidade de julgar o que ">
+            <a:extLst xmlns:a="http://schemas.openxmlformats.org/drawingml/2006/main">
+              <a:ext uri="{FF2B5EF4-FFF2-40B4-BE49-F238E27FC236}">
+                <a16:creationId xmlns:a16="http://schemas.microsoft.com/office/drawing/2014/main" id="{BC1CD857-9E00-4BB9-97EA-B7E1CF2D67D7}"/>
+              </a:ext>
+            </a:extLst>
+          </p:cNvPr>
+          <p:cNvSpPr>
+            <a:spLocks xmlns:a="http://schemas.openxmlformats.org/drawingml/2006/main" noGrp="1"/>
+          </p:cNvSpPr>
+          <p:nvPr/>
+        </p:nvSpPr>
+        <p:spPr>
+          <a:xfrm xmlns:a="http://schemas.openxmlformats.org/drawingml/2006/main">
+            <a:off x="685800" y="1666875"/>
+            <a:ext cx="10763250" cy="1428750"/>
+          </a:xfrm>
+          <a:prstGeom xmlns:a="http://schemas.openxmlformats.org/drawingml/2006/main" prst="rect">
+            <a:avLst/>
+          </a:prstGeom>
+          <a:noFill xmlns:a="http://schemas.openxmlformats.org/drawingml/2006/main"/>
+          <a:ln xmlns:a="http://schemas.openxmlformats.org/drawingml/2006/main" w="0">
+            <a:noFill/>
+          </a:ln>
+        </p:spPr>
+        <p:txBody>
+          <a:bodyPr xmlns:a="http://schemas.openxmlformats.org/drawingml/2006/main" lIns="0" tIns="0" rIns="0" bIns="0" anchor="t">
+            <a:noAutofit/>
+          </a:bodyPr>
+          <a:lstStyle xmlns:a="http://schemas.openxmlformats.org/drawingml/2006/main"/>
+          <a:p xmlns:a="http://schemas.openxmlformats.org/drawingml/2006/main">
+            <a:pPr>
+              <a:defRPr sz="3000" b="1">
+                <a:solidFill>
+                  <a:srgbClr val="17324D"/>
+                </a:solidFill>
+                <a:latin typeface="Arial"/>
+                <a:ea typeface="Arial"/>
+                <a:cs typeface="Arial"/>
+              </a:defRPr>
+            </a:pPr>
+            <a:r>
+              <a:rPr sz="3000" b="1">
+                <a:solidFill>
+                  <a:srgbClr val="17324D"/>
+                </a:solidFill>
+                <a:latin typeface="Arial"/>
+                <a:ea typeface="Arial"/>
+                <a:cs typeface="Arial"/>
+              </a:rPr>
+              <a:t>Mais resultados exigem mais capacidade de julgar o que importa</a:t>
+            </a:r>
+          </a:p>
+        </p:txBody>
+      </p:sp>
+      <p:sp>
+        <p:nvSpPr>
+          <p:cNvPr id="4" name="Uma contribuição pode valer pela pergunta que resolve, ">
+            <a:extLst xmlns:a="http://schemas.openxmlformats.org/drawingml/2006/main">
+              <a:ext uri="{FF2B5EF4-FFF2-40B4-BE49-F238E27FC236}">
+                <a16:creationId xmlns:a16="http://schemas.microsoft.com/office/drawing/2014/main" id="{E07E5709-0467-4E0F-91D2-C4B90C3A8129}"/>
+              </a:ext>
+            </a:extLst>
+          </p:cNvPr>
+          <p:cNvSpPr>
+            <a:spLocks xmlns:a="http://schemas.openxmlformats.org/drawingml/2006/main" noGrp="1"/>
+          </p:cNvSpPr>
+          <p:nvPr/>
+        </p:nvSpPr>
+        <p:spPr>
+          <a:xfrm xmlns:a="http://schemas.openxmlformats.org/drawingml/2006/main">
+            <a:off x="685800" y="3524250"/>
+            <a:ext cx="10287000" cy="1333500"/>
+          </a:xfrm>
+          <a:prstGeom xmlns:a="http://schemas.openxmlformats.org/drawingml/2006/main" prst="rect">
+            <a:avLst/>
+          </a:prstGeom>
+          <a:noFill xmlns:a="http://schemas.openxmlformats.org/drawingml/2006/main"/>
+          <a:ln xmlns:a="http://schemas.openxmlformats.org/drawingml/2006/main" w="0">
+            <a:noFill/>
+          </a:ln>
+        </p:spPr>
+        <p:txBody>
+          <a:bodyPr xmlns:a="http://schemas.openxmlformats.org/drawingml/2006/main" lIns="0" tIns="0" rIns="0" bIns="0" anchor="t">
+            <a:noAutofit/>
+          </a:bodyPr>
+          <a:lstStyle xmlns:a="http://schemas.openxmlformats.org/drawingml/2006/main"/>
+          <a:p xmlns:a="http://schemas.openxmlformats.org/drawingml/2006/main">
+            <a:pPr>
+              <a:defRPr sz="2700" b="0">
                 <a:solidFill>
                   <a:srgbClr val="253643"/>
                 </a:solidFill>
@@ -7992,7 +8323,7 @@
               </a:defRPr>
             </a:pPr>
             <a:r>
-              <a:rPr sz="2175" b="0">
+              <a:rPr sz="2700" b="0">
                 <a:solidFill>
                   <a:srgbClr val="253643"/>
                 </a:solidFill>
@@ -8000,235 +8331,64 @@
                 <a:ea typeface="Arial"/>
                 <a:cs typeface="Arial"/>
               </a:rPr>
-              <a:t>Especialistas examinam as conclusões centrais.</a:t>
-            </a:r>
-          </a:p>
-        </p:txBody>
-      </p:sp>
-      <p:sp>
-        <p:nvSpPr>
-          <p:cNvPr id="5" name="Efeito da revisão">
-            <a:extLst xmlns:a="http://schemas.openxmlformats.org/drawingml/2006/main">
-              <a:ext uri="{FF2B5EF4-FFF2-40B4-BE49-F238E27FC236}">
-                <a16:creationId xmlns:a16="http://schemas.microsoft.com/office/drawing/2014/main" id="{0349FE1C-C3FF-413A-A3DE-B8292563D479}"/>
-              </a:ext>
-            </a:extLst>
-          </p:cNvPr>
-          <p:cNvSpPr>
-            <a:spLocks xmlns:a="http://schemas.openxmlformats.org/drawingml/2006/main" noGrp="1"/>
-          </p:cNvSpPr>
-          <p:nvPr/>
-        </p:nvSpPr>
-        <p:spPr>
-          <a:xfrm xmlns:a="http://schemas.openxmlformats.org/drawingml/2006/main">
-            <a:off x="685800" y="3000375"/>
-            <a:ext cx="2524125" cy="762000"/>
-          </a:xfrm>
-          <a:prstGeom xmlns:a="http://schemas.openxmlformats.org/drawingml/2006/main" prst="rect">
-            <a:avLst/>
-          </a:prstGeom>
-          <a:noFill xmlns:a="http://schemas.openxmlformats.org/drawingml/2006/main"/>
-          <a:ln xmlns:a="http://schemas.openxmlformats.org/drawingml/2006/main" w="0">
-            <a:noFill/>
-          </a:ln>
-        </p:spPr>
-        <p:txBody>
-          <a:bodyPr xmlns:a="http://schemas.openxmlformats.org/drawingml/2006/main" lIns="0" tIns="0" rIns="0" bIns="0" anchor="t">
-            <a:noAutofit/>
-          </a:bodyPr>
-          <a:lstStyle xmlns:a="http://schemas.openxmlformats.org/drawingml/2006/main"/>
-          <a:p xmlns:a="http://schemas.openxmlformats.org/drawingml/2006/main">
-            <a:pPr>
-              <a:defRPr sz="2250" b="1">
-                <a:solidFill>
-                  <a:srgbClr val="087F8C"/>
-                </a:solidFill>
-                <a:latin typeface="Arial"/>
-                <a:ea typeface="Arial"/>
-                <a:cs typeface="Arial"/>
-              </a:defRPr>
-            </a:pPr>
-            <a:r>
-              <a:rPr sz="2250" b="1">
-                <a:solidFill>
-                  <a:srgbClr val="087F8C"/>
-                </a:solidFill>
-                <a:latin typeface="Arial"/>
-                <a:ea typeface="Arial"/>
-                <a:cs typeface="Arial"/>
-              </a:rPr>
-              <a:t>Efeito da revisão</a:t>
-            </a:r>
-          </a:p>
-        </p:txBody>
-      </p:sp>
-      <p:sp>
-        <p:nvSpPr>
-          <p:cNvPr id="6" name="Comparação cega entre versões do manuscrito.">
-            <a:extLst xmlns:a="http://schemas.openxmlformats.org/drawingml/2006/main">
-              <a:ext uri="{FF2B5EF4-FFF2-40B4-BE49-F238E27FC236}">
-                <a16:creationId xmlns:a16="http://schemas.microsoft.com/office/drawing/2014/main" id="{F28A9916-D69D-43C1-B461-6163E5E637AC}"/>
-              </a:ext>
-            </a:extLst>
-          </p:cNvPr>
-          <p:cNvSpPr>
-            <a:spLocks xmlns:a="http://schemas.openxmlformats.org/drawingml/2006/main" noGrp="1"/>
-          </p:cNvSpPr>
-          <p:nvPr/>
-        </p:nvSpPr>
-        <p:spPr>
-          <a:xfrm xmlns:a="http://schemas.openxmlformats.org/drawingml/2006/main">
-            <a:off x="3619500" y="3000375"/>
-            <a:ext cx="7620000" cy="857250"/>
-          </a:xfrm>
-          <a:prstGeom xmlns:a="http://schemas.openxmlformats.org/drawingml/2006/main" prst="rect">
-            <a:avLst/>
-          </a:prstGeom>
-          <a:noFill xmlns:a="http://schemas.openxmlformats.org/drawingml/2006/main"/>
-          <a:ln xmlns:a="http://schemas.openxmlformats.org/drawingml/2006/main" w="0">
-            <a:noFill/>
-          </a:ln>
-        </p:spPr>
-        <p:txBody>
-          <a:bodyPr xmlns:a="http://schemas.openxmlformats.org/drawingml/2006/main" lIns="0" tIns="0" rIns="0" bIns="0" anchor="t">
-            <a:noAutofit/>
-          </a:bodyPr>
-          <a:lstStyle xmlns:a="http://schemas.openxmlformats.org/drawingml/2006/main"/>
-          <a:p xmlns:a="http://schemas.openxmlformats.org/drawingml/2006/main">
-            <a:pPr>
-              <a:defRPr sz="2175" b="0">
-                <a:solidFill>
-                  <a:srgbClr val="253643"/>
-                </a:solidFill>
-                <a:latin typeface="Arial"/>
-                <a:ea typeface="Arial"/>
-                <a:cs typeface="Arial"/>
-              </a:defRPr>
-            </a:pPr>
-            <a:r>
-              <a:rPr sz="2175" b="0">
-                <a:solidFill>
-                  <a:srgbClr val="253643"/>
-                </a:solidFill>
-                <a:latin typeface="Arial"/>
-                <a:ea typeface="Arial"/>
-                <a:cs typeface="Arial"/>
-              </a:rPr>
-              <a:t>Comparação cega entre versões do manuscrito.</a:t>
-            </a:r>
-          </a:p>
-        </p:txBody>
-      </p:sp>
-      <p:sp>
-        <p:nvSpPr>
-          <p:cNvPr id="7" name="Formação e custo">
-            <a:extLst xmlns:a="http://schemas.openxmlformats.org/drawingml/2006/main">
-              <a:ext uri="{FF2B5EF4-FFF2-40B4-BE49-F238E27FC236}">
-                <a16:creationId xmlns:a16="http://schemas.microsoft.com/office/drawing/2014/main" id="{DCA88CA1-4E26-4D44-86F6-DF53CBA52249}"/>
-              </a:ext>
-            </a:extLst>
-          </p:cNvPr>
-          <p:cNvSpPr>
-            <a:spLocks xmlns:a="http://schemas.openxmlformats.org/drawingml/2006/main" noGrp="1"/>
-          </p:cNvSpPr>
-          <p:nvPr/>
-        </p:nvSpPr>
-        <p:spPr>
-          <a:xfrm xmlns:a="http://schemas.openxmlformats.org/drawingml/2006/main">
-            <a:off x="685800" y="4095750"/>
-            <a:ext cx="2524125" cy="762000"/>
-          </a:xfrm>
-          <a:prstGeom xmlns:a="http://schemas.openxmlformats.org/drawingml/2006/main" prst="rect">
-            <a:avLst/>
-          </a:prstGeom>
-          <a:noFill xmlns:a="http://schemas.openxmlformats.org/drawingml/2006/main"/>
-          <a:ln xmlns:a="http://schemas.openxmlformats.org/drawingml/2006/main" w="0">
-            <a:noFill/>
-          </a:ln>
-        </p:spPr>
-        <p:txBody>
-          <a:bodyPr xmlns:a="http://schemas.openxmlformats.org/drawingml/2006/main" lIns="0" tIns="0" rIns="0" bIns="0" anchor="t">
-            <a:noAutofit/>
-          </a:bodyPr>
-          <a:lstStyle xmlns:a="http://schemas.openxmlformats.org/drawingml/2006/main"/>
-          <a:p xmlns:a="http://schemas.openxmlformats.org/drawingml/2006/main">
-            <a:pPr>
-              <a:defRPr sz="2250" b="1">
-                <a:solidFill>
-                  <a:srgbClr val="087F8C"/>
-                </a:solidFill>
-                <a:latin typeface="Arial"/>
-                <a:ea typeface="Arial"/>
-                <a:cs typeface="Arial"/>
-              </a:defRPr>
-            </a:pPr>
-            <a:r>
-              <a:rPr sz="2250" b="1">
-                <a:solidFill>
-                  <a:srgbClr val="087F8C"/>
-                </a:solidFill>
-                <a:latin typeface="Arial"/>
-                <a:ea typeface="Arial"/>
-                <a:cs typeface="Arial"/>
-              </a:rPr>
-              <a:t>Formação e custo</a:t>
-            </a:r>
-          </a:p>
-        </p:txBody>
-      </p:sp>
-      <p:sp>
-        <p:nvSpPr>
-          <p:cNvPr id="8" name="Medidas de compreensão e esforço total de verificação.">
-            <a:extLst xmlns:a="http://schemas.openxmlformats.org/drawingml/2006/main">
-              <a:ext uri="{FF2B5EF4-FFF2-40B4-BE49-F238E27FC236}">
-                <a16:creationId xmlns:a16="http://schemas.microsoft.com/office/drawing/2014/main" id="{32B529B1-19BC-4BB8-B898-80876032DDC2}"/>
-              </a:ext>
-            </a:extLst>
-          </p:cNvPr>
-          <p:cNvSpPr>
-            <a:spLocks xmlns:a="http://schemas.openxmlformats.org/drawingml/2006/main" noGrp="1"/>
-          </p:cNvSpPr>
-          <p:nvPr/>
-        </p:nvSpPr>
-        <p:spPr>
-          <a:xfrm xmlns:a="http://schemas.openxmlformats.org/drawingml/2006/main">
-            <a:off x="3619500" y="4095750"/>
-            <a:ext cx="7620000" cy="857250"/>
-          </a:xfrm>
-          <a:prstGeom xmlns:a="http://schemas.openxmlformats.org/drawingml/2006/main" prst="rect">
-            <a:avLst/>
-          </a:prstGeom>
-          <a:noFill xmlns:a="http://schemas.openxmlformats.org/drawingml/2006/main"/>
-          <a:ln xmlns:a="http://schemas.openxmlformats.org/drawingml/2006/main" w="0">
-            <a:noFill/>
-          </a:ln>
-        </p:spPr>
-        <p:txBody>
-          <a:bodyPr xmlns:a="http://schemas.openxmlformats.org/drawingml/2006/main" lIns="0" tIns="0" rIns="0" bIns="0" anchor="t">
-            <a:noAutofit/>
-          </a:bodyPr>
-          <a:lstStyle xmlns:a="http://schemas.openxmlformats.org/drawingml/2006/main"/>
-          <a:p xmlns:a="http://schemas.openxmlformats.org/drawingml/2006/main">
-            <a:pPr>
-              <a:defRPr sz="2175" b="0">
-                <a:solidFill>
-                  <a:srgbClr val="253643"/>
-                </a:solidFill>
-                <a:latin typeface="Arial"/>
-                <a:ea typeface="Arial"/>
-                <a:cs typeface="Arial"/>
-              </a:defRPr>
-            </a:pPr>
-            <a:r>
-              <a:rPr sz="2175" b="0">
-                <a:solidFill>
-                  <a:srgbClr val="253643"/>
-                </a:solidFill>
-                <a:latin typeface="Arial"/>
-                <a:ea typeface="Arial"/>
-                <a:cs typeface="Arial"/>
-              </a:rPr>
-              <a:t>Medidas de compreensão e esforço total de verificação.</a:t>
+              <a:t>Uma contribuição pode valer pela pergunta que resolve, pela incerteza que elimina ou pelo limite que estabelece.</a:t>
+            </a:r>
+          </a:p>
+        </p:txBody>
+      </p:sp>
+      <p:sp>
+        <p:nvSpPr>
+          <p:cNvPr id="5" name="Contagem de artigos e volume de código não substituem e">
+            <a:extLst xmlns:a="http://schemas.openxmlformats.org/drawingml/2006/main">
+              <a:ext uri="{FF2B5EF4-FFF2-40B4-BE49-F238E27FC236}">
+                <a16:creationId xmlns:a16="http://schemas.microsoft.com/office/drawing/2014/main" id="{6F2B8BA6-5D2C-4C31-935D-C95E88FD878B}"/>
+              </a:ext>
+            </a:extLst>
+          </p:cNvPr>
+          <p:cNvSpPr>
+            <a:spLocks xmlns:a="http://schemas.openxmlformats.org/drawingml/2006/main" noGrp="1"/>
+          </p:cNvSpPr>
+          <p:nvPr/>
+        </p:nvSpPr>
+        <p:spPr>
+          <a:xfrm xmlns:a="http://schemas.openxmlformats.org/drawingml/2006/main">
+            <a:off x="685800" y="5524500"/>
+            <a:ext cx="10572750" cy="476250"/>
+          </a:xfrm>
+          <a:prstGeom xmlns:a="http://schemas.openxmlformats.org/drawingml/2006/main" prst="rect">
+            <a:avLst/>
+          </a:prstGeom>
+          <a:noFill xmlns:a="http://schemas.openxmlformats.org/drawingml/2006/main"/>
+          <a:ln xmlns:a="http://schemas.openxmlformats.org/drawingml/2006/main" w="0">
+            <a:noFill/>
+          </a:ln>
+        </p:spPr>
+        <p:txBody>
+          <a:bodyPr xmlns:a="http://schemas.openxmlformats.org/drawingml/2006/main" lIns="0" tIns="0" rIns="0" bIns="0" anchor="t">
+            <a:noAutofit/>
+          </a:bodyPr>
+          <a:lstStyle xmlns:a="http://schemas.openxmlformats.org/drawingml/2006/main"/>
+          <a:p xmlns:a="http://schemas.openxmlformats.org/drawingml/2006/main">
+            <a:pPr>
+              <a:defRPr sz="2025" b="0">
+                <a:solidFill>
+                  <a:srgbClr val="B35B32"/>
+                </a:solidFill>
+                <a:latin typeface="Arial"/>
+                <a:ea typeface="Arial"/>
+                <a:cs typeface="Arial"/>
+              </a:defRPr>
+            </a:pPr>
+            <a:r>
+              <a:rPr sz="2025" b="0">
+                <a:solidFill>
+                  <a:srgbClr val="B35B32"/>
+                </a:solidFill>
+                <a:latin typeface="Arial"/>
+                <a:ea typeface="Arial"/>
+                <a:cs typeface="Arial"/>
+              </a:rPr>
+              <a:t>Contagem de artigos e volume de código não substituem essa avaliação.</a:t>
             </a:r>
           </a:p>
         </p:txBody>
@@ -8236,7 +8396,7 @@
     </p:spTree>
     <p:extLst>
       <p:ext uri="{BB962C8B-B14F-4D97-AF65-F5344CB8AC3E}">
-        <p14:creationId xmlns:p14="http://schemas.microsoft.com/office/powerpoint/2010/main" val="973395066"/>
+        <p14:creationId xmlns:p14="http://schemas.microsoft.com/office/powerpoint/2010/main" val="696630516"/>
       </p:ext>
     </p:extLst>
   </p:cSld>
@@ -8267,7 +8427,7 @@
           <p:cNvPr id="8" name="A pergunta do experimento">
             <a:extLst xmlns:a="http://schemas.openxmlformats.org/drawingml/2006/main">
               <a:ext uri="{FF2B5EF4-FFF2-40B4-BE49-F238E27FC236}">
-                <a16:creationId xmlns:a16="http://schemas.microsoft.com/office/drawing/2014/main" id="{D27EACD0-07C2-4407-9343-8CDA3F64B287}"/>
+                <a16:creationId xmlns:a16="http://schemas.microsoft.com/office/drawing/2014/main" id="{0A4AE8D7-D966-4956-82C9-BE397633EE67}"/>
               </a:ext>
             </a:extLst>
           </p:cNvPr>
@@ -8321,10 +8481,10 @@
       </p:sp>
       <p:sp>
         <p:nvSpPr>
-          <p:cNvPr id="2" name="2 / 20">
-            <a:extLst xmlns:a="http://schemas.openxmlformats.org/drawingml/2006/main">
-              <a:ext uri="{FF2B5EF4-FFF2-40B4-BE49-F238E27FC236}">
-                <a16:creationId xmlns:a16="http://schemas.microsoft.com/office/drawing/2014/main" id="{3B26DB15-1C1A-4E2B-8D70-293E0F975052}"/>
+          <p:cNvPr id="2" name="2 / 21">
+            <a:extLst xmlns:a="http://schemas.openxmlformats.org/drawingml/2006/main">
+              <a:ext uri="{FF2B5EF4-FFF2-40B4-BE49-F238E27FC236}">
+                <a16:creationId xmlns:a16="http://schemas.microsoft.com/office/drawing/2014/main" id="{0737B2C0-4A83-488C-A8F9-A630A876C106}"/>
               </a:ext>
             </a:extLst>
           </p:cNvPr>
@@ -8371,7 +8531,7 @@
                 <a:ea typeface="Arial"/>
                 <a:cs typeface="Arial"/>
               </a:rPr>
-              <a:t>2 / 20</a:t>
+              <a:t>2 / 21</a:t>
             </a:r>
           </a:p>
         </p:txBody>
@@ -8381,7 +8541,7 @@
           <p:cNvPr id="3" name="O que esperamos de um pesquisador quando parte da pesqu">
             <a:extLst xmlns:a="http://schemas.openxmlformats.org/drawingml/2006/main">
               <a:ext uri="{FF2B5EF4-FFF2-40B4-BE49-F238E27FC236}">
-                <a16:creationId xmlns:a16="http://schemas.microsoft.com/office/drawing/2014/main" id="{766DBCAF-4A64-4F97-8138-FD3D3E7ED503}"/>
+                <a16:creationId xmlns:a16="http://schemas.microsoft.com/office/drawing/2014/main" id="{30096E9E-57E1-445A-923E-28CC1110636D}"/>
               </a:ext>
             </a:extLst>
           </p:cNvPr>
@@ -8438,7 +8598,7 @@
           <p:cNvPr id="4" name="Produto científico">
             <a:extLst xmlns:a="http://schemas.openxmlformats.org/drawingml/2006/main">
               <a:ext uri="{FF2B5EF4-FFF2-40B4-BE49-F238E27FC236}">
-                <a16:creationId xmlns:a16="http://schemas.microsoft.com/office/drawing/2014/main" id="{95111067-715A-4E16-95B3-A1407558C217}"/>
+                <a16:creationId xmlns:a16="http://schemas.microsoft.com/office/drawing/2014/main" id="{6447EA7C-2685-456D-8C52-32757F030B11}"/>
               </a:ext>
             </a:extLst>
           </p:cNvPr>
@@ -8495,7 +8655,7 @@
           <p:cNvPr id="5" name="A pergunta importa?&#10;Os resultados se sustentam?">
             <a:extLst xmlns:a="http://schemas.openxmlformats.org/drawingml/2006/main">
               <a:ext uri="{FF2B5EF4-FFF2-40B4-BE49-F238E27FC236}">
-                <a16:creationId xmlns:a16="http://schemas.microsoft.com/office/drawing/2014/main" id="{197BA379-8E1B-4924-93F9-CEBCD21B88A9}"/>
+                <a16:creationId xmlns:a16="http://schemas.microsoft.com/office/drawing/2014/main" id="{CFE50A41-95E7-4074-861C-94F69523D615}"/>
               </a:ext>
             </a:extLst>
           </p:cNvPr>
@@ -8575,7 +8735,7 @@
           <p:cNvPr id="6" name="Formação da pessoa">
             <a:extLst xmlns:a="http://schemas.openxmlformats.org/drawingml/2006/main">
               <a:ext uri="{FF2B5EF4-FFF2-40B4-BE49-F238E27FC236}">
-                <a16:creationId xmlns:a16="http://schemas.microsoft.com/office/drawing/2014/main" id="{A12803A9-899B-4184-88CD-224ED2C984D0}"/>
+                <a16:creationId xmlns:a16="http://schemas.microsoft.com/office/drawing/2014/main" id="{0859FCD8-FFB5-4F6C-8E59-F0D3EBA79EBE}"/>
               </a:ext>
             </a:extLst>
           </p:cNvPr>
@@ -8632,7 +8792,7 @@
           <p:cNvPr id="7" name="Ela compreende o trabalho?&#10;Consegue decidir o próximo p">
             <a:extLst xmlns:a="http://schemas.openxmlformats.org/drawingml/2006/main">
               <a:ext uri="{FF2B5EF4-FFF2-40B4-BE49-F238E27FC236}">
-                <a16:creationId xmlns:a16="http://schemas.microsoft.com/office/drawing/2014/main" id="{810E1E7C-F9F7-4E3D-ADE2-25A94FCD5EB0}"/>
+                <a16:creationId xmlns:a16="http://schemas.microsoft.com/office/drawing/2014/main" id="{644F08D4-D26A-498A-81EE-69CD6AB5DBFD}"/>
               </a:ext>
             </a:extLst>
           </p:cNvPr>
@@ -8710,7 +8870,7 @@
     </p:spTree>
     <p:extLst>
       <p:ext uri="{BB962C8B-B14F-4D97-AF65-F5344CB8AC3E}">
-        <p14:creationId xmlns:p14="http://schemas.microsoft.com/office/powerpoint/2010/main" val="917326253"/>
+        <p14:creationId xmlns:p14="http://schemas.microsoft.com/office/powerpoint/2010/main" val="2124327294"/>
       </p:ext>
     </p:extLst>
   </p:cSld>
@@ -8718,6 +8878,491 @@
 </file>
 
 <file path=ppt/slides/slide20.xml><?xml version="1.0" encoding="utf-8"?>
+<p:sld xmlns:p="http://schemas.openxmlformats.org/presentationml/2006/main">
+  <p:cSld>
+    <p:bg>
+      <p:bgPr>
+        <a:solidFill xmlns:a="http://schemas.openxmlformats.org/drawingml/2006/main">
+          <a:srgbClr val="F7F5F0"/>
+        </a:solidFill>
+      </p:bgPr>
+    </p:bg>
+    <p:spTree>
+      <p:nvGrpSpPr>
+        <p:cNvPr id="1" name=""/>
+        <p:cNvGrpSpPr/>
+        <p:nvPr/>
+      </p:nvGrpSpPr>
+      <p:grpSpPr>
+        <a:xfrm xmlns:a="http://schemas.openxmlformats.org/drawingml/2006/main"/>
+      </p:grpSpPr>
+      <p:sp>
+        <p:nvSpPr>
+          <p:cNvPr id="9" name="Próximas avaliações do experimento">
+            <a:extLst xmlns:a="http://schemas.openxmlformats.org/drawingml/2006/main">
+              <a:ext uri="{FF2B5EF4-FFF2-40B4-BE49-F238E27FC236}">
+                <a16:creationId xmlns:a16="http://schemas.microsoft.com/office/drawing/2014/main" id="{317BF4DF-8F06-4C33-B477-B5D25874B137}"/>
+              </a:ext>
+            </a:extLst>
+          </p:cNvPr>
+          <p:cNvSpPr>
+            <a:spLocks xmlns:a="http://schemas.openxmlformats.org/drawingml/2006/main" noGrp="1"/>
+          </p:cNvSpPr>
+          <p:nvPr/>
+        </p:nvSpPr>
+        <p:spPr>
+          <a:xfrm xmlns:a="http://schemas.openxmlformats.org/drawingml/2006/main">
+            <a:off x="685800" y="457200"/>
+            <a:ext cx="10820400" cy="1047750"/>
+          </a:xfrm>
+          <a:prstGeom xmlns:a="http://schemas.openxmlformats.org/drawingml/2006/main" prst="rect">
+            <a:avLst/>
+          </a:prstGeom>
+          <a:noFill xmlns:a="http://schemas.openxmlformats.org/drawingml/2006/main"/>
+          <a:ln xmlns:a="http://schemas.openxmlformats.org/drawingml/2006/main" w="0">
+            <a:noFill/>
+          </a:ln>
+        </p:spPr>
+        <p:txBody>
+          <a:bodyPr xmlns:a="http://schemas.openxmlformats.org/drawingml/2006/main" lIns="0" tIns="0" rIns="0" bIns="0" anchor="t">
+            <a:noAutofit/>
+          </a:bodyPr>
+          <a:lstStyle xmlns:a="http://schemas.openxmlformats.org/drawingml/2006/main"/>
+          <a:p xmlns:a="http://schemas.openxmlformats.org/drawingml/2006/main">
+            <a:pPr>
+              <a:defRPr sz="3300" b="1">
+                <a:solidFill>
+                  <a:srgbClr val="17324D"/>
+                </a:solidFill>
+                <a:latin typeface="Arial"/>
+                <a:ea typeface="Arial"/>
+                <a:cs typeface="Arial"/>
+              </a:defRPr>
+            </a:pPr>
+            <a:r>
+              <a:rPr sz="3300" b="1">
+                <a:solidFill>
+                  <a:srgbClr val="17324D"/>
+                </a:solidFill>
+                <a:latin typeface="Arial"/>
+                <a:ea typeface="Arial"/>
+                <a:cs typeface="Arial"/>
+              </a:rPr>
+              <a:t>Próximas avaliações do experimento</a:t>
+            </a:r>
+          </a:p>
+        </p:txBody>
+      </p:sp>
+      <p:sp>
+        <p:nvSpPr>
+          <p:cNvPr id="2" name="20 / 21">
+            <a:extLst xmlns:a="http://schemas.openxmlformats.org/drawingml/2006/main">
+              <a:ext uri="{FF2B5EF4-FFF2-40B4-BE49-F238E27FC236}">
+                <a16:creationId xmlns:a16="http://schemas.microsoft.com/office/drawing/2014/main" id="{22185F17-7D58-4D39-A35B-FE264BE5AB7A}"/>
+              </a:ext>
+            </a:extLst>
+          </p:cNvPr>
+          <p:cNvSpPr>
+            <a:spLocks xmlns:a="http://schemas.openxmlformats.org/drawingml/2006/main" noGrp="1"/>
+          </p:cNvSpPr>
+          <p:nvPr/>
+        </p:nvSpPr>
+        <p:spPr>
+          <a:xfrm xmlns:a="http://schemas.openxmlformats.org/drawingml/2006/main">
+            <a:off x="10572750" y="6448425"/>
+            <a:ext cx="933450" cy="228600"/>
+          </a:xfrm>
+          <a:prstGeom xmlns:a="http://schemas.openxmlformats.org/drawingml/2006/main" prst="rect">
+            <a:avLst/>
+          </a:prstGeom>
+          <a:noFill xmlns:a="http://schemas.openxmlformats.org/drawingml/2006/main"/>
+          <a:ln xmlns:a="http://schemas.openxmlformats.org/drawingml/2006/main" w="0">
+            <a:noFill/>
+          </a:ln>
+        </p:spPr>
+        <p:txBody>
+          <a:bodyPr xmlns:a="http://schemas.openxmlformats.org/drawingml/2006/main" lIns="0" tIns="0" rIns="0" bIns="0" anchor="t">
+            <a:noAutofit/>
+          </a:bodyPr>
+          <a:lstStyle xmlns:a="http://schemas.openxmlformats.org/drawingml/2006/main"/>
+          <a:p xmlns:a="http://schemas.openxmlformats.org/drawingml/2006/main">
+            <a:pPr>
+              <a:defRPr sz="1275" b="0">
+                <a:solidFill>
+                  <a:srgbClr val="586B79"/>
+                </a:solidFill>
+                <a:latin typeface="Arial"/>
+                <a:ea typeface="Arial"/>
+                <a:cs typeface="Arial"/>
+              </a:defRPr>
+            </a:pPr>
+            <a:r>
+              <a:rPr sz="1275" b="0">
+                <a:solidFill>
+                  <a:srgbClr val="586B79"/>
+                </a:solidFill>
+                <a:latin typeface="Arial"/>
+                <a:ea typeface="Arial"/>
+                <a:cs typeface="Arial"/>
+              </a:rPr>
+              <a:t>20 / 21</a:t>
+            </a:r>
+          </a:p>
+        </p:txBody>
+      </p:sp>
+      <p:sp>
+        <p:nvSpPr>
+          <p:cNvPr id="3" name="Qualidade científica">
+            <a:extLst xmlns:a="http://schemas.openxmlformats.org/drawingml/2006/main">
+              <a:ext uri="{FF2B5EF4-FFF2-40B4-BE49-F238E27FC236}">
+                <a16:creationId xmlns:a16="http://schemas.microsoft.com/office/drawing/2014/main" id="{C01132EB-5678-41D3-B9FD-70614DE25005}"/>
+              </a:ext>
+            </a:extLst>
+          </p:cNvPr>
+          <p:cNvSpPr>
+            <a:spLocks xmlns:a="http://schemas.openxmlformats.org/drawingml/2006/main" noGrp="1"/>
+          </p:cNvSpPr>
+          <p:nvPr/>
+        </p:nvSpPr>
+        <p:spPr>
+          <a:xfrm xmlns:a="http://schemas.openxmlformats.org/drawingml/2006/main">
+            <a:off x="685800" y="1905000"/>
+            <a:ext cx="2524125" cy="762000"/>
+          </a:xfrm>
+          <a:prstGeom xmlns:a="http://schemas.openxmlformats.org/drawingml/2006/main" prst="rect">
+            <a:avLst/>
+          </a:prstGeom>
+          <a:noFill xmlns:a="http://schemas.openxmlformats.org/drawingml/2006/main"/>
+          <a:ln xmlns:a="http://schemas.openxmlformats.org/drawingml/2006/main" w="0">
+            <a:noFill/>
+          </a:ln>
+        </p:spPr>
+        <p:txBody>
+          <a:bodyPr xmlns:a="http://schemas.openxmlformats.org/drawingml/2006/main" lIns="0" tIns="0" rIns="0" bIns="0" anchor="t">
+            <a:noAutofit/>
+          </a:bodyPr>
+          <a:lstStyle xmlns:a="http://schemas.openxmlformats.org/drawingml/2006/main"/>
+          <a:p xmlns:a="http://schemas.openxmlformats.org/drawingml/2006/main">
+            <a:pPr>
+              <a:defRPr sz="2250" b="1">
+                <a:solidFill>
+                  <a:srgbClr val="087F8C"/>
+                </a:solidFill>
+                <a:latin typeface="Arial"/>
+                <a:ea typeface="Arial"/>
+                <a:cs typeface="Arial"/>
+              </a:defRPr>
+            </a:pPr>
+            <a:r>
+              <a:rPr sz="2250" b="1">
+                <a:solidFill>
+                  <a:srgbClr val="087F8C"/>
+                </a:solidFill>
+                <a:latin typeface="Arial"/>
+                <a:ea typeface="Arial"/>
+                <a:cs typeface="Arial"/>
+              </a:rPr>
+              <a:t>Qualidade científica</a:t>
+            </a:r>
+          </a:p>
+        </p:txBody>
+      </p:sp>
+      <p:sp>
+        <p:nvSpPr>
+          <p:cNvPr id="4" name="Especialistas examinam as conclusões centrais.">
+            <a:extLst xmlns:a="http://schemas.openxmlformats.org/drawingml/2006/main">
+              <a:ext uri="{FF2B5EF4-FFF2-40B4-BE49-F238E27FC236}">
+                <a16:creationId xmlns:a16="http://schemas.microsoft.com/office/drawing/2014/main" id="{F930E53C-09E8-4614-9978-5D6316C80687}"/>
+              </a:ext>
+            </a:extLst>
+          </p:cNvPr>
+          <p:cNvSpPr>
+            <a:spLocks xmlns:a="http://schemas.openxmlformats.org/drawingml/2006/main" noGrp="1"/>
+          </p:cNvSpPr>
+          <p:nvPr/>
+        </p:nvSpPr>
+        <p:spPr>
+          <a:xfrm xmlns:a="http://schemas.openxmlformats.org/drawingml/2006/main">
+            <a:off x="3619500" y="1905000"/>
+            <a:ext cx="7620000" cy="857250"/>
+          </a:xfrm>
+          <a:prstGeom xmlns:a="http://schemas.openxmlformats.org/drawingml/2006/main" prst="rect">
+            <a:avLst/>
+          </a:prstGeom>
+          <a:noFill xmlns:a="http://schemas.openxmlformats.org/drawingml/2006/main"/>
+          <a:ln xmlns:a="http://schemas.openxmlformats.org/drawingml/2006/main" w="0">
+            <a:noFill/>
+          </a:ln>
+        </p:spPr>
+        <p:txBody>
+          <a:bodyPr xmlns:a="http://schemas.openxmlformats.org/drawingml/2006/main" lIns="0" tIns="0" rIns="0" bIns="0" anchor="t">
+            <a:noAutofit/>
+          </a:bodyPr>
+          <a:lstStyle xmlns:a="http://schemas.openxmlformats.org/drawingml/2006/main"/>
+          <a:p xmlns:a="http://schemas.openxmlformats.org/drawingml/2006/main">
+            <a:pPr>
+              <a:defRPr sz="2175" b="0">
+                <a:solidFill>
+                  <a:srgbClr val="253643"/>
+                </a:solidFill>
+                <a:latin typeface="Arial"/>
+                <a:ea typeface="Arial"/>
+                <a:cs typeface="Arial"/>
+              </a:defRPr>
+            </a:pPr>
+            <a:r>
+              <a:rPr sz="2175" b="0">
+                <a:solidFill>
+                  <a:srgbClr val="253643"/>
+                </a:solidFill>
+                <a:latin typeface="Arial"/>
+                <a:ea typeface="Arial"/>
+                <a:cs typeface="Arial"/>
+              </a:rPr>
+              <a:t>Especialistas examinam as conclusões centrais.</a:t>
+            </a:r>
+          </a:p>
+        </p:txBody>
+      </p:sp>
+      <p:sp>
+        <p:nvSpPr>
+          <p:cNvPr id="5" name="Efeito da revisão">
+            <a:extLst xmlns:a="http://schemas.openxmlformats.org/drawingml/2006/main">
+              <a:ext uri="{FF2B5EF4-FFF2-40B4-BE49-F238E27FC236}">
+                <a16:creationId xmlns:a16="http://schemas.microsoft.com/office/drawing/2014/main" id="{E9ACCB9A-62DD-461E-887A-40F0F4B265BF}"/>
+              </a:ext>
+            </a:extLst>
+          </p:cNvPr>
+          <p:cNvSpPr>
+            <a:spLocks xmlns:a="http://schemas.openxmlformats.org/drawingml/2006/main" noGrp="1"/>
+          </p:cNvSpPr>
+          <p:nvPr/>
+        </p:nvSpPr>
+        <p:spPr>
+          <a:xfrm xmlns:a="http://schemas.openxmlformats.org/drawingml/2006/main">
+            <a:off x="685800" y="3000375"/>
+            <a:ext cx="2524125" cy="762000"/>
+          </a:xfrm>
+          <a:prstGeom xmlns:a="http://schemas.openxmlformats.org/drawingml/2006/main" prst="rect">
+            <a:avLst/>
+          </a:prstGeom>
+          <a:noFill xmlns:a="http://schemas.openxmlformats.org/drawingml/2006/main"/>
+          <a:ln xmlns:a="http://schemas.openxmlformats.org/drawingml/2006/main" w="0">
+            <a:noFill/>
+          </a:ln>
+        </p:spPr>
+        <p:txBody>
+          <a:bodyPr xmlns:a="http://schemas.openxmlformats.org/drawingml/2006/main" lIns="0" tIns="0" rIns="0" bIns="0" anchor="t">
+            <a:noAutofit/>
+          </a:bodyPr>
+          <a:lstStyle xmlns:a="http://schemas.openxmlformats.org/drawingml/2006/main"/>
+          <a:p xmlns:a="http://schemas.openxmlformats.org/drawingml/2006/main">
+            <a:pPr>
+              <a:defRPr sz="2250" b="1">
+                <a:solidFill>
+                  <a:srgbClr val="087F8C"/>
+                </a:solidFill>
+                <a:latin typeface="Arial"/>
+                <a:ea typeface="Arial"/>
+                <a:cs typeface="Arial"/>
+              </a:defRPr>
+            </a:pPr>
+            <a:r>
+              <a:rPr sz="2250" b="1">
+                <a:solidFill>
+                  <a:srgbClr val="087F8C"/>
+                </a:solidFill>
+                <a:latin typeface="Arial"/>
+                <a:ea typeface="Arial"/>
+                <a:cs typeface="Arial"/>
+              </a:rPr>
+              <a:t>Efeito da revisão</a:t>
+            </a:r>
+          </a:p>
+        </p:txBody>
+      </p:sp>
+      <p:sp>
+        <p:nvSpPr>
+          <p:cNvPr id="6" name="Comparação cega entre versões do manuscrito.">
+            <a:extLst xmlns:a="http://schemas.openxmlformats.org/drawingml/2006/main">
+              <a:ext uri="{FF2B5EF4-FFF2-40B4-BE49-F238E27FC236}">
+                <a16:creationId xmlns:a16="http://schemas.microsoft.com/office/drawing/2014/main" id="{35E60D50-D2AF-4518-B010-9340127F500B}"/>
+              </a:ext>
+            </a:extLst>
+          </p:cNvPr>
+          <p:cNvSpPr>
+            <a:spLocks xmlns:a="http://schemas.openxmlformats.org/drawingml/2006/main" noGrp="1"/>
+          </p:cNvSpPr>
+          <p:nvPr/>
+        </p:nvSpPr>
+        <p:spPr>
+          <a:xfrm xmlns:a="http://schemas.openxmlformats.org/drawingml/2006/main">
+            <a:off x="3619500" y="3000375"/>
+            <a:ext cx="7620000" cy="857250"/>
+          </a:xfrm>
+          <a:prstGeom xmlns:a="http://schemas.openxmlformats.org/drawingml/2006/main" prst="rect">
+            <a:avLst/>
+          </a:prstGeom>
+          <a:noFill xmlns:a="http://schemas.openxmlformats.org/drawingml/2006/main"/>
+          <a:ln xmlns:a="http://schemas.openxmlformats.org/drawingml/2006/main" w="0">
+            <a:noFill/>
+          </a:ln>
+        </p:spPr>
+        <p:txBody>
+          <a:bodyPr xmlns:a="http://schemas.openxmlformats.org/drawingml/2006/main" lIns="0" tIns="0" rIns="0" bIns="0" anchor="t">
+            <a:noAutofit/>
+          </a:bodyPr>
+          <a:lstStyle xmlns:a="http://schemas.openxmlformats.org/drawingml/2006/main"/>
+          <a:p xmlns:a="http://schemas.openxmlformats.org/drawingml/2006/main">
+            <a:pPr>
+              <a:defRPr sz="2175" b="0">
+                <a:solidFill>
+                  <a:srgbClr val="253643"/>
+                </a:solidFill>
+                <a:latin typeface="Arial"/>
+                <a:ea typeface="Arial"/>
+                <a:cs typeface="Arial"/>
+              </a:defRPr>
+            </a:pPr>
+            <a:r>
+              <a:rPr sz="2175" b="0">
+                <a:solidFill>
+                  <a:srgbClr val="253643"/>
+                </a:solidFill>
+                <a:latin typeface="Arial"/>
+                <a:ea typeface="Arial"/>
+                <a:cs typeface="Arial"/>
+              </a:rPr>
+              <a:t>Comparação cega entre versões do manuscrito.</a:t>
+            </a:r>
+          </a:p>
+        </p:txBody>
+      </p:sp>
+      <p:sp>
+        <p:nvSpPr>
+          <p:cNvPr id="7" name="Formação e custo">
+            <a:extLst xmlns:a="http://schemas.openxmlformats.org/drawingml/2006/main">
+              <a:ext uri="{FF2B5EF4-FFF2-40B4-BE49-F238E27FC236}">
+                <a16:creationId xmlns:a16="http://schemas.microsoft.com/office/drawing/2014/main" id="{BBCEA082-3894-45A6-A1DE-4A839DDF399E}"/>
+              </a:ext>
+            </a:extLst>
+          </p:cNvPr>
+          <p:cNvSpPr>
+            <a:spLocks xmlns:a="http://schemas.openxmlformats.org/drawingml/2006/main" noGrp="1"/>
+          </p:cNvSpPr>
+          <p:nvPr/>
+        </p:nvSpPr>
+        <p:spPr>
+          <a:xfrm xmlns:a="http://schemas.openxmlformats.org/drawingml/2006/main">
+            <a:off x="685800" y="4095750"/>
+            <a:ext cx="2524125" cy="762000"/>
+          </a:xfrm>
+          <a:prstGeom xmlns:a="http://schemas.openxmlformats.org/drawingml/2006/main" prst="rect">
+            <a:avLst/>
+          </a:prstGeom>
+          <a:noFill xmlns:a="http://schemas.openxmlformats.org/drawingml/2006/main"/>
+          <a:ln xmlns:a="http://schemas.openxmlformats.org/drawingml/2006/main" w="0">
+            <a:noFill/>
+          </a:ln>
+        </p:spPr>
+        <p:txBody>
+          <a:bodyPr xmlns:a="http://schemas.openxmlformats.org/drawingml/2006/main" lIns="0" tIns="0" rIns="0" bIns="0" anchor="t">
+            <a:noAutofit/>
+          </a:bodyPr>
+          <a:lstStyle xmlns:a="http://schemas.openxmlformats.org/drawingml/2006/main"/>
+          <a:p xmlns:a="http://schemas.openxmlformats.org/drawingml/2006/main">
+            <a:pPr>
+              <a:defRPr sz="2250" b="1">
+                <a:solidFill>
+                  <a:srgbClr val="087F8C"/>
+                </a:solidFill>
+                <a:latin typeface="Arial"/>
+                <a:ea typeface="Arial"/>
+                <a:cs typeface="Arial"/>
+              </a:defRPr>
+            </a:pPr>
+            <a:r>
+              <a:rPr sz="2250" b="1">
+                <a:solidFill>
+                  <a:srgbClr val="087F8C"/>
+                </a:solidFill>
+                <a:latin typeface="Arial"/>
+                <a:ea typeface="Arial"/>
+                <a:cs typeface="Arial"/>
+              </a:rPr>
+              <a:t>Formação e custo</a:t>
+            </a:r>
+          </a:p>
+        </p:txBody>
+      </p:sp>
+      <p:sp>
+        <p:nvSpPr>
+          <p:cNvPr id="8" name="Medidas de compreensão e esforço total de verificação.">
+            <a:extLst xmlns:a="http://schemas.openxmlformats.org/drawingml/2006/main">
+              <a:ext uri="{FF2B5EF4-FFF2-40B4-BE49-F238E27FC236}">
+                <a16:creationId xmlns:a16="http://schemas.microsoft.com/office/drawing/2014/main" id="{C933E2D5-9F1A-4DA8-8C11-D0DFA95E2230}"/>
+              </a:ext>
+            </a:extLst>
+          </p:cNvPr>
+          <p:cNvSpPr>
+            <a:spLocks xmlns:a="http://schemas.openxmlformats.org/drawingml/2006/main" noGrp="1"/>
+          </p:cNvSpPr>
+          <p:nvPr/>
+        </p:nvSpPr>
+        <p:spPr>
+          <a:xfrm xmlns:a="http://schemas.openxmlformats.org/drawingml/2006/main">
+            <a:off x="3619500" y="4095750"/>
+            <a:ext cx="7620000" cy="857250"/>
+          </a:xfrm>
+          <a:prstGeom xmlns:a="http://schemas.openxmlformats.org/drawingml/2006/main" prst="rect">
+            <a:avLst/>
+          </a:prstGeom>
+          <a:noFill xmlns:a="http://schemas.openxmlformats.org/drawingml/2006/main"/>
+          <a:ln xmlns:a="http://schemas.openxmlformats.org/drawingml/2006/main" w="0">
+            <a:noFill/>
+          </a:ln>
+        </p:spPr>
+        <p:txBody>
+          <a:bodyPr xmlns:a="http://schemas.openxmlformats.org/drawingml/2006/main" lIns="0" tIns="0" rIns="0" bIns="0" anchor="t">
+            <a:noAutofit/>
+          </a:bodyPr>
+          <a:lstStyle xmlns:a="http://schemas.openxmlformats.org/drawingml/2006/main"/>
+          <a:p xmlns:a="http://schemas.openxmlformats.org/drawingml/2006/main">
+            <a:pPr>
+              <a:defRPr sz="2175" b="0">
+                <a:solidFill>
+                  <a:srgbClr val="253643"/>
+                </a:solidFill>
+                <a:latin typeface="Arial"/>
+                <a:ea typeface="Arial"/>
+                <a:cs typeface="Arial"/>
+              </a:defRPr>
+            </a:pPr>
+            <a:r>
+              <a:rPr sz="2175" b="0">
+                <a:solidFill>
+                  <a:srgbClr val="253643"/>
+                </a:solidFill>
+                <a:latin typeface="Arial"/>
+                <a:ea typeface="Arial"/>
+                <a:cs typeface="Arial"/>
+              </a:rPr>
+              <a:t>Medidas de compreensão e esforço total de verificação.</a:t>
+            </a:r>
+          </a:p>
+        </p:txBody>
+      </p:sp>
+    </p:spTree>
+    <p:extLst>
+      <p:ext uri="{BB962C8B-B14F-4D97-AF65-F5344CB8AC3E}">
+        <p14:creationId xmlns:p14="http://schemas.microsoft.com/office/powerpoint/2010/main" val="668196642"/>
+      </p:ext>
+    </p:extLst>
+  </p:cSld>
+</p:sld>
+</file>
+
+<file path=ppt/slides/slide21.xml><?xml version="1.0" encoding="utf-8"?>
 <p:sld xmlns:p="http://schemas.openxmlformats.org/presentationml/2006/main">
   <p:cSld>
     <p:bg>
@@ -8741,7 +9386,7 @@
           <p:cNvPr id="6" name="Questões para discussão">
             <a:extLst xmlns:a="http://schemas.openxmlformats.org/drawingml/2006/main">
               <a:ext uri="{FF2B5EF4-FFF2-40B4-BE49-F238E27FC236}">
-                <a16:creationId xmlns:a16="http://schemas.microsoft.com/office/drawing/2014/main" id="{65DA85BC-9F7A-451D-92A7-140B9418CF0F}"/>
+                <a16:creationId xmlns:a16="http://schemas.microsoft.com/office/drawing/2014/main" id="{67129809-506E-42C4-B074-8AFA5AF79ADC}"/>
               </a:ext>
             </a:extLst>
           </p:cNvPr>
@@ -8795,10 +9440,10 @@
       </p:sp>
       <p:sp>
         <p:nvSpPr>
-          <p:cNvPr id="2" name="20 / 20">
-            <a:extLst xmlns:a="http://schemas.openxmlformats.org/drawingml/2006/main">
-              <a:ext uri="{FF2B5EF4-FFF2-40B4-BE49-F238E27FC236}">
-                <a16:creationId xmlns:a16="http://schemas.microsoft.com/office/drawing/2014/main" id="{761962F2-5AE3-4D54-9F75-9098AE9D5219}"/>
+          <p:cNvPr id="2" name="21 / 21">
+            <a:extLst xmlns:a="http://schemas.openxmlformats.org/drawingml/2006/main">
+              <a:ext uri="{FF2B5EF4-FFF2-40B4-BE49-F238E27FC236}">
+                <a16:creationId xmlns:a16="http://schemas.microsoft.com/office/drawing/2014/main" id="{8A1BE968-16B7-43C7-839B-8A5E29B58CD7}"/>
               </a:ext>
             </a:extLst>
           </p:cNvPr>
@@ -8845,7 +9490,7 @@
                 <a:ea typeface="Arial"/>
                 <a:cs typeface="Arial"/>
               </a:rPr>
-              <a:t>20 / 20</a:t>
+              <a:t>21 / 21</a:t>
             </a:r>
           </a:p>
         </p:txBody>
@@ -8855,7 +9500,7 @@
           <p:cNvPr id="3" name="Que competências precisam&#10;ser demonstradas pessoalmente">
             <a:extLst xmlns:a="http://schemas.openxmlformats.org/drawingml/2006/main">
               <a:ext uri="{FF2B5EF4-FFF2-40B4-BE49-F238E27FC236}">
-                <a16:creationId xmlns:a16="http://schemas.microsoft.com/office/drawing/2014/main" id="{2B8803AF-D9C7-41BE-BAF8-E9525F53D8DE}"/>
+                <a16:creationId xmlns:a16="http://schemas.microsoft.com/office/drawing/2014/main" id="{526D53F0-EE75-495A-B468-38C8488BF28F}"/>
               </a:ext>
             </a:extLst>
           </p:cNvPr>
@@ -8935,7 +9580,7 @@
           <p:cNvPr id="4" name="Que perguntas passam a valer a pena&#10;quando executar cus">
             <a:extLst xmlns:a="http://schemas.openxmlformats.org/drawingml/2006/main">
               <a:ext uri="{FF2B5EF4-FFF2-40B4-BE49-F238E27FC236}">
-                <a16:creationId xmlns:a16="http://schemas.microsoft.com/office/drawing/2014/main" id="{15607843-93BF-444B-89E8-BF3D6BD3DBF2}"/>
+                <a16:creationId xmlns:a16="http://schemas.microsoft.com/office/drawing/2014/main" id="{D031BE0B-E650-4019-B30A-58C957982E3C}"/>
               </a:ext>
             </a:extLst>
           </p:cNvPr>
@@ -9015,7 +9660,7 @@
           <p:cNvPr id="5" name="Como repartir o esforço de verificar?">
             <a:extLst xmlns:a="http://schemas.openxmlformats.org/drawingml/2006/main">
               <a:ext uri="{FF2B5EF4-FFF2-40B4-BE49-F238E27FC236}">
-                <a16:creationId xmlns:a16="http://schemas.microsoft.com/office/drawing/2014/main" id="{A72F26C1-F556-4C0E-9576-FEB5A845C704}"/>
+                <a16:creationId xmlns:a16="http://schemas.microsoft.com/office/drawing/2014/main" id="{D1C80212-60D9-4E33-BF98-613D3140CB3C}"/>
               </a:ext>
             </a:extLst>
           </p:cNvPr>
@@ -9070,14 +9715,14 @@
     </p:spTree>
     <p:extLst>
       <p:ext uri="{BB962C8B-B14F-4D97-AF65-F5344CB8AC3E}">
-        <p14:creationId xmlns:p14="http://schemas.microsoft.com/office/powerpoint/2010/main" val="333899461"/>
+        <p14:creationId xmlns:p14="http://schemas.microsoft.com/office/powerpoint/2010/main" val="623339350"/>
       </p:ext>
     </p:extLst>
   </p:cSld>
 </p:sld>
 </file>
 
-<file path=ppt/slides/slide21.xml><?xml version="1.0" encoding="utf-8"?>
+<file path=ppt/slides/slide22.xml><?xml version="1.0" encoding="utf-8"?>
 <p:sld xmlns:p="http://schemas.openxmlformats.org/presentationml/2006/main">
   <p:cSld>
     <p:bg>
@@ -9101,7 +9746,7 @@
           <p:cNvPr id="4" name="Apoio: leitura correta das métricas">
             <a:extLst xmlns:a="http://schemas.openxmlformats.org/drawingml/2006/main">
               <a:ext uri="{FF2B5EF4-FFF2-40B4-BE49-F238E27FC236}">
-                <a16:creationId xmlns:a16="http://schemas.microsoft.com/office/drawing/2014/main" id="{63FC216B-B28F-488D-81FE-A1C1FB80C6AD}"/>
+                <a16:creationId xmlns:a16="http://schemas.microsoft.com/office/drawing/2014/main" id="{ECE93AF4-EC37-41AE-BB1D-9F6263D1245E}"/>
               </a:ext>
             </a:extLst>
           </p:cNvPr>
@@ -9158,7 +9803,7 @@
           <p:cNvPr id="2" name="Apoio">
             <a:extLst xmlns:a="http://schemas.openxmlformats.org/drawingml/2006/main">
               <a:ext uri="{FF2B5EF4-FFF2-40B4-BE49-F238E27FC236}">
-                <a16:creationId xmlns:a16="http://schemas.microsoft.com/office/drawing/2014/main" id="{9FF8427E-CBC8-45BD-B1F4-23E2EC5D4BAB}"/>
+                <a16:creationId xmlns:a16="http://schemas.microsoft.com/office/drawing/2014/main" id="{E36B91C1-7B60-4588-B8B8-53717A150D7D}"/>
               </a:ext>
             </a:extLst>
           </p:cNvPr>
@@ -9467,7 +10112,7 @@
                           <a:ea typeface="Arial"/>
                           <a:cs typeface="Arial"/>
                         </a:rPr>
-                        <a:t>Campo tokensUsed do goal, sem conversão em custo</a:t>
+                        <a:t>Contador do goal; custo calculado por outra fonte</a:t>
                       </a:r>
                     </a:p>
                   </a:txBody>
@@ -9485,14 +10130,14 @@
     </p:spTree>
     <p:extLst>
       <p:ext uri="{BB962C8B-B14F-4D97-AF65-F5344CB8AC3E}">
-        <p14:creationId xmlns:p14="http://schemas.microsoft.com/office/powerpoint/2010/main" val="1465003516"/>
+        <p14:creationId xmlns:p14="http://schemas.microsoft.com/office/powerpoint/2010/main" val="805179225"/>
       </p:ext>
     </p:extLst>
   </p:cSld>
 </p:sld>
 </file>
 
-<file path=ppt/slides/slide22.xml><?xml version="1.0" encoding="utf-8"?>
+<file path=ppt/slides/slide23.xml><?xml version="1.0" encoding="utf-8"?>
 <p:sld xmlns:p="http://schemas.openxmlformats.org/presentationml/2006/main">
   <p:cSld>
     <p:bg>
@@ -9516,7 +10161,7 @@
           <p:cNvPr id="6" name="Apoio: documentos e fontes">
             <a:extLst xmlns:a="http://schemas.openxmlformats.org/drawingml/2006/main">
               <a:ext uri="{FF2B5EF4-FFF2-40B4-BE49-F238E27FC236}">
-                <a16:creationId xmlns:a16="http://schemas.microsoft.com/office/drawing/2014/main" id="{57039FC4-BB78-43F1-AA62-0F847B026C0F}"/>
+                <a16:creationId xmlns:a16="http://schemas.microsoft.com/office/drawing/2014/main" id="{73C3355D-18D4-4D71-8812-E9F645DAEE18}"/>
               </a:ext>
             </a:extLst>
           </p:cNvPr>
@@ -9573,7 +10218,7 @@
           <p:cNvPr id="2" name="Apoio">
             <a:extLst xmlns:a="http://schemas.openxmlformats.org/drawingml/2006/main">
               <a:ext uri="{FF2B5EF4-FFF2-40B4-BE49-F238E27FC236}">
-                <a16:creationId xmlns:a16="http://schemas.microsoft.com/office/drawing/2014/main" id="{2F2AB3FE-AFF2-44BF-9759-51EE1253F35A}"/>
+                <a16:creationId xmlns:a16="http://schemas.microsoft.com/office/drawing/2014/main" id="{C25ADC33-688C-4B8A-8182-072CAD5D43B3}"/>
               </a:ext>
             </a:extLst>
           </p:cNvPr>
@@ -9630,7 +10275,7 @@
           <p:cNvPr id="3" name="Repositório TGdoWayne">
             <a:extLst xmlns:a="http://schemas.openxmlformats.org/drawingml/2006/main">
               <a:ext uri="{FF2B5EF4-FFF2-40B4-BE49-F238E27FC236}">
-                <a16:creationId xmlns:a16="http://schemas.microsoft.com/office/drawing/2014/main" id="{FB5BC799-CEFD-48C3-9336-FCC1CE3D358E}"/>
+                <a16:creationId xmlns:a16="http://schemas.microsoft.com/office/drawing/2014/main" id="{3014C13C-9227-41E1-BB8F-3067B7AC4BF1}"/>
               </a:ext>
             </a:extLst>
           </p:cNvPr>
@@ -9687,7 +10332,7 @@
           <p:cNvPr id="4" name="github.com/flavioluiz/TGdoWayne">
             <a:extLst xmlns:a="http://schemas.openxmlformats.org/drawingml/2006/main">
               <a:ext uri="{FF2B5EF4-FFF2-40B4-BE49-F238E27FC236}">
-                <a16:creationId xmlns:a16="http://schemas.microsoft.com/office/drawing/2014/main" id="{7A230936-E152-4863-8DD5-4428E2A0A81B}"/>
+                <a16:creationId xmlns:a16="http://schemas.microsoft.com/office/drawing/2014/main" id="{2B096D2C-0ECD-4A6F-BBF6-1602F5632F5F}"/>
               </a:ext>
             </a:extLst>
           </p:cNvPr>
@@ -9744,7 +10389,7 @@
           <p:cNvPr id="5" name="Relatório do estudo de caso e evidências&#10;Notas da revis">
             <a:extLst xmlns:a="http://schemas.openxmlformats.org/drawingml/2006/main">
               <a:ext uri="{FF2B5EF4-FFF2-40B4-BE49-F238E27FC236}">
-                <a16:creationId xmlns:a16="http://schemas.microsoft.com/office/drawing/2014/main" id="{E5692282-38F0-468C-8C59-2DACD556F2C5}"/>
+                <a16:creationId xmlns:a16="http://schemas.microsoft.com/office/drawing/2014/main" id="{C92CFA64-60A7-4B26-AEEE-987CAC0DDA9F}"/>
               </a:ext>
             </a:extLst>
           </p:cNvPr>
@@ -9868,7 +10513,7 @@
     </p:spTree>
     <p:extLst>
       <p:ext uri="{BB962C8B-B14F-4D97-AF65-F5344CB8AC3E}">
-        <p14:creationId xmlns:p14="http://schemas.microsoft.com/office/powerpoint/2010/main" val="1687118911"/>
+        <p14:creationId xmlns:p14="http://schemas.microsoft.com/office/powerpoint/2010/main" val="1121141647"/>
       </p:ext>
     </p:extLst>
   </p:cSld>
@@ -9899,7 +10544,7 @@
           <p:cNvPr id="6" name="O ponto de partida">
             <a:extLst xmlns:a="http://schemas.openxmlformats.org/drawingml/2006/main">
               <a:ext uri="{FF2B5EF4-FFF2-40B4-BE49-F238E27FC236}">
-                <a16:creationId xmlns:a16="http://schemas.microsoft.com/office/drawing/2014/main" id="{A22F1461-BD00-4E54-9EE1-40C75E461683}"/>
+                <a16:creationId xmlns:a16="http://schemas.microsoft.com/office/drawing/2014/main" id="{FFA89323-2158-449F-AAD7-BED9E47345B4}"/>
               </a:ext>
             </a:extLst>
           </p:cNvPr>
@@ -9953,10 +10598,10 @@
       </p:sp>
       <p:sp>
         <p:nvSpPr>
-          <p:cNvPr id="2" name="3 / 20">
-            <a:extLst xmlns:a="http://schemas.openxmlformats.org/drawingml/2006/main">
-              <a:ext uri="{FF2B5EF4-FFF2-40B4-BE49-F238E27FC236}">
-                <a16:creationId xmlns:a16="http://schemas.microsoft.com/office/drawing/2014/main" id="{781F3439-9605-416E-81EE-DF0696EDA419}"/>
+          <p:cNvPr id="2" name="3 / 21">
+            <a:extLst xmlns:a="http://schemas.openxmlformats.org/drawingml/2006/main">
+              <a:ext uri="{FF2B5EF4-FFF2-40B4-BE49-F238E27FC236}">
+                <a16:creationId xmlns:a16="http://schemas.microsoft.com/office/drawing/2014/main" id="{B0FDF1DE-B147-413F-B3A4-3F6D3638857B}"/>
               </a:ext>
             </a:extLst>
           </p:cNvPr>
@@ -10003,7 +10648,7 @@
                 <a:ea typeface="Arial"/>
                 <a:cs typeface="Arial"/>
               </a:rPr>
-              <a:t>3 / 20</a:t>
+              <a:t>3 / 21</a:t>
             </a:r>
           </a:p>
         </p:txBody>
@@ -10013,7 +10658,7 @@
           <p:cNvPr id="3" name="Um trabalho de graduação&#10;Uma intenção ampla&#10;Nenhuma hip">
             <a:extLst xmlns:a="http://schemas.openxmlformats.org/drawingml/2006/main">
               <a:ext uri="{FF2B5EF4-FFF2-40B4-BE49-F238E27FC236}">
-                <a16:creationId xmlns:a16="http://schemas.microsoft.com/office/drawing/2014/main" id="{18A8CE6F-8E6F-4A3B-AAD9-0B536F0A4978}"/>
+                <a16:creationId xmlns:a16="http://schemas.microsoft.com/office/drawing/2014/main" id="{2D258153-95CD-42BD-8BA2-7B10E36D0E53}"/>
               </a:ext>
             </a:extLst>
           </p:cNvPr>
@@ -10116,7 +10761,7 @@
           <p:cNvPr id="4" name="Pedido: propor uma continuação de mestrado, implementar">
             <a:extLst xmlns:a="http://schemas.openxmlformats.org/drawingml/2006/main">
               <a:ext uri="{FF2B5EF4-FFF2-40B4-BE49-F238E27FC236}">
-                <a16:creationId xmlns:a16="http://schemas.microsoft.com/office/drawing/2014/main" id="{F2E53D0A-27DC-4846-86DC-B9F1CC0A1549}"/>
+                <a16:creationId xmlns:a16="http://schemas.microsoft.com/office/drawing/2014/main" id="{7288EB51-F44B-40AB-A322-5BDD5F4F8499}"/>
               </a:ext>
             </a:extLst>
           </p:cNvPr>
@@ -10177,7 +10822,7 @@
           <p:nvPr/>
         </p:nvPicPr>
         <p:blipFill>
-          <a:blip xmlns:r="http://schemas.openxmlformats.org/officeDocument/2006/relationships" xmlns:a="http://schemas.openxmlformats.org/drawingml/2006/main" r:embed="R7ebd74bbf35b45a0"/>
+          <a:blip xmlns:r="http://schemas.openxmlformats.org/officeDocument/2006/relationships" xmlns:a="http://schemas.openxmlformats.org/drawingml/2006/main" r:embed="R7c418fe0b15a4e0f"/>
           <a:stretch xmlns:a="http://schemas.openxmlformats.org/drawingml/2006/main"/>
         </p:blipFill>
         <p:spPr>
@@ -10193,7 +10838,7 @@
     </p:spTree>
     <p:extLst>
       <p:ext uri="{BB962C8B-B14F-4D97-AF65-F5344CB8AC3E}">
-        <p14:creationId xmlns:p14="http://schemas.microsoft.com/office/powerpoint/2010/main" val="756139075"/>
+        <p14:creationId xmlns:p14="http://schemas.microsoft.com/office/powerpoint/2010/main" val="1779639265"/>
       </p:ext>
     </p:extLst>
   </p:cSld>
@@ -10224,7 +10869,7 @@
           <p:cNvPr id="9" name="Quem tomou quais decisões">
             <a:extLst xmlns:a="http://schemas.openxmlformats.org/drawingml/2006/main">
               <a:ext uri="{FF2B5EF4-FFF2-40B4-BE49-F238E27FC236}">
-                <a16:creationId xmlns:a16="http://schemas.microsoft.com/office/drawing/2014/main" id="{9EEF2562-9957-4969-8F92-C7705D24EE2E}"/>
+                <a16:creationId xmlns:a16="http://schemas.microsoft.com/office/drawing/2014/main" id="{BAAED1D3-6491-44F3-A185-37F6E021BD46}"/>
               </a:ext>
             </a:extLst>
           </p:cNvPr>
@@ -10278,10 +10923,10 @@
       </p:sp>
       <p:sp>
         <p:nvSpPr>
-          <p:cNvPr id="2" name="4 / 20">
-            <a:extLst xmlns:a="http://schemas.openxmlformats.org/drawingml/2006/main">
-              <a:ext uri="{FF2B5EF4-FFF2-40B4-BE49-F238E27FC236}">
-                <a16:creationId xmlns:a16="http://schemas.microsoft.com/office/drawing/2014/main" id="{7CB027BB-69AB-4026-88AE-934C41F02B0C}"/>
+          <p:cNvPr id="2" name="4 / 21">
+            <a:extLst xmlns:a="http://schemas.openxmlformats.org/drawingml/2006/main">
+              <a:ext uri="{FF2B5EF4-FFF2-40B4-BE49-F238E27FC236}">
+                <a16:creationId xmlns:a16="http://schemas.microsoft.com/office/drawing/2014/main" id="{92EF4F4B-0ED5-4441-9251-880CA500CF78}"/>
               </a:ext>
             </a:extLst>
           </p:cNvPr>
@@ -10328,7 +10973,7 @@
                 <a:ea typeface="Arial"/>
                 <a:cs typeface="Arial"/>
               </a:rPr>
-              <a:t>4 / 20</a:t>
+              <a:t>4 / 21</a:t>
             </a:r>
           </a:p>
         </p:txBody>
@@ -10338,7 +10983,7 @@
           <p:cNvPr id="3" name="Usuário">
             <a:extLst xmlns:a="http://schemas.openxmlformats.org/drawingml/2006/main">
               <a:ext uri="{FF2B5EF4-FFF2-40B4-BE49-F238E27FC236}">
-                <a16:creationId xmlns:a16="http://schemas.microsoft.com/office/drawing/2014/main" id="{BDEB81CC-08EE-46C0-B39A-8348419530B2}"/>
+                <a16:creationId xmlns:a16="http://schemas.microsoft.com/office/drawing/2014/main" id="{736AA912-B3B1-49AF-BED7-36C0855781D0}"/>
               </a:ext>
             </a:extLst>
           </p:cNvPr>
@@ -10395,7 +11040,7 @@
           <p:cNvPr id="4" name="Definiu a intenção, acompanhou recursos e encaminhou fe">
             <a:extLst xmlns:a="http://schemas.openxmlformats.org/drawingml/2006/main">
               <a:ext uri="{FF2B5EF4-FFF2-40B4-BE49-F238E27FC236}">
-                <a16:creationId xmlns:a16="http://schemas.microsoft.com/office/drawing/2014/main" id="{24621712-3629-4100-9DE0-7CF67067FCFF}"/>
+                <a16:creationId xmlns:a16="http://schemas.microsoft.com/office/drawing/2014/main" id="{FDE70155-4C63-4399-AB97-B110AE70A2C6}"/>
               </a:ext>
             </a:extLst>
           </p:cNvPr>
@@ -10452,7 +11097,7 @@
           <p:cNvPr id="5" name="Codex (Astra)">
             <a:extLst xmlns:a="http://schemas.openxmlformats.org/drawingml/2006/main">
               <a:ext uri="{FF2B5EF4-FFF2-40B4-BE49-F238E27FC236}">
-                <a16:creationId xmlns:a16="http://schemas.microsoft.com/office/drawing/2014/main" id="{644673E2-B5C9-4F8A-B7C7-F9AD5F050356}"/>
+                <a16:creationId xmlns:a16="http://schemas.microsoft.com/office/drawing/2014/main" id="{98D941DD-A9C7-47E2-A88C-7E49E23514FB}"/>
               </a:ext>
             </a:extLst>
           </p:cNvPr>
@@ -10509,7 +11154,7 @@
           <p:cNvPr id="6" name="Formulou o recorte, implementou, testou e redigiu.">
             <a:extLst xmlns:a="http://schemas.openxmlformats.org/drawingml/2006/main">
               <a:ext uri="{FF2B5EF4-FFF2-40B4-BE49-F238E27FC236}">
-                <a16:creationId xmlns:a16="http://schemas.microsoft.com/office/drawing/2014/main" id="{671563A0-FC56-4B84-BDD6-237C803D78F4}"/>
+                <a16:creationId xmlns:a16="http://schemas.microsoft.com/office/drawing/2014/main" id="{EF3476CE-6354-45D2-9641-4973CC2D0B04}"/>
               </a:ext>
             </a:extLst>
           </p:cNvPr>
@@ -10566,7 +11211,7 @@
           <p:cNvPr id="7" name="Gemini">
             <a:extLst xmlns:a="http://schemas.openxmlformats.org/drawingml/2006/main">
               <a:ext uri="{FF2B5EF4-FFF2-40B4-BE49-F238E27FC236}">
-                <a16:creationId xmlns:a16="http://schemas.microsoft.com/office/drawing/2014/main" id="{92A1B11A-8B85-4D97-94A1-D7B50091B50B}"/>
+                <a16:creationId xmlns:a16="http://schemas.microsoft.com/office/drawing/2014/main" id="{AC98FD3E-8378-4FC2-BBD0-8647F9061B09}"/>
               </a:ext>
             </a:extLst>
           </p:cNvPr>
@@ -10623,7 +11268,7 @@
           <p:cNvPr id="8" name="Revisou a dissertação e, depois, o manuscrito.">
             <a:extLst xmlns:a="http://schemas.openxmlformats.org/drawingml/2006/main">
               <a:ext uri="{FF2B5EF4-FFF2-40B4-BE49-F238E27FC236}">
-                <a16:creationId xmlns:a16="http://schemas.microsoft.com/office/drawing/2014/main" id="{5180A272-5306-4F29-9633-164AC65AAF51}"/>
+                <a16:creationId xmlns:a16="http://schemas.microsoft.com/office/drawing/2014/main" id="{1C3C666F-2101-4DA4-82D5-44B4F3A133FC}"/>
               </a:ext>
             </a:extLst>
           </p:cNvPr>
@@ -10678,7 +11323,7 @@
     </p:spTree>
     <p:extLst>
       <p:ext uri="{BB962C8B-B14F-4D97-AF65-F5344CB8AC3E}">
-        <p14:creationId xmlns:p14="http://schemas.microsoft.com/office/powerpoint/2010/main" val="646593658"/>
+        <p14:creationId xmlns:p14="http://schemas.microsoft.com/office/powerpoint/2010/main" val="174234429"/>
       </p:ext>
     </p:extLst>
   </p:cSld>
@@ -10709,7 +11354,7 @@
           <p:cNvPr id="4" name="Cronologia do experimento">
             <a:extLst xmlns:a="http://schemas.openxmlformats.org/drawingml/2006/main">
               <a:ext uri="{FF2B5EF4-FFF2-40B4-BE49-F238E27FC236}">
-                <a16:creationId xmlns:a16="http://schemas.microsoft.com/office/drawing/2014/main" id="{41E351AB-25C9-4C8C-B1B3-D757DCF42012}"/>
+                <a16:creationId xmlns:a16="http://schemas.microsoft.com/office/drawing/2014/main" id="{780246EE-3F30-493B-BF8E-B8CCAD3852C3}"/>
               </a:ext>
             </a:extLst>
           </p:cNvPr>
@@ -10763,10 +11408,10 @@
       </p:sp>
       <p:sp>
         <p:nvSpPr>
-          <p:cNvPr id="2" name="5 / 20">
-            <a:extLst xmlns:a="http://schemas.openxmlformats.org/drawingml/2006/main">
-              <a:ext uri="{FF2B5EF4-FFF2-40B4-BE49-F238E27FC236}">
-                <a16:creationId xmlns:a16="http://schemas.microsoft.com/office/drawing/2014/main" id="{9F87978B-9585-4045-BF0A-2BA37723B08E}"/>
+          <p:cNvPr id="2" name="5 / 21">
+            <a:extLst xmlns:a="http://schemas.openxmlformats.org/drawingml/2006/main">
+              <a:ext uri="{FF2B5EF4-FFF2-40B4-BE49-F238E27FC236}">
+                <a16:creationId xmlns:a16="http://schemas.microsoft.com/office/drawing/2014/main" id="{4D3E801F-4289-4965-B7F0-CBFC6AD0B87D}"/>
               </a:ext>
             </a:extLst>
           </p:cNvPr>
@@ -10813,7 +11458,7 @@
                 <a:ea typeface="Arial"/>
                 <a:cs typeface="Arial"/>
               </a:rPr>
-              <a:t>5 / 20</a:t>
+              <a:t>5 / 21</a:t>
             </a:r>
           </a:p>
         </p:txBody>
@@ -11143,7 +11788,7 @@
     </p:spTree>
     <p:extLst>
       <p:ext uri="{BB962C8B-B14F-4D97-AF65-F5344CB8AC3E}">
-        <p14:creationId xmlns:p14="http://schemas.microsoft.com/office/powerpoint/2010/main" val="1398126000"/>
+        <p14:creationId xmlns:p14="http://schemas.microsoft.com/office/powerpoint/2010/main" val="1257611860"/>
       </p:ext>
     </p:extLst>
   </p:cSld>
@@ -11174,7 +11819,7 @@
           <p:cNvPr id="10" name="Como o agente procurou novidade">
             <a:extLst xmlns:a="http://schemas.openxmlformats.org/drawingml/2006/main">
               <a:ext uri="{FF2B5EF4-FFF2-40B4-BE49-F238E27FC236}">
-                <a16:creationId xmlns:a16="http://schemas.microsoft.com/office/drawing/2014/main" id="{BA3A3177-B92E-43F2-A49F-0B9F966E9C3D}"/>
+                <a16:creationId xmlns:a16="http://schemas.microsoft.com/office/drawing/2014/main" id="{B24555EC-12FD-4C01-A3D8-285D54AEE006}"/>
               </a:ext>
             </a:extLst>
           </p:cNvPr>
@@ -11228,10 +11873,10 @@
       </p:sp>
       <p:sp>
         <p:nvSpPr>
-          <p:cNvPr id="2" name="6 / 20">
-            <a:extLst xmlns:a="http://schemas.openxmlformats.org/drawingml/2006/main">
-              <a:ext uri="{FF2B5EF4-FFF2-40B4-BE49-F238E27FC236}">
-                <a16:creationId xmlns:a16="http://schemas.microsoft.com/office/drawing/2014/main" id="{12822286-2F9A-47A4-B7C1-6809E2DFDE62}"/>
+          <p:cNvPr id="2" name="6 / 21">
+            <a:extLst xmlns:a="http://schemas.openxmlformats.org/drawingml/2006/main">
+              <a:ext uri="{FF2B5EF4-FFF2-40B4-BE49-F238E27FC236}">
+                <a16:creationId xmlns:a16="http://schemas.microsoft.com/office/drawing/2014/main" id="{7861FA56-FDBD-4E0C-9633-308E96E901D0}"/>
               </a:ext>
             </a:extLst>
           </p:cNvPr>
@@ -11278,7 +11923,7 @@
                 <a:ea typeface="Arial"/>
                 <a:cs typeface="Arial"/>
               </a:rPr>
-              <a:t>6 / 20</a:t>
+              <a:t>6 / 21</a:t>
             </a:r>
           </a:p>
         </p:txBody>
@@ -11288,7 +11933,7 @@
           <p:cNvPr id="3" name="Antecedentes">
             <a:extLst xmlns:a="http://schemas.openxmlformats.org/drawingml/2006/main">
               <a:ext uri="{FF2B5EF4-FFF2-40B4-BE49-F238E27FC236}">
-                <a16:creationId xmlns:a16="http://schemas.microsoft.com/office/drawing/2014/main" id="{FC549E88-6C4B-45C8-B9C9-2F3629AEDD37}"/>
+                <a16:creationId xmlns:a16="http://schemas.microsoft.com/office/drawing/2014/main" id="{DF682C25-8202-47B5-A829-18A7EEFCE86D}"/>
               </a:ext>
             </a:extLst>
           </p:cNvPr>
@@ -11345,7 +11990,7 @@
           <p:cNvPr id="4" name="Reconheceu resultados já publicados.">
             <a:extLst xmlns:a="http://schemas.openxmlformats.org/drawingml/2006/main">
               <a:ext uri="{FF2B5EF4-FFF2-40B4-BE49-F238E27FC236}">
-                <a16:creationId xmlns:a16="http://schemas.microsoft.com/office/drawing/2014/main" id="{5D4C16E6-0077-46B3-9CD9-F650D915E89F}"/>
+                <a16:creationId xmlns:a16="http://schemas.microsoft.com/office/drawing/2014/main" id="{07EE605D-A510-4D56-8462-E55EA17EC896}"/>
               </a:ext>
             </a:extLst>
           </p:cNvPr>
@@ -11402,7 +12047,7 @@
           <p:cNvPr id="5" name="Alternativas">
             <a:extLst xmlns:a="http://schemas.openxmlformats.org/drawingml/2006/main">
               <a:ext uri="{FF2B5EF4-FFF2-40B4-BE49-F238E27FC236}">
-                <a16:creationId xmlns:a16="http://schemas.microsoft.com/office/drawing/2014/main" id="{A0776262-1487-45F4-B7A4-68A3F33A28FE}"/>
+                <a16:creationId xmlns:a16="http://schemas.microsoft.com/office/drawing/2014/main" id="{4C02B805-C8F9-4E16-BF3B-A29B43B8E161}"/>
               </a:ext>
             </a:extLst>
           </p:cNvPr>
@@ -11459,7 +12104,7 @@
           <p:cNvPr id="6" name="Comparou possíveis extensões teóricas e numéricas.">
             <a:extLst xmlns:a="http://schemas.openxmlformats.org/drawingml/2006/main">
               <a:ext uri="{FF2B5EF4-FFF2-40B4-BE49-F238E27FC236}">
-                <a16:creationId xmlns:a16="http://schemas.microsoft.com/office/drawing/2014/main" id="{6737E393-AFEE-4DDE-9013-29E8D14B793D}"/>
+                <a16:creationId xmlns:a16="http://schemas.microsoft.com/office/drawing/2014/main" id="{0D362700-BE4A-49D1-BD16-08C3B7877765}"/>
               </a:ext>
             </a:extLst>
           </p:cNvPr>
@@ -11516,7 +12161,7 @@
           <p:cNvPr id="7" name="Recorte">
             <a:extLst xmlns:a="http://schemas.openxmlformats.org/drawingml/2006/main">
               <a:ext uri="{FF2B5EF4-FFF2-40B4-BE49-F238E27FC236}">
-                <a16:creationId xmlns:a16="http://schemas.microsoft.com/office/drawing/2014/main" id="{CAB4AF82-042F-4067-8823-4A5EAA24222D}"/>
+                <a16:creationId xmlns:a16="http://schemas.microsoft.com/office/drawing/2014/main" id="{D409BAC9-9C66-445D-A178-34D4F47443D8}"/>
               </a:ext>
             </a:extLst>
           </p:cNvPr>
@@ -11573,7 +12218,7 @@
           <p:cNvPr id="8" name="Escolheu testar quando simplificações mudam uma análise">
             <a:extLst xmlns:a="http://schemas.openxmlformats.org/drawingml/2006/main">
               <a:ext uri="{FF2B5EF4-FFF2-40B4-BE49-F238E27FC236}">
-                <a16:creationId xmlns:a16="http://schemas.microsoft.com/office/drawing/2014/main" id="{50C92414-BE01-4497-BE58-01A2FB7CCA22}"/>
+                <a16:creationId xmlns:a16="http://schemas.microsoft.com/office/drawing/2014/main" id="{28E81D44-BFAE-4B2B-BE17-2186D855C791}"/>
               </a:ext>
             </a:extLst>
           </p:cNvPr>
@@ -11630,7 +12275,7 @@
           <p:cNvPr id="9" name="Originalidade candidata, ainda sujeita a avaliação espe">
             <a:extLst xmlns:a="http://schemas.openxmlformats.org/drawingml/2006/main">
               <a:ext uri="{FF2B5EF4-FFF2-40B4-BE49-F238E27FC236}">
-                <a16:creationId xmlns:a16="http://schemas.microsoft.com/office/drawing/2014/main" id="{2732370E-6BF7-4E60-9ED5-937DE5CEF5CF}"/>
+                <a16:creationId xmlns:a16="http://schemas.microsoft.com/office/drawing/2014/main" id="{C317C699-410A-4217-A571-07CD9F61546C}"/>
               </a:ext>
             </a:extLst>
           </p:cNvPr>
@@ -11685,7 +12330,7 @@
     </p:spTree>
     <p:extLst>
       <p:ext uri="{BB962C8B-B14F-4D97-AF65-F5344CB8AC3E}">
-        <p14:creationId xmlns:p14="http://schemas.microsoft.com/office/powerpoint/2010/main" val="800882100"/>
+        <p14:creationId xmlns:p14="http://schemas.microsoft.com/office/powerpoint/2010/main" val="1742262349"/>
       </p:ext>
     </p:extLst>
   </p:cSld>
@@ -11716,7 +12361,7 @@
           <p:cNvPr id="10" name="Execução orientada por etapas">
             <a:extLst xmlns:a="http://schemas.openxmlformats.org/drawingml/2006/main">
               <a:ext uri="{FF2B5EF4-FFF2-40B4-BE49-F238E27FC236}">
-                <a16:creationId xmlns:a16="http://schemas.microsoft.com/office/drawing/2014/main" id="{5B28CC53-3080-4ED6-B035-3CC504CEBEC8}"/>
+                <a16:creationId xmlns:a16="http://schemas.microsoft.com/office/drawing/2014/main" id="{A8E6E145-C98D-4D38-A5D1-383A2238B33E}"/>
               </a:ext>
             </a:extLst>
           </p:cNvPr>
@@ -11770,10 +12415,10 @@
       </p:sp>
       <p:sp>
         <p:nvSpPr>
-          <p:cNvPr id="2" name="7 / 20">
-            <a:extLst xmlns:a="http://schemas.openxmlformats.org/drawingml/2006/main">
-              <a:ext uri="{FF2B5EF4-FFF2-40B4-BE49-F238E27FC236}">
-                <a16:creationId xmlns:a16="http://schemas.microsoft.com/office/drawing/2014/main" id="{D0F9D654-D313-4BBF-B523-77F7418B6F4B}"/>
+          <p:cNvPr id="2" name="7 / 21">
+            <a:extLst xmlns:a="http://schemas.openxmlformats.org/drawingml/2006/main">
+              <a:ext uri="{FF2B5EF4-FFF2-40B4-BE49-F238E27FC236}">
+                <a16:creationId xmlns:a16="http://schemas.microsoft.com/office/drawing/2014/main" id="{1A6D1E60-5FC0-46D7-94E5-90BF215F99DE}"/>
               </a:ext>
             </a:extLst>
           </p:cNvPr>
@@ -11820,7 +12465,7 @@
                 <a:ea typeface="Arial"/>
                 <a:cs typeface="Arial"/>
               </a:rPr>
-              <a:t>7 / 20</a:t>
+              <a:t>7 / 21</a:t>
             </a:r>
           </a:p>
         </p:txBody>
@@ -11830,7 +12475,7 @@
           <p:cNvPr id="3" name="13 marcos concluídos">
             <a:extLst xmlns:a="http://schemas.openxmlformats.org/drawingml/2006/main">
               <a:ext uri="{FF2B5EF4-FFF2-40B4-BE49-F238E27FC236}">
-                <a16:creationId xmlns:a16="http://schemas.microsoft.com/office/drawing/2014/main" id="{F4BABBCF-8020-4CCE-B2EC-6D90F5B1F6F0}"/>
+                <a16:creationId xmlns:a16="http://schemas.microsoft.com/office/drawing/2014/main" id="{6BE23FC5-D5A1-4A4E-8029-386D82AB29D2}"/>
               </a:ext>
             </a:extLst>
           </p:cNvPr>
@@ -11887,7 +12532,7 @@
           <p:cNvPr id="4" name="Construção">
             <a:extLst xmlns:a="http://schemas.openxmlformats.org/drawingml/2006/main">
               <a:ext uri="{FF2B5EF4-FFF2-40B4-BE49-F238E27FC236}">
-                <a16:creationId xmlns:a16="http://schemas.microsoft.com/office/drawing/2014/main" id="{741D384E-13A0-4633-8763-30147052B33B}"/>
+                <a16:creationId xmlns:a16="http://schemas.microsoft.com/office/drawing/2014/main" id="{F5BFB6F2-3492-42C0-A7F0-20A95208BDF7}"/>
               </a:ext>
             </a:extLst>
           </p:cNvPr>
@@ -11944,7 +12589,7 @@
           <p:cNvPr id="5" name="Revisão, base teórica, modelo e simulador.">
             <a:extLst xmlns:a="http://schemas.openxmlformats.org/drawingml/2006/main">
               <a:ext uri="{FF2B5EF4-FFF2-40B4-BE49-F238E27FC236}">
-                <a16:creationId xmlns:a16="http://schemas.microsoft.com/office/drawing/2014/main" id="{F4A52E60-4880-4AB6-B0F7-560D91A55816}"/>
+                <a16:creationId xmlns:a16="http://schemas.microsoft.com/office/drawing/2014/main" id="{6F57C188-2787-4077-A291-168E9A878B99}"/>
               </a:ext>
             </a:extLst>
           </p:cNvPr>
@@ -12001,7 +12646,7 @@
           <p:cNvPr id="6" name="Experimentos">
             <a:extLst xmlns:a="http://schemas.openxmlformats.org/drawingml/2006/main">
               <a:ext uri="{FF2B5EF4-FFF2-40B4-BE49-F238E27FC236}">
-                <a16:creationId xmlns:a16="http://schemas.microsoft.com/office/drawing/2014/main" id="{3679A9EF-BD2D-4B8B-A6F8-981F36D97AEA}"/>
+                <a16:creationId xmlns:a16="http://schemas.microsoft.com/office/drawing/2014/main" id="{BB19D15B-D2E3-43F0-9577-B95AF8CAD5F8}"/>
               </a:ext>
             </a:extLst>
           </p:cNvPr>
@@ -12058,7 +12703,7 @@
           <p:cNvPr id="7" name="Calibração, comparações e robustez.">
             <a:extLst xmlns:a="http://schemas.openxmlformats.org/drawingml/2006/main">
               <a:ext uri="{FF2B5EF4-FFF2-40B4-BE49-F238E27FC236}">
-                <a16:creationId xmlns:a16="http://schemas.microsoft.com/office/drawing/2014/main" id="{115A2D5A-C213-4246-AB0A-D0E2164AE784}"/>
+                <a16:creationId xmlns:a16="http://schemas.microsoft.com/office/drawing/2014/main" id="{5B5DBB1C-F407-4F4B-9FCE-77031F6AA0F1}"/>
               </a:ext>
             </a:extLst>
           </p:cNvPr>
@@ -12115,7 +12760,7 @@
           <p:cNvPr id="8" name="Consolidação">
             <a:extLst xmlns:a="http://schemas.openxmlformats.org/drawingml/2006/main">
               <a:ext uri="{FF2B5EF4-FFF2-40B4-BE49-F238E27FC236}">
-                <a16:creationId xmlns:a16="http://schemas.microsoft.com/office/drawing/2014/main" id="{66830B84-8C40-461E-81EE-798645E66B12}"/>
+                <a16:creationId xmlns:a16="http://schemas.microsoft.com/office/drawing/2014/main" id="{E994BFD6-2193-4D44-90B0-45CA0FDA5FD1}"/>
               </a:ext>
             </a:extLst>
           </p:cNvPr>
@@ -12172,7 +12817,7 @@
           <p:cNvPr id="9" name="Reprodução, dissertação e manuscrito.">
             <a:extLst xmlns:a="http://schemas.openxmlformats.org/drawingml/2006/main">
               <a:ext uri="{FF2B5EF4-FFF2-40B4-BE49-F238E27FC236}">
-                <a16:creationId xmlns:a16="http://schemas.microsoft.com/office/drawing/2014/main" id="{164EAF93-9A03-4AA4-B14F-A1DE9074EB00}"/>
+                <a16:creationId xmlns:a16="http://schemas.microsoft.com/office/drawing/2014/main" id="{22E44957-D510-4AE9-9A0C-8731B195A777}"/>
               </a:ext>
             </a:extLst>
           </p:cNvPr>
@@ -12227,7 +12872,7 @@
     </p:spTree>
     <p:extLst>
       <p:ext uri="{BB962C8B-B14F-4D97-AF65-F5344CB8AC3E}">
-        <p14:creationId xmlns:p14="http://schemas.microsoft.com/office/powerpoint/2010/main" val="883278224"/>
+        <p14:creationId xmlns:p14="http://schemas.microsoft.com/office/powerpoint/2010/main" val="505059430"/>
       </p:ext>
     </p:extLst>
   </p:cSld>
@@ -12258,7 +12903,7 @@
           <p:cNvPr id="7" name="Os produtos do estudo">
             <a:extLst xmlns:a="http://schemas.openxmlformats.org/drawingml/2006/main">
               <a:ext uri="{FF2B5EF4-FFF2-40B4-BE49-F238E27FC236}">
-                <a16:creationId xmlns:a16="http://schemas.microsoft.com/office/drawing/2014/main" id="{C69D5A12-B665-4093-A946-C9D00DCA1B75}"/>
+                <a16:creationId xmlns:a16="http://schemas.microsoft.com/office/drawing/2014/main" id="{8826D21A-F69C-47FC-B2CF-47E79DEA7CBB}"/>
               </a:ext>
             </a:extLst>
           </p:cNvPr>
@@ -12312,10 +12957,10 @@
       </p:sp>
       <p:sp>
         <p:nvSpPr>
-          <p:cNvPr id="2" name="8 / 20">
-            <a:extLst xmlns:a="http://schemas.openxmlformats.org/drawingml/2006/main">
-              <a:ext uri="{FF2B5EF4-FFF2-40B4-BE49-F238E27FC236}">
-                <a16:creationId xmlns:a16="http://schemas.microsoft.com/office/drawing/2014/main" id="{FE12F169-F55F-44A9-A43C-1F504B30C4AD}"/>
+          <p:cNvPr id="2" name="8 / 21">
+            <a:extLst xmlns:a="http://schemas.openxmlformats.org/drawingml/2006/main">
+              <a:ext uri="{FF2B5EF4-FFF2-40B4-BE49-F238E27FC236}">
+                <a16:creationId xmlns:a16="http://schemas.microsoft.com/office/drawing/2014/main" id="{006F33B0-E97F-4401-9359-88C374F28208}"/>
               </a:ext>
             </a:extLst>
           </p:cNvPr>
@@ -12362,7 +13007,7 @@
                 <a:ea typeface="Arial"/>
                 <a:cs typeface="Arial"/>
               </a:rPr>
-              <a:t>8 / 20</a:t>
+              <a:t>8 / 21</a:t>
             </a:r>
           </a:p>
         </p:txBody>
@@ -12376,7 +13021,7 @@
           <p:nvPr/>
         </p:nvPicPr>
         <p:blipFill>
-          <a:blip xmlns:r="http://schemas.openxmlformats.org/officeDocument/2006/relationships" xmlns:a="http://schemas.openxmlformats.org/drawingml/2006/main" r:embed="Rc77d9b661fbe4a5a"/>
+          <a:blip xmlns:r="http://schemas.openxmlformats.org/officeDocument/2006/relationships" xmlns:a="http://schemas.openxmlformats.org/drawingml/2006/main" r:embed="Rce3cbe2558134ea8"/>
           <a:stretch xmlns:a="http://schemas.openxmlformats.org/drawingml/2006/main"/>
         </p:blipFill>
         <p:spPr>
@@ -12398,7 +13043,7 @@
           <p:nvPr/>
         </p:nvPicPr>
         <p:blipFill>
-          <a:blip xmlns:r="http://schemas.openxmlformats.org/officeDocument/2006/relationships" xmlns:a="http://schemas.openxmlformats.org/drawingml/2006/main" r:embed="R44e796c87b514e19"/>
+          <a:blip xmlns:r="http://schemas.openxmlformats.org/officeDocument/2006/relationships" xmlns:a="http://schemas.openxmlformats.org/drawingml/2006/main" r:embed="R838a8572a6254d68"/>
           <a:stretch xmlns:a="http://schemas.openxmlformats.org/drawingml/2006/main"/>
         </p:blipFill>
         <p:spPr>
@@ -12416,7 +13061,7 @@
           <p:cNvPr id="5" name="Dissertação: 167 páginas">
             <a:extLst xmlns:a="http://schemas.openxmlformats.org/drawingml/2006/main">
               <a:ext uri="{FF2B5EF4-FFF2-40B4-BE49-F238E27FC236}">
-                <a16:creationId xmlns:a16="http://schemas.microsoft.com/office/drawing/2014/main" id="{D9F7A63E-3D99-4EFD-9C45-81D120010242}"/>
+                <a16:creationId xmlns:a16="http://schemas.microsoft.com/office/drawing/2014/main" id="{DA52EF5D-536D-4C87-B334-1C9CCC7A0B10}"/>
               </a:ext>
             </a:extLst>
           </p:cNvPr>
@@ -12473,7 +13118,7 @@
           <p:cNvPr id="6" name="Artigo: 9 páginas">
             <a:extLst xmlns:a="http://schemas.openxmlformats.org/drawingml/2006/main">
               <a:ext uri="{FF2B5EF4-FFF2-40B4-BE49-F238E27FC236}">
-                <a16:creationId xmlns:a16="http://schemas.microsoft.com/office/drawing/2014/main" id="{7A9629F8-AB35-4AFA-A9CF-EAAB4B9AF02A}"/>
+                <a16:creationId xmlns:a16="http://schemas.microsoft.com/office/drawing/2014/main" id="{E66B55E5-A44C-4058-A4DE-7973BA808870}"/>
               </a:ext>
             </a:extLst>
           </p:cNvPr>
@@ -12528,7 +13173,7 @@
     </p:spTree>
     <p:extLst>
       <p:ext uri="{BB962C8B-B14F-4D97-AF65-F5344CB8AC3E}">
-        <p14:creationId xmlns:p14="http://schemas.microsoft.com/office/powerpoint/2010/main" val="1383856530"/>
+        <p14:creationId xmlns:p14="http://schemas.microsoft.com/office/powerpoint/2010/main" val="401973724"/>
       </p:ext>
     </p:extLst>
   </p:cSld>
@@ -12559,7 +13204,7 @@
           <p:cNvPr id="9" name="Escala do trabalho executado">
             <a:extLst xmlns:a="http://schemas.openxmlformats.org/drawingml/2006/main">
               <a:ext uri="{FF2B5EF4-FFF2-40B4-BE49-F238E27FC236}">
-                <a16:creationId xmlns:a16="http://schemas.microsoft.com/office/drawing/2014/main" id="{B32DB491-263C-4F8E-8883-3C0DB60D999F}"/>
+                <a16:creationId xmlns:a16="http://schemas.microsoft.com/office/drawing/2014/main" id="{260F6E27-2EF1-49D8-AB2D-321C2D92C878}"/>
               </a:ext>
             </a:extLst>
           </p:cNvPr>
@@ -12613,10 +13258,10 @@
       </p:sp>
       <p:sp>
         <p:nvSpPr>
-          <p:cNvPr id="2" name="9 / 20">
-            <a:extLst xmlns:a="http://schemas.openxmlformats.org/drawingml/2006/main">
-              <a:ext uri="{FF2B5EF4-FFF2-40B4-BE49-F238E27FC236}">
-                <a16:creationId xmlns:a16="http://schemas.microsoft.com/office/drawing/2014/main" id="{2B42AD2B-9887-4E16-887C-63CD8CD35A87}"/>
+          <p:cNvPr id="2" name="9 / 21">
+            <a:extLst xmlns:a="http://schemas.openxmlformats.org/drawingml/2006/main">
+              <a:ext uri="{FF2B5EF4-FFF2-40B4-BE49-F238E27FC236}">
+                <a16:creationId xmlns:a16="http://schemas.microsoft.com/office/drawing/2014/main" id="{6CCE739D-E99A-4ECC-A35F-08BAD01C2EEF}"/>
               </a:ext>
             </a:extLst>
           </p:cNvPr>
@@ -12663,7 +13308,7 @@
                 <a:ea typeface="Arial"/>
                 <a:cs typeface="Arial"/>
               </a:rPr>
-              <a:t>9 / 20</a:t>
+              <a:t>9 / 21</a:t>
             </a:r>
           </a:p>
         </p:txBody>
@@ -12680,7 +13325,7 @@
         </p:xfrm>
         <a:graphic xmlns:a="http://schemas.openxmlformats.org/drawingml/2006/main">
           <a:graphicData uri="http://schemas.openxmlformats.org/drawingml/2006/chart">
-            <c:chart xmlns:r="http://schemas.openxmlformats.org/officeDocument/2006/relationships" xmlns:c="http://schemas.openxmlformats.org/drawingml/2006/chart" r:id="Rf0a175a08ee74c00"/>
+            <c:chart xmlns:r="http://schemas.openxmlformats.org/officeDocument/2006/relationships" xmlns:c="http://schemas.openxmlformats.org/drawingml/2006/chart" r:id="Ra33cf8b887984582"/>
           </a:graphicData>
         </a:graphic>
       </p:graphicFrame>
@@ -12689,7 +13334,7 @@
           <p:cNvPr id="4" name="26.069">
             <a:extLst xmlns:a="http://schemas.openxmlformats.org/drawingml/2006/main">
               <a:ext uri="{FF2B5EF4-FFF2-40B4-BE49-F238E27FC236}">
-                <a16:creationId xmlns:a16="http://schemas.microsoft.com/office/drawing/2014/main" id="{F5DECC08-ADF2-493C-8B05-B93861D54895}"/>
+                <a16:creationId xmlns:a16="http://schemas.microsoft.com/office/drawing/2014/main" id="{D96F4AB7-997A-4EAB-A1FA-B1DC5041CD01}"/>
               </a:ext>
             </a:extLst>
           </p:cNvPr>
@@ -12746,7 +13391,7 @@
           <p:cNvPr id="5" name="linhas em módulos,&#10;scripts e testes">
             <a:extLst xmlns:a="http://schemas.openxmlformats.org/drawingml/2006/main">
               <a:ext uri="{FF2B5EF4-FFF2-40B4-BE49-F238E27FC236}">
-                <a16:creationId xmlns:a16="http://schemas.microsoft.com/office/drawing/2014/main" id="{D3B300AE-68B7-4840-AA50-22EB35ACA6ED}"/>
+                <a16:creationId xmlns:a16="http://schemas.microsoft.com/office/drawing/2014/main" id="{1591094B-FDB2-4E70-8B98-10BAB0F46C7C}"/>
               </a:ext>
             </a:extLst>
           </p:cNvPr>
@@ -12826,7 +13471,7 @@
           <p:cNvPr id="6" name="45.528">
             <a:extLst xmlns:a="http://schemas.openxmlformats.org/drawingml/2006/main">
               <a:ext uri="{FF2B5EF4-FFF2-40B4-BE49-F238E27FC236}">
-                <a16:creationId xmlns:a16="http://schemas.microsoft.com/office/drawing/2014/main" id="{B429D73C-1568-4FFF-9D16-022ECACE81C9}"/>
+                <a16:creationId xmlns:a16="http://schemas.microsoft.com/office/drawing/2014/main" id="{16FE7A0C-7050-4E4C-BA65-579ECAAF3A42}"/>
               </a:ext>
             </a:extLst>
           </p:cNvPr>
@@ -12883,7 +13528,7 @@
           <p:cNvPr id="7" name="análises principais">
             <a:extLst xmlns:a="http://schemas.openxmlformats.org/drawingml/2006/main">
               <a:ext uri="{FF2B5EF4-FFF2-40B4-BE49-F238E27FC236}">
-                <a16:creationId xmlns:a16="http://schemas.microsoft.com/office/drawing/2014/main" id="{470CAA9E-9E04-4946-92C9-FE7BA4F8EBF8}"/>
+                <a16:creationId xmlns:a16="http://schemas.microsoft.com/office/drawing/2014/main" id="{C0A00DEC-BCA2-4392-8AD8-977ACF25282D}"/>
               </a:ext>
             </a:extLst>
           </p:cNvPr>
@@ -12940,7 +13585,7 @@
           <p:cNvPr id="8" name="Base histórica v1.0.0. Quantidade mede execução, não qu">
             <a:extLst xmlns:a="http://schemas.openxmlformats.org/drawingml/2006/main">
               <a:ext uri="{FF2B5EF4-FFF2-40B4-BE49-F238E27FC236}">
-                <a16:creationId xmlns:a16="http://schemas.microsoft.com/office/drawing/2014/main" id="{D11F96E0-EF4E-43E2-B3B1-3930495F88D1}"/>
+                <a16:creationId xmlns:a16="http://schemas.microsoft.com/office/drawing/2014/main" id="{D16B2F21-375C-4503-964A-3C60519E17D9}"/>
               </a:ext>
             </a:extLst>
           </p:cNvPr>
@@ -12995,7 +13640,7 @@
     </p:spTree>
     <p:extLst>
       <p:ext uri="{BB962C8B-B14F-4D97-AF65-F5344CB8AC3E}">
-        <p14:creationId xmlns:p14="http://schemas.microsoft.com/office/powerpoint/2010/main" val="356054503"/>
+        <p14:creationId xmlns:p14="http://schemas.microsoft.com/office/powerpoint/2010/main" val="1277448842"/>
       </p:ext>
     </p:extLst>
   </p:cSld>
